--- a/workshop/dist/dekitanokakera-workshop.pptx
+++ b/workshop/dist/dekitanokakera-workshop.pptx
@@ -4328,7 +4328,7 @@
     <p:bg>
       <p:bgPr>
         <a:solidFill>
-          <a:srgbClr val="5C4636"/>
+          <a:srgbClr val="FFF8F0"/>
         </a:solidFill>
       </p:bgPr>
     </p:bg>
@@ -4471,7 +4471,7 @@
             <a:avLst/>
           </a:prstGeom>
           <a:solidFill>
-            <a:srgbClr val="3A2E26"/>
+            <a:srgbClr val="FDEEE7"/>
           </a:solidFill>
           <a:ln/>
         </p:spPr>
@@ -4539,7 +4539,7 @@
             <a:r>
               <a:rPr lang="en-US" sz="1600" b="1" spc="100" kern="0" dirty="0">
                 <a:solidFill>
-                  <a:srgbClr val="CE9A2E"/>
+                  <a:srgbClr val="DD6E4E"/>
                 </a:solidFill>
                 <a:latin typeface="Meiryo" pitchFamily="34" charset="0"/>
                 <a:ea typeface="Meiryo" pitchFamily="34" charset="-122"/>
@@ -4578,7 +4578,7 @@
             <a:r>
               <a:rPr lang="en-US" sz="3700" b="1" dirty="0">
                 <a:solidFill>
-                  <a:srgbClr val="FFFFFF"/>
+                  <a:srgbClr val="4A3B30"/>
                 </a:solidFill>
                 <a:latin typeface="Meiryo" pitchFamily="34" charset="0"/>
                 <a:ea typeface="Meiryo" pitchFamily="34" charset="-122"/>
@@ -4659,7 +4659,7 @@
             <a:r>
               <a:rPr lang="en-US" sz="1700" dirty="0">
                 <a:solidFill>
-                  <a:srgbClr val="FBEFE4"/>
+                  <a:srgbClr val="8A7A6C"/>
                 </a:solidFill>
                 <a:latin typeface="Meiryo" pitchFamily="34" charset="0"/>
                 <a:ea typeface="Meiryo" pitchFamily="34" charset="-122"/>
@@ -4679,7 +4679,7 @@
             <a:r>
               <a:rPr lang="en-US" sz="1700" dirty="0">
                 <a:solidFill>
-                  <a:srgbClr val="FBEFE4"/>
+                  <a:srgbClr val="8A7A6C"/>
                 </a:solidFill>
                 <a:latin typeface="Meiryo" pitchFamily="34" charset="0"/>
                 <a:ea typeface="Meiryo" pitchFamily="34" charset="-122"/>
@@ -4699,7 +4699,7 @@
             <a:r>
               <a:rPr lang="en-US" sz="1700" dirty="0">
                 <a:solidFill>
-                  <a:srgbClr val="FBEFE4"/>
+                  <a:srgbClr val="8A7A6C"/>
                 </a:solidFill>
                 <a:latin typeface="Meiryo" pitchFamily="34" charset="0"/>
                 <a:ea typeface="Meiryo" pitchFamily="34" charset="-122"/>
@@ -4738,7 +4738,7 @@
             <a:r>
               <a:rPr lang="en-US" sz="1250" spc="200" kern="0" dirty="0">
                 <a:solidFill>
-                  <a:srgbClr val="D8C4B3"/>
+                  <a:srgbClr val="B7A99A"/>
                 </a:solidFill>
                 <a:latin typeface="Meiryo" pitchFamily="34" charset="0"/>
                 <a:ea typeface="Meiryo" pitchFamily="34" charset="-122"/>
@@ -24072,7 +24072,7 @@
     <p:bg>
       <p:bgPr>
         <a:solidFill>
-          <a:srgbClr val="5C4636"/>
+          <a:srgbClr val="FFF8F0"/>
         </a:solidFill>
       </p:bgPr>
     </p:bg>
@@ -24161,7 +24161,7 @@
             <a:r>
               <a:rPr lang="en-US" sz="1500" b="1" spc="300" kern="0" dirty="0">
                 <a:solidFill>
-                  <a:srgbClr val="CE9A2E"/>
+                  <a:srgbClr val="DD6E4E"/>
                 </a:solidFill>
                 <a:latin typeface="Meiryo" pitchFamily="34" charset="0"/>
                 <a:ea typeface="Meiryo" pitchFamily="34" charset="-122"/>
@@ -24206,7 +24206,7 @@
             <a:r>
               <a:rPr lang="en-US" sz="2050" dirty="0">
                 <a:solidFill>
-                  <a:srgbClr val="FBEFE4"/>
+                  <a:srgbClr val="4A3B30"/>
                 </a:solidFill>
               </a:rPr>
               <a:t>この90日間、一度も止まらなくていい。完璧じゃなくていい。</a:t>
@@ -24226,7 +24226,7 @@
             <a:r>
               <a:rPr lang="en-US" sz="2050" dirty="0">
                 <a:solidFill>
-                  <a:srgbClr val="FBEFE4"/>
+                  <a:srgbClr val="4A3B30"/>
                 </a:solidFill>
               </a:rPr>
               <a:t>できない日があっていい。迷っていい。誰かに頼っていい。</a:t>
@@ -24246,7 +24246,7 @@
             <a:r>
               <a:rPr lang="en-US" sz="1850" dirty="0">
                 <a:solidFill>
-                  <a:srgbClr val="D8C4B3"/>
+                  <a:srgbClr val="8A7A6C"/>
                 </a:solidFill>
               </a:rPr>
               <a:t>ただ、一つだけ。</a:t>
@@ -24266,7 +24266,7 @@
             <a:r>
               <a:rPr lang="en-US" sz="2550" b="1" dirty="0">
                 <a:solidFill>
-                  <a:srgbClr val="F0876A"/>
+                  <a:srgbClr val="DD6E4E"/>
                 </a:solidFill>
               </a:rPr>
               <a:t>止まっても、また戻ってくる。</a:t>
@@ -24286,7 +24286,7 @@
             <a:r>
               <a:rPr lang="en-US" sz="1850" dirty="0">
                 <a:solidFill>
-                  <a:srgbClr val="D8C4B3"/>
+                  <a:srgbClr val="8A7A6C"/>
                 </a:solidFill>
               </a:rPr>
               <a:t>そして戻ってきたとき、一緒に言いましょう。</a:t>
@@ -24306,7 +24306,7 @@
             <a:r>
               <a:rPr lang="en-US" sz="3000" b="1" dirty="0">
                 <a:solidFill>
-                  <a:srgbClr val="FFFFFF"/>
+                  <a:srgbClr val="4A3B30"/>
                 </a:solidFill>
               </a:rPr>
               <a:t>「戻ってこられた。今日も一つ、できた。」</a:t>
@@ -24342,7 +24342,7 @@
             <a:r>
               <a:rPr lang="en-US" sz="1150" dirty="0">
                 <a:solidFill>
-                  <a:srgbClr val="D8C4B3"/>
+                  <a:srgbClr val="B7A99A"/>
                 </a:solidFill>
                 <a:latin typeface="Meiryo" pitchFamily="34" charset="0"/>
                 <a:ea typeface="Meiryo" pitchFamily="34" charset="-122"/>
@@ -24381,7 +24381,7 @@
             <a:r>
               <a:rPr lang="en-US" sz="1150" dirty="0">
                 <a:solidFill>
-                  <a:srgbClr val="D8C4B3"/>
+                  <a:srgbClr val="B7A99A"/>
                 </a:solidFill>
                 <a:latin typeface="Meiryo" pitchFamily="34" charset="0"/>
                 <a:ea typeface="Meiryo" pitchFamily="34" charset="-122"/>
@@ -24808,7 +24808,7 @@
     <p:bg>
       <p:bgPr>
         <a:solidFill>
-          <a:srgbClr val="5C4636"/>
+          <a:srgbClr val="FFF8F0"/>
         </a:solidFill>
       </p:bgPr>
     </p:bg>
@@ -24919,7 +24919,7 @@
             <a:r>
               <a:rPr lang="en-US" sz="1500" b="1" spc="300" kern="0" dirty="0">
                 <a:solidFill>
-                  <a:srgbClr val="CE9A2E"/>
+                  <a:srgbClr val="DD6E4E"/>
                 </a:solidFill>
                 <a:latin typeface="Meiryo" pitchFamily="34" charset="0"/>
                 <a:ea typeface="Meiryo" pitchFamily="34" charset="-122"/>
@@ -24958,7 +24958,7 @@
             <a:r>
               <a:rPr lang="en-US" sz="3700" b="1" dirty="0">
                 <a:solidFill>
-                  <a:srgbClr val="FFFFFF"/>
+                  <a:srgbClr val="4A3B30"/>
                 </a:solidFill>
                 <a:latin typeface="Meiryo" pitchFamily="34" charset="0"/>
                 <a:ea typeface="Meiryo" pitchFamily="34" charset="-122"/>
@@ -24997,7 +24997,7 @@
             <a:r>
               <a:rPr lang="en-US" sz="1600" dirty="0">
                 <a:solidFill>
-                  <a:srgbClr val="D8C4B3"/>
+                  <a:srgbClr val="8A7A6C"/>
                 </a:solidFill>
                 <a:latin typeface="Meiryo" pitchFamily="34" charset="0"/>
                 <a:ea typeface="Meiryo" pitchFamily="34" charset="-122"/>
@@ -25075,7 +25075,7 @@
             <a:r>
               <a:rPr lang="en-US" sz="1600" dirty="0">
                 <a:solidFill>
-                  <a:srgbClr val="D8C4B3"/>
+                  <a:srgbClr val="8A7A6C"/>
                 </a:solidFill>
                 <a:latin typeface="Meiryo" pitchFamily="34" charset="0"/>
                 <a:ea typeface="Meiryo" pitchFamily="34" charset="-122"/>
@@ -25153,7 +25153,7 @@
             <a:r>
               <a:rPr lang="en-US" sz="1700" dirty="0">
                 <a:solidFill>
-                  <a:srgbClr val="FBEFE4"/>
+                  <a:srgbClr val="4A3B30"/>
                 </a:solidFill>
                 <a:latin typeface="Meiryo" pitchFamily="34" charset="0"/>
                 <a:ea typeface="Meiryo" pitchFamily="34" charset="-122"/>
@@ -25192,7 +25192,7 @@
             <a:r>
               <a:rPr lang="en-US" sz="1150" dirty="0">
                 <a:solidFill>
-                  <a:srgbClr val="D8C4B3"/>
+                  <a:srgbClr val="B7A99A"/>
                 </a:solidFill>
                 <a:latin typeface="Meiryo" pitchFamily="34" charset="0"/>
                 <a:ea typeface="Meiryo" pitchFamily="34" charset="-122"/>
@@ -25231,7 +25231,7 @@
             <a:r>
               <a:rPr lang="en-US" sz="1150" dirty="0">
                 <a:solidFill>
-                  <a:srgbClr val="D8C4B3"/>
+                  <a:srgbClr val="B7A99A"/>
                 </a:solidFill>
                 <a:latin typeface="Meiryo" pitchFamily="34" charset="0"/>
                 <a:ea typeface="Meiryo" pitchFamily="34" charset="-122"/>

--- a/workshop/dist/dekitanokakera-workshop.pptx
+++ b/workshop/dist/dekitanokakera-workshop.pptx
@@ -45,9 +45,11 @@
     <p:sldId id="293" r:id="rId39"/>
     <p:sldId id="294" r:id="rId40"/>
     <p:sldId id="295" r:id="rId41"/>
+    <p:sldId id="296" r:id="rId42"/>
+    <p:sldId id="297" r:id="rId43"/>
   </p:sldIdLst>
   <p:notesMasterIdLst>
-    <p:notesMasterId r:id="rId42"/>
+    <p:notesMasterId r:id="rId44"/>
   </p:notesMasterIdLst>
   <p:sldSz cx="12191695" cy="6858000"/>
   <p:notesSz cx="6858000" cy="12191695"/>
@@ -3557,6 +3559,182 @@
             <a:fld id="{F7021451-1387-4CA6-816F-3879F97B5CBC}" type="slidenum">
               <a:rPr lang="en-US"/>
               <a:t>40</a:t>
+            </a:fld>
+            <a:endParaRPr lang="en-US"/>
+          </a:p>
+        </p:txBody>
+      </p:sp>
+    </p:spTree>
+    <p:extLst>
+      <p:ext uri="{BB962C8B-B14F-4D97-AF65-F5344CB8AC3E}">
+        <p14:creationId xmlns:p14="http://schemas.microsoft.com/office/powerpoint/2010/main" val="1024086991"/>
+      </p:ext>
+    </p:extLst>
+  </p:cSld>
+  <p:clrMapOvr>
+    <a:masterClrMapping/>
+  </p:clrMapOvr>
+</p:notes>
+</file>
+
+<file path=ppt/notesSlides/notesSlide41.xml><?xml version="1.0" encoding="utf-8"?>
+<p:notes xmlns:a="http://schemas.openxmlformats.org/drawingml/2006/main" xmlns:r="http://schemas.openxmlformats.org/officeDocument/2006/relationships" xmlns:p="http://schemas.openxmlformats.org/presentationml/2006/main">
+  <p:cSld>
+    <p:spTree>
+      <p:nvGrpSpPr>
+        <p:cNvPr id="1" name=""/>
+        <p:cNvGrpSpPr/>
+        <p:nvPr/>
+      </p:nvGrpSpPr>
+      <p:grpSpPr>
+        <a:xfrm>
+          <a:off x="0" y="0"/>
+          <a:ext cx="0" cy="0"/>
+          <a:chOff x="0" y="0"/>
+          <a:chExt cx="0" cy="0"/>
+        </a:xfrm>
+      </p:grpSpPr>
+      <p:sp>
+        <p:nvSpPr>
+          <p:cNvPr id="2" name="Slide Image Placeholder 1"/>
+          <p:cNvSpPr>
+            <a:spLocks noGrp="1" noRot="1" noChangeAspect="1"/>
+          </p:cNvSpPr>
+          <p:nvPr>
+            <p:ph type="sldImg"/>
+          </p:nvPr>
+        </p:nvSpPr>
+        <p:spPr/>
+      </p:sp>
+      <p:sp>
+        <p:nvSpPr>
+          <p:cNvPr id="3" name="Notes Placeholder 2"/>
+          <p:cNvSpPr>
+            <a:spLocks noGrp="1"/>
+          </p:cNvSpPr>
+          <p:nvPr>
+            <p:ph type="body" idx="1"/>
+          </p:nvPr>
+        </p:nvSpPr>
+        <p:spPr/>
+        <p:txBody>
+          <a:bodyPr/>
+          <a:lstStyle/>
+          <a:p>
+            <a:r>
+              <a:rPr lang="en-US" dirty="0"/>
+              <a:t/>
+            </a:r>
+            <a:endParaRPr lang="en-US" dirty="0"/>
+          </a:p>
+        </p:txBody>
+      </p:sp>
+      <p:sp>
+        <p:nvSpPr>
+          <p:cNvPr id="4" name="Slide Number Placeholder 3"/>
+          <p:cNvSpPr>
+            <a:spLocks noGrp="1"/>
+          </p:cNvSpPr>
+          <p:nvPr>
+            <p:ph type="sldNum" sz="quarter" idx="10"/>
+          </p:nvPr>
+        </p:nvSpPr>
+        <p:spPr/>
+        <p:txBody>
+          <a:bodyPr/>
+          <a:lstStyle/>
+          <a:p>
+            <a:fld id="{F7021451-1387-4CA6-816F-3879F97B5CBC}" type="slidenum">
+              <a:rPr lang="en-US"/>
+              <a:t>41</a:t>
+            </a:fld>
+            <a:endParaRPr lang="en-US"/>
+          </a:p>
+        </p:txBody>
+      </p:sp>
+    </p:spTree>
+    <p:extLst>
+      <p:ext uri="{BB962C8B-B14F-4D97-AF65-F5344CB8AC3E}">
+        <p14:creationId xmlns:p14="http://schemas.microsoft.com/office/powerpoint/2010/main" val="1024086991"/>
+      </p:ext>
+    </p:extLst>
+  </p:cSld>
+  <p:clrMapOvr>
+    <a:masterClrMapping/>
+  </p:clrMapOvr>
+</p:notes>
+</file>
+
+<file path=ppt/notesSlides/notesSlide42.xml><?xml version="1.0" encoding="utf-8"?>
+<p:notes xmlns:a="http://schemas.openxmlformats.org/drawingml/2006/main" xmlns:r="http://schemas.openxmlformats.org/officeDocument/2006/relationships" xmlns:p="http://schemas.openxmlformats.org/presentationml/2006/main">
+  <p:cSld>
+    <p:spTree>
+      <p:nvGrpSpPr>
+        <p:cNvPr id="1" name=""/>
+        <p:cNvGrpSpPr/>
+        <p:nvPr/>
+      </p:nvGrpSpPr>
+      <p:grpSpPr>
+        <a:xfrm>
+          <a:off x="0" y="0"/>
+          <a:ext cx="0" cy="0"/>
+          <a:chOff x="0" y="0"/>
+          <a:chExt cx="0" cy="0"/>
+        </a:xfrm>
+      </p:grpSpPr>
+      <p:sp>
+        <p:nvSpPr>
+          <p:cNvPr id="2" name="Slide Image Placeholder 1"/>
+          <p:cNvSpPr>
+            <a:spLocks noGrp="1" noRot="1" noChangeAspect="1"/>
+          </p:cNvSpPr>
+          <p:nvPr>
+            <p:ph type="sldImg"/>
+          </p:nvPr>
+        </p:nvSpPr>
+        <p:spPr/>
+      </p:sp>
+      <p:sp>
+        <p:nvSpPr>
+          <p:cNvPr id="3" name="Notes Placeholder 2"/>
+          <p:cNvSpPr>
+            <a:spLocks noGrp="1"/>
+          </p:cNvSpPr>
+          <p:nvPr>
+            <p:ph type="body" idx="1"/>
+          </p:nvPr>
+        </p:nvSpPr>
+        <p:spPr/>
+        <p:txBody>
+          <a:bodyPr/>
+          <a:lstStyle/>
+          <a:p>
+            <a:r>
+              <a:rPr lang="en-US" dirty="0"/>
+              <a:t/>
+            </a:r>
+            <a:endParaRPr lang="en-US" dirty="0"/>
+          </a:p>
+        </p:txBody>
+      </p:sp>
+      <p:sp>
+        <p:nvSpPr>
+          <p:cNvPr id="4" name="Slide Number Placeholder 3"/>
+          <p:cNvSpPr>
+            <a:spLocks noGrp="1"/>
+          </p:cNvSpPr>
+          <p:nvPr>
+            <p:ph type="sldNum" sz="quarter" idx="10"/>
+          </p:nvPr>
+        </p:nvSpPr>
+        <p:spPr/>
+        <p:txBody>
+          <a:bodyPr/>
+          <a:lstStyle/>
+          <a:p>
+            <a:fld id="{F7021451-1387-4CA6-816F-3879F97B5CBC}" type="slidenum">
+              <a:rPr lang="en-US"/>
+              <a:t>42</a:t>
             </a:fld>
             <a:endParaRPr lang="en-US"/>
           </a:p>
@@ -5444,7 +5622,7 @@
                 <a:ea typeface="Meiryo" pitchFamily="34" charset="-122"/>
                 <a:cs typeface="Meiryo" pitchFamily="34" charset="-120"/>
               </a:rPr>
-              <a:t>10 / 40</a:t>
+              <a:t>10 / 42</a:t>
             </a:r>
             <a:endParaRPr lang="en-US" sz="1150" dirty="0"/>
           </a:p>
@@ -5888,7 +6066,7 @@
                 <a:ea typeface="Meiryo" pitchFamily="34" charset="-122"/>
                 <a:cs typeface="Meiryo" pitchFamily="34" charset="-120"/>
               </a:rPr>
-              <a:t>11 / 40</a:t>
+              <a:t>11 / 42</a:t>
             </a:r>
             <a:endParaRPr lang="en-US" sz="1150" dirty="0"/>
           </a:p>
@@ -6310,7 +6488,7 @@
                 <a:ea typeface="Meiryo" pitchFamily="34" charset="-122"/>
                 <a:cs typeface="Meiryo" pitchFamily="34" charset="-120"/>
               </a:rPr>
-              <a:t>12 / 40</a:t>
+              <a:t>12 / 42</a:t>
             </a:r>
             <a:endParaRPr lang="en-US" sz="1150" dirty="0"/>
           </a:p>
@@ -6732,7 +6910,7 @@
                 <a:ea typeface="Meiryo" pitchFamily="34" charset="-122"/>
                 <a:cs typeface="Meiryo" pitchFamily="34" charset="-120"/>
               </a:rPr>
-              <a:t>13 / 40</a:t>
+              <a:t>13 / 42</a:t>
             </a:r>
             <a:endParaRPr lang="en-US" sz="1150" dirty="0"/>
           </a:p>
@@ -7163,7 +7341,7 @@
                 <a:ea typeface="Meiryo" pitchFamily="34" charset="-122"/>
                 <a:cs typeface="Meiryo" pitchFamily="34" charset="-120"/>
               </a:rPr>
-              <a:t>14 / 40</a:t>
+              <a:t>14 / 42</a:t>
             </a:r>
             <a:endParaRPr lang="en-US" sz="1150" dirty="0"/>
           </a:p>
@@ -7859,7 +8037,7 @@
                 <a:ea typeface="Meiryo" pitchFamily="34" charset="-122"/>
                 <a:cs typeface="Meiryo" pitchFamily="34" charset="-120"/>
               </a:rPr>
-              <a:t>15 / 40</a:t>
+              <a:t>15 / 42</a:t>
             </a:r>
             <a:endParaRPr lang="en-US" sz="1150" dirty="0"/>
           </a:p>
@@ -8290,7 +8468,7 @@
                 <a:ea typeface="Meiryo" pitchFamily="34" charset="-122"/>
                 <a:cs typeface="Meiryo" pitchFamily="34" charset="-120"/>
               </a:rPr>
-              <a:t>16 / 40</a:t>
+              <a:t>16 / 42</a:t>
             </a:r>
             <a:endParaRPr lang="en-US" sz="1150" dirty="0"/>
           </a:p>
@@ -8761,7 +8939,7 @@
                 <a:ea typeface="Meiryo" pitchFamily="34" charset="-122"/>
                 <a:cs typeface="Meiryo" pitchFamily="34" charset="-120"/>
               </a:rPr>
-              <a:t>17 / 40</a:t>
+              <a:t>17 / 42</a:t>
             </a:r>
             <a:endParaRPr lang="en-US" sz="1150" dirty="0"/>
           </a:p>
@@ -9158,7 +9336,7 @@
                 <a:ea typeface="Meiryo" pitchFamily="34" charset="-122"/>
                 <a:cs typeface="Meiryo" pitchFamily="34" charset="-120"/>
               </a:rPr>
-              <a:t>18 / 40</a:t>
+              <a:t>18 / 42</a:t>
             </a:r>
             <a:endParaRPr lang="en-US" sz="1150" dirty="0"/>
           </a:p>
@@ -9960,7 +10138,7 @@
                 <a:ea typeface="Meiryo" pitchFamily="34" charset="-122"/>
                 <a:cs typeface="Meiryo" pitchFamily="34" charset="-120"/>
               </a:rPr>
-              <a:t>19 / 40</a:t>
+              <a:t>19 / 42</a:t>
             </a:r>
             <a:endParaRPr lang="en-US" sz="1150" dirty="0"/>
           </a:p>
@@ -10779,7 +10957,7 @@
                 <a:ea typeface="Meiryo" pitchFamily="34" charset="-122"/>
                 <a:cs typeface="Meiryo" pitchFamily="34" charset="-120"/>
               </a:rPr>
-              <a:t>2 / 40</a:t>
+              <a:t>2 / 42</a:t>
             </a:r>
             <a:endParaRPr lang="en-US" sz="1150" dirty="0"/>
           </a:p>
@@ -11507,7 +11685,7 @@
                 <a:ea typeface="Meiryo" pitchFamily="34" charset="-122"/>
                 <a:cs typeface="Meiryo" pitchFamily="34" charset="-120"/>
               </a:rPr>
-              <a:t>20 / 40</a:t>
+              <a:t>20 / 42</a:t>
             </a:r>
             <a:endParaRPr lang="en-US" sz="1150" dirty="0"/>
           </a:p>
@@ -11879,7 +12057,7 @@
                 <a:ea typeface="Meiryo" pitchFamily="34" charset="-122"/>
                 <a:cs typeface="Meiryo" pitchFamily="34" charset="-120"/>
               </a:rPr>
-              <a:t>21 / 40</a:t>
+              <a:t>21 / 42</a:t>
             </a:r>
             <a:endParaRPr lang="en-US" sz="1150" dirty="0"/>
           </a:p>
@@ -12223,7 +12401,7 @@
                 <a:ea typeface="Meiryo" pitchFamily="34" charset="-122"/>
                 <a:cs typeface="Meiryo" pitchFamily="34" charset="-120"/>
               </a:rPr>
-              <a:t>22 / 40</a:t>
+              <a:t>22 / 42</a:t>
             </a:r>
             <a:endParaRPr lang="en-US" sz="1150" dirty="0"/>
           </a:p>
@@ -12710,7 +12888,7 @@
                 <a:ea typeface="Meiryo" pitchFamily="34" charset="-122"/>
                 <a:cs typeface="Meiryo" pitchFamily="34" charset="-120"/>
               </a:rPr>
-              <a:t>23 / 40</a:t>
+              <a:t>23 / 42</a:t>
             </a:r>
             <a:endParaRPr lang="en-US" sz="1150" dirty="0"/>
           </a:p>
@@ -13115,7 +13293,7 @@
                 <a:ea typeface="Meiryo" pitchFamily="34" charset="-122"/>
                 <a:cs typeface="Meiryo" pitchFamily="34" charset="-120"/>
               </a:rPr>
-              <a:t>24 / 40</a:t>
+              <a:t>24 / 42</a:t>
             </a:r>
             <a:endParaRPr lang="en-US" sz="1150" dirty="0"/>
           </a:p>
@@ -13520,7 +13698,7 @@
                 <a:ea typeface="Meiryo" pitchFamily="34" charset="-122"/>
                 <a:cs typeface="Meiryo" pitchFamily="34" charset="-120"/>
               </a:rPr>
-              <a:t>25 / 40</a:t>
+              <a:t>25 / 42</a:t>
             </a:r>
             <a:endParaRPr lang="en-US" sz="1150" dirty="0"/>
           </a:p>
@@ -13925,7 +14103,7 @@
                 <a:ea typeface="Meiryo" pitchFamily="34" charset="-122"/>
                 <a:cs typeface="Meiryo" pitchFamily="34" charset="-120"/>
               </a:rPr>
-              <a:t>26 / 40</a:t>
+              <a:t>26 / 42</a:t>
             </a:r>
             <a:endParaRPr lang="en-US" sz="1150" dirty="0"/>
           </a:p>
@@ -14442,7 +14620,7 @@
                 <a:ea typeface="Meiryo" pitchFamily="34" charset="-122"/>
                 <a:cs typeface="Meiryo" pitchFamily="34" charset="-120"/>
               </a:rPr>
-              <a:t>27 / 40</a:t>
+              <a:t>27 / 42</a:t>
             </a:r>
             <a:endParaRPr lang="en-US" sz="1150" dirty="0"/>
           </a:p>
@@ -15451,7 +15629,7 @@
                 <a:ea typeface="Meiryo" pitchFamily="34" charset="-122"/>
                 <a:cs typeface="Meiryo" pitchFamily="34" charset="-120"/>
               </a:rPr>
-              <a:t>28 / 40</a:t>
+              <a:t>28 / 42</a:t>
             </a:r>
             <a:endParaRPr lang="en-US" sz="1150" dirty="0"/>
           </a:p>
@@ -15961,7 +16139,7 @@
                 <a:ea typeface="Meiryo" pitchFamily="34" charset="-122"/>
                 <a:cs typeface="Meiryo" pitchFamily="34" charset="-120"/>
               </a:rPr>
-              <a:t>29 / 40</a:t>
+              <a:t>29 / 42</a:t>
             </a:r>
             <a:endParaRPr lang="en-US" sz="1150" dirty="0"/>
           </a:p>
@@ -16633,7 +16811,7 @@
                 <a:ea typeface="Meiryo" pitchFamily="34" charset="-122"/>
                 <a:cs typeface="Meiryo" pitchFamily="34" charset="-120"/>
               </a:rPr>
-              <a:t>3 / 40</a:t>
+              <a:t>3 / 42</a:t>
             </a:r>
             <a:endParaRPr lang="en-US" sz="1150" dirty="0"/>
           </a:p>
@@ -17363,7 +17541,7 @@
                 <a:ea typeface="Meiryo" pitchFamily="34" charset="-122"/>
                 <a:cs typeface="Meiryo" pitchFamily="34" charset="-120"/>
               </a:rPr>
-              <a:t>30 / 40</a:t>
+              <a:t>30 / 42</a:t>
             </a:r>
             <a:endParaRPr lang="en-US" sz="1150" dirty="0"/>
           </a:p>
@@ -18060,7 +18238,7 @@
                 <a:ea typeface="Meiryo" pitchFamily="34" charset="-122"/>
                 <a:cs typeface="Meiryo" pitchFamily="34" charset="-120"/>
               </a:rPr>
-              <a:t>31 / 40</a:t>
+              <a:t>31 / 42</a:t>
             </a:r>
             <a:endParaRPr lang="en-US" sz="1150" dirty="0"/>
           </a:p>
@@ -18823,7 +19001,7 @@
                 <a:ea typeface="Meiryo" pitchFamily="34" charset="-122"/>
                 <a:cs typeface="Meiryo" pitchFamily="34" charset="-120"/>
               </a:rPr>
-              <a:t>32 / 40</a:t>
+              <a:t>32 / 42</a:t>
             </a:r>
             <a:endParaRPr lang="en-US" sz="1150" dirty="0"/>
           </a:p>
@@ -19503,7 +19681,7 @@
                 <a:ea typeface="Meiryo" pitchFamily="34" charset="-122"/>
                 <a:cs typeface="Meiryo" pitchFamily="34" charset="-120"/>
               </a:rPr>
-              <a:t>33 / 40</a:t>
+              <a:t>33 / 42</a:t>
             </a:r>
             <a:endParaRPr lang="en-US" sz="1150" dirty="0"/>
           </a:p>
@@ -20522,7 +20700,7 @@
                 <a:ea typeface="Meiryo" pitchFamily="34" charset="-122"/>
                 <a:cs typeface="Meiryo" pitchFamily="34" charset="-120"/>
               </a:rPr>
-              <a:t>34 / 40</a:t>
+              <a:t>34 / 42</a:t>
             </a:r>
             <a:endParaRPr lang="en-US" sz="1150" dirty="0"/>
           </a:p>
@@ -21637,7 +21815,7 @@
                 <a:ea typeface="Meiryo" pitchFamily="34" charset="-122"/>
                 <a:cs typeface="Meiryo" pitchFamily="34" charset="-120"/>
               </a:rPr>
-              <a:t>35 / 40</a:t>
+              <a:t>35 / 42</a:t>
             </a:r>
             <a:endParaRPr lang="en-US" sz="1150" dirty="0"/>
           </a:p>
@@ -22608,7 +22786,7 @@
                 <a:ea typeface="Meiryo" pitchFamily="34" charset="-122"/>
                 <a:cs typeface="Meiryo" pitchFamily="34" charset="-120"/>
               </a:rPr>
-              <a:t>36 / 40</a:t>
+              <a:t>36 / 42</a:t>
             </a:r>
             <a:endParaRPr lang="en-US" sz="1150" dirty="0"/>
           </a:p>
@@ -22653,9 +22831,9 @@
           <p:nvPr/>
         </p:nvSpPr>
         <p:spPr>
-          <a:xfrm rot="720000">
-            <a:off x="-868680" y="5623560"/>
-            <a:ext cx="1737360" cy="1737360"/>
+          <a:xfrm rot="900000">
+            <a:off x="11109960" y="-685800"/>
+            <a:ext cx="1828800" cy="1828800"/>
           </a:xfrm>
           <a:prstGeom prst="hexagon">
             <a:avLst/>
@@ -22696,7 +22874,7 @@
               <a:buNone/>
             </a:pPr>
             <a:r>
-              <a:rPr lang="en-US" sz="3000" b="1" dirty="0">
+              <a:rPr lang="en-US" sz="2700" b="1" dirty="0">
                 <a:solidFill>
                   <a:srgbClr val="4A3B30"/>
                 </a:solidFill>
@@ -22704,44 +22882,86 @@
                 <a:ea typeface="Meiryo" pitchFamily="34" charset="-122"/>
                 <a:cs typeface="Meiryo" pitchFamily="34" charset="-120"/>
               </a:rPr>
-              <a:t>参加費</a:t>
-            </a:r>
-            <a:endParaRPr lang="en-US" sz="3000" dirty="0"/>
-          </a:p>
-        </p:txBody>
-      </p:sp>
-      <p:sp>
-        <p:nvSpPr>
-          <p:cNvPr id="4" name="Shape 2"/>
-          <p:cNvSpPr/>
-          <p:nvPr/>
-        </p:nvSpPr>
-        <p:spPr>
-          <a:xfrm>
-            <a:off x="640080" y="1737360"/>
-            <a:ext cx="10911535" cy="1554480"/>
+              <a:t>参加費の前に、知っておいてほしいこと</a:t>
+            </a:r>
+            <a:endParaRPr lang="en-US" sz="2700" dirty="0"/>
+          </a:p>
+        </p:txBody>
+      </p:sp>
+      <p:sp>
+        <p:nvSpPr>
+          <p:cNvPr id="4" name="Text 2"/>
+          <p:cNvSpPr/>
+          <p:nvPr/>
+        </p:nvSpPr>
+        <p:spPr>
+          <a:xfrm>
+            <a:off x="640080" y="1691640"/>
+            <a:ext cx="10911535" cy="365760"/>
+          </a:xfrm>
+          <a:prstGeom prst="rect">
+            <a:avLst/>
+          </a:prstGeom>
+          <a:noFill/>
+          <a:ln/>
+        </p:spPr>
+        <p:txBody>
+          <a:bodyPr wrap="square" lIns="0" tIns="0" rIns="0" bIns="0" rtlCol="0" anchor="t"/>
+          <a:lstStyle/>
+          <a:p>
+            <a:pPr indent="0" marL="0">
+              <a:lnSpc>
+                <a:spcPts val="2200"/>
+              </a:lnSpc>
+              <a:buNone/>
+            </a:pPr>
+            <a:r>
+              <a:rPr lang="en-US" sz="1600" b="1" dirty="0">
+                <a:solidFill>
+                  <a:srgbClr val="8A7A6C"/>
+                </a:solidFill>
+                <a:latin typeface="Meiryo" pitchFamily="34" charset="0"/>
+                <a:ea typeface="Meiryo" pitchFamily="34" charset="-122"/>
+                <a:cs typeface="Meiryo" pitchFamily="34" charset="-120"/>
+              </a:rPr>
+              <a:t>身体・思考・習慣を一緒に整える、伴走型のプログラム。</a:t>
+            </a:r>
+            <a:endParaRPr lang="en-US" sz="1600" dirty="0"/>
+          </a:p>
+        </p:txBody>
+      </p:sp>
+      <p:sp>
+        <p:nvSpPr>
+          <p:cNvPr id="5" name="Shape 3"/>
+          <p:cNvSpPr/>
+          <p:nvPr/>
+        </p:nvSpPr>
+        <p:spPr>
+          <a:xfrm>
+            <a:off x="640080" y="2286000"/>
+            <a:ext cx="10911535" cy="2011680"/>
           </a:xfrm>
           <a:prstGeom prst="roundRect">
             <a:avLst>
-              <a:gd name="adj" fmla="val 7059"/>
+              <a:gd name="adj" fmla="val 5455"/>
             </a:avLst>
           </a:prstGeom>
           <a:solidFill>
-            <a:srgbClr val="FFF3DA"/>
+            <a:srgbClr val="F3ECE3"/>
           </a:solidFill>
           <a:ln/>
         </p:spPr>
       </p:sp>
       <p:sp>
         <p:nvSpPr>
-          <p:cNvPr id="5" name="Text 3"/>
-          <p:cNvSpPr/>
-          <p:nvPr/>
-        </p:nvSpPr>
-        <p:spPr>
-          <a:xfrm>
-            <a:off x="640080" y="1737360"/>
-            <a:ext cx="10911535" cy="1554480"/>
+          <p:cNvPr id="6" name="Text 4"/>
+          <p:cNvSpPr/>
+          <p:nvPr/>
+        </p:nvSpPr>
+        <p:spPr>
+          <a:xfrm>
+            <a:off x="640080" y="2286000"/>
+            <a:ext cx="10911535" cy="2011680"/>
           </a:xfrm>
           <a:prstGeom prst="rect">
             <a:avLst/>
@@ -22754,116 +22974,99 @@
           <a:lstStyle/>
           <a:p>
             <a:pPr algn="ctr" indent="0" marL="0">
-              <a:buNone/>
-            </a:pPr>
-            <a:r>
-              <a:rPr lang="en-US" sz="6200" b="1" dirty="0">
-                <a:solidFill>
-                  <a:srgbClr val="CE9A2E"/>
-                </a:solidFill>
-              </a:rPr>
-              <a:t>298,000</a:t>
-            </a:r>
+              <a:spcAft>
+                <a:spcPts val="600"/>
+              </a:spcAft>
+              <a:buNone/>
+            </a:pPr>
+            <a:r>
+              <a:rPr lang="en-US" sz="1600" dirty="0">
+                <a:solidFill>
+                  <a:srgbClr val="8A7A6C"/>
+                </a:solidFill>
+              </a:rPr>
+              <a:t>一般的には、</a:t>
+            </a:r>
+            <a:endParaRPr lang="en-US" sz="1600" dirty="0"/>
+          </a:p>
+          <a:p>
             <a:pPr algn="ctr" indent="0" marL="0">
-              <a:buNone/>
-            </a:pPr>
-            <a:r>
-              <a:rPr lang="en-US" sz="3000" b="1" dirty="0">
-                <a:solidFill>
-                  <a:srgbClr val="CE9A2E"/>
-                </a:solidFill>
-              </a:rPr>
-              <a:t>円</a:t>
-            </a:r>
-            <a:endParaRPr lang="en-US" sz="6200" dirty="0"/>
-          </a:p>
-        </p:txBody>
-      </p:sp>
-      <p:sp>
-        <p:nvSpPr>
-          <p:cNvPr id="6" name="Text 4"/>
-          <p:cNvSpPr/>
-          <p:nvPr/>
-        </p:nvSpPr>
-        <p:spPr>
-          <a:xfrm>
-            <a:off x="1188720" y="3703320"/>
-            <a:ext cx="9814255" cy="2103120"/>
-          </a:xfrm>
-          <a:prstGeom prst="rect">
-            <a:avLst/>
-          </a:prstGeom>
-          <a:noFill/>
-          <a:ln/>
-        </p:spPr>
-        <p:txBody>
-          <a:bodyPr wrap="square" lIns="0" tIns="0" rIns="0" bIns="0" rtlCol="0" anchor="ctr"/>
-          <a:lstStyle/>
+              <a:spcAft>
+                <a:spcPts val="600"/>
+              </a:spcAft>
+              <a:buNone/>
+            </a:pPr>
+            <a:r>
+              <a:rPr lang="en-US" sz="5200" b="1" dirty="0">
+                <a:solidFill>
+                  <a:srgbClr val="B7A99A"/>
+                </a:solidFill>
+              </a:rPr>
+              <a:t>40万円 〜 60万円</a:t>
+            </a:r>
+            <a:endParaRPr lang="en-US" sz="1600" dirty="0"/>
+          </a:p>
           <a:p>
             <a:pPr algn="ctr" indent="0" marL="0">
-              <a:lnSpc>
-                <a:spcPts val="2400"/>
-              </a:lnSpc>
               <a:spcAft>
-                <a:spcPts val="1400"/>
+                <a:spcPts val="600"/>
               </a:spcAft>
               <a:buNone/>
             </a:pPr>
             <a:r>
-              <a:rPr lang="en-US" sz="1850" b="1" dirty="0">
-                <a:solidFill>
-                  <a:srgbClr val="4A3B30"/>
-                </a:solidFill>
-              </a:rPr>
-              <a:t>これは、6回の講義を聞くためだけの90日間ではありません。</a:t>
-            </a:r>
-            <a:endParaRPr lang="en-US" sz="1850" dirty="0"/>
-          </a:p>
+              <a:rPr lang="en-US" sz="1600" dirty="0">
+                <a:solidFill>
+                  <a:srgbClr val="8A7A6C"/>
+                </a:solidFill>
+              </a:rPr>
+              <a:t>ほどかかることが多い金額です。</a:t>
+            </a:r>
+            <a:endParaRPr lang="en-US" sz="1600" dirty="0"/>
+          </a:p>
+        </p:txBody>
+      </p:sp>
+      <p:sp>
+        <p:nvSpPr>
+          <p:cNvPr id="7" name="Text 5"/>
+          <p:cNvSpPr/>
+          <p:nvPr/>
+        </p:nvSpPr>
+        <p:spPr>
+          <a:xfrm>
+            <a:off x="640080" y="4663440"/>
+            <a:ext cx="10911535" cy="548640"/>
+          </a:xfrm>
+          <a:prstGeom prst="rect">
+            <a:avLst/>
+          </a:prstGeom>
+          <a:noFill/>
+          <a:ln/>
+        </p:spPr>
+        <p:txBody>
+          <a:bodyPr wrap="square" lIns="0" tIns="0" rIns="0" bIns="0" rtlCol="0" anchor="ctr"/>
+          <a:lstStyle/>
           <a:p>
             <a:pPr algn="ctr" indent="0" marL="0">
-              <a:lnSpc>
-                <a:spcPts val="2400"/>
-              </a:lnSpc>
-              <a:spcAft>
-                <a:spcPts val="1400"/>
-              </a:spcAft>
-              <a:buNone/>
-            </a:pPr>
-            <a:r>
-              <a:rPr lang="en-US" sz="2300" b="1" dirty="0">
+              <a:buNone/>
+            </a:pPr>
+            <a:r>
+              <a:rPr lang="en-US" sz="2000" b="1" dirty="0">
                 <a:solidFill>
                   <a:srgbClr val="DD6E4E"/>
                 </a:solidFill>
-              </a:rPr>
-              <a:t>できる。止まる。相談する。変える。戻る。</a:t>
-            </a:r>
-            <a:endParaRPr lang="en-US" sz="1850" dirty="0"/>
-          </a:p>
-          <a:p>
-            <a:pPr algn="ctr" indent="0" marL="0">
-              <a:lnSpc>
-                <a:spcPts val="2400"/>
-              </a:lnSpc>
-              <a:spcAft>
-                <a:spcPts val="1400"/>
-              </a:spcAft>
-              <a:buNone/>
-            </a:pPr>
-            <a:r>
-              <a:rPr lang="en-US" sz="1850" b="1" dirty="0">
-                <a:solidFill>
-                  <a:srgbClr val="4A3B30"/>
-                </a:solidFill>
-              </a:rPr>
-              <a:t>その経験を積み重ね、「私は私を信用していい」を育てる90日間です。</a:t>
-            </a:r>
-            <a:endParaRPr lang="en-US" sz="1850" dirty="0"/>
-          </a:p>
-        </p:txBody>
-      </p:sp>
-      <p:sp>
-        <p:nvSpPr>
-          <p:cNvPr id="7" name="Text 5"/>
+                <a:latin typeface="Meiryo" pitchFamily="34" charset="0"/>
+                <a:ea typeface="Meiryo" pitchFamily="34" charset="-122"/>
+                <a:cs typeface="Meiryo" pitchFamily="34" charset="-120"/>
+              </a:rPr>
+              <a:t>けれど、今回は――</a:t>
+            </a:r>
+            <a:endParaRPr lang="en-US" sz="2000" dirty="0"/>
+          </a:p>
+        </p:txBody>
+      </p:sp>
+      <p:sp>
+        <p:nvSpPr>
+          <p:cNvPr id="8" name="Text 6"/>
           <p:cNvSpPr/>
           <p:nvPr/>
         </p:nvSpPr>
@@ -22902,7 +23105,7 @@
       </p:sp>
       <p:sp>
         <p:nvSpPr>
-          <p:cNvPr id="8" name="Text 6"/>
+          <p:cNvPr id="9" name="Text 7"/>
           <p:cNvSpPr/>
           <p:nvPr/>
         </p:nvSpPr>
@@ -22933,7 +23136,7 @@
                 <a:ea typeface="Meiryo" pitchFamily="34" charset="-122"/>
                 <a:cs typeface="Meiryo" pitchFamily="34" charset="-120"/>
               </a:rPr>
-              <a:t>37 / 40</a:t>
+              <a:t>37 / 42</a:t>
             </a:r>
             <a:endParaRPr lang="en-US" sz="1150" dirty="0"/>
           </a:p>
@@ -22978,15 +23181,15 @@
           <p:nvPr/>
         </p:nvSpPr>
         <p:spPr>
-          <a:xfrm rot="900000">
-            <a:off x="11109960" y="-685800"/>
-            <a:ext cx="1828800" cy="1828800"/>
+          <a:xfrm rot="720000">
+            <a:off x="-868680" y="5623560"/>
+            <a:ext cx="1737360" cy="1737360"/>
           </a:xfrm>
           <a:prstGeom prst="hexagon">
             <a:avLst/>
           </a:prstGeom>
           <a:solidFill>
-            <a:srgbClr val="2F9188">
+            <a:srgbClr val="CE9A2E">
               <a:alpha val="13000"/>
             </a:srgbClr>
           </a:solidFill>
@@ -23021,7 +23224,7 @@
               <a:buNone/>
             </a:pPr>
             <a:r>
-              <a:rPr lang="en-US" sz="2750" b="1" dirty="0">
+              <a:rPr lang="en-US" sz="3000" b="1" dirty="0">
                 <a:solidFill>
                   <a:srgbClr val="4A3B30"/>
                 </a:solidFill>
@@ -23029,9 +23232,9 @@
                 <a:ea typeface="Meiryo" pitchFamily="34" charset="-122"/>
                 <a:cs typeface="Meiryo" pitchFamily="34" charset="-120"/>
               </a:rPr>
-              <a:t>「私にもできる？」と思っているあなたへ</a:t>
-            </a:r>
-            <a:endParaRPr lang="en-US" sz="2750" dirty="0"/>
+              <a:t>参加費</a:t>
+            </a:r>
+            <a:endParaRPr lang="en-US" sz="3000" dirty="0"/>
           </a:p>
         </p:txBody>
       </p:sp>
@@ -23043,23 +23246,18 @@
         </p:nvSpPr>
         <p:spPr>
           <a:xfrm>
-            <a:off x="640080" y="1783080"/>
-            <a:ext cx="10911535" cy="758952"/>
+            <a:off x="640080" y="1737360"/>
+            <a:ext cx="10911535" cy="1554480"/>
           </a:xfrm>
           <a:prstGeom prst="roundRect">
             <a:avLst>
-              <a:gd name="adj" fmla="val 14458"/>
+              <a:gd name="adj" fmla="val 7059"/>
             </a:avLst>
           </a:prstGeom>
           <a:solidFill>
-            <a:srgbClr val="FFFDFA"/>
+            <a:srgbClr val="FFF3DA"/>
           </a:solidFill>
-          <a:ln w="12700">
-            <a:solidFill>
-              <a:srgbClr val="EFE2D3"/>
-            </a:solidFill>
-            <a:prstDash val="solid"/>
-          </a:ln>
+          <a:ln/>
         </p:spPr>
       </p:sp>
       <p:sp>
@@ -23070,34 +23268,42 @@
         </p:nvSpPr>
         <p:spPr>
           <a:xfrm>
-            <a:off x="868680" y="1783080"/>
-            <a:ext cx="457200" cy="758952"/>
-          </a:xfrm>
-          <a:prstGeom prst="rect">
-            <a:avLst/>
-          </a:prstGeom>
-          <a:noFill/>
-          <a:ln/>
-        </p:spPr>
-        <p:txBody>
-          <a:bodyPr wrap="square" lIns="0" tIns="0" rIns="0" bIns="0" rtlCol="0" anchor="ctr"/>
-          <a:lstStyle/>
-          <a:p>
-            <a:pPr indent="0" marL="0">
-              <a:buNone/>
-            </a:pPr>
-            <a:r>
-              <a:rPr lang="en-US" sz="2050" b="1" dirty="0">
-                <a:solidFill>
-                  <a:srgbClr val="2F9188"/>
-                </a:solidFill>
-                <a:latin typeface="Meiryo" pitchFamily="34" charset="0"/>
-                <a:ea typeface="Meiryo" pitchFamily="34" charset="-122"/>
-                <a:cs typeface="Meiryo" pitchFamily="34" charset="-120"/>
-              </a:rPr>
-              <a:t>Q</a:t>
-            </a:r>
-            <a:endParaRPr lang="en-US" sz="2050" dirty="0"/>
+            <a:off x="640080" y="1737360"/>
+            <a:ext cx="10911535" cy="1554480"/>
+          </a:xfrm>
+          <a:prstGeom prst="rect">
+            <a:avLst/>
+          </a:prstGeom>
+          <a:noFill/>
+          <a:ln/>
+        </p:spPr>
+        <p:txBody>
+          <a:bodyPr wrap="square" lIns="0" tIns="0" rIns="0" bIns="0" rtlCol="0" anchor="ctr"/>
+          <a:lstStyle/>
+          <a:p>
+            <a:pPr algn="ctr" indent="0" marL="0">
+              <a:buNone/>
+            </a:pPr>
+            <a:r>
+              <a:rPr lang="en-US" sz="6200" b="1" dirty="0">
+                <a:solidFill>
+                  <a:srgbClr val="CE9A2E"/>
+                </a:solidFill>
+              </a:rPr>
+              <a:t>298,000</a:t>
+            </a:r>
+            <a:pPr algn="ctr" indent="0" marL="0">
+              <a:buNone/>
+            </a:pPr>
+            <a:r>
+              <a:rPr lang="en-US" sz="3000" b="1" dirty="0">
+                <a:solidFill>
+                  <a:srgbClr val="CE9A2E"/>
+                </a:solidFill>
+              </a:rPr>
+              <a:t>円</a:t>
+            </a:r>
+            <a:endParaRPr lang="en-US" sz="6200" dirty="0"/>
           </a:p>
         </p:txBody>
       </p:sp>
@@ -23109,880 +23315,83 @@
         </p:nvSpPr>
         <p:spPr>
           <a:xfrm>
-            <a:off x="1325880" y="1783080"/>
-            <a:ext cx="3108960" cy="758952"/>
-          </a:xfrm>
-          <a:prstGeom prst="rect">
-            <a:avLst/>
-          </a:prstGeom>
-          <a:noFill/>
-          <a:ln/>
-        </p:spPr>
-        <p:txBody>
-          <a:bodyPr wrap="square" lIns="0" tIns="0" rIns="0" bIns="0" rtlCol="0" anchor="ctr"/>
-          <a:lstStyle/>
-          <a:p>
-            <a:pPr indent="0" marL="0">
+            <a:off x="1188720" y="3703320"/>
+            <a:ext cx="9814255" cy="2103120"/>
+          </a:xfrm>
+          <a:prstGeom prst="rect">
+            <a:avLst/>
+          </a:prstGeom>
+          <a:noFill/>
+          <a:ln/>
+        </p:spPr>
+        <p:txBody>
+          <a:bodyPr wrap="square" lIns="0" tIns="0" rIns="0" bIns="0" rtlCol="0" anchor="ctr"/>
+          <a:lstStyle/>
+          <a:p>
+            <a:pPr algn="ctr" indent="0" marL="0">
               <a:lnSpc>
-                <a:spcPts val="1600"/>
+                <a:spcPts val="2400"/>
               </a:lnSpc>
-              <a:buNone/>
-            </a:pPr>
-            <a:r>
-              <a:rPr lang="en-US" sz="1600" b="1" dirty="0">
+              <a:spcAft>
+                <a:spcPts val="1400"/>
+              </a:spcAft>
+              <a:buNone/>
+            </a:pPr>
+            <a:r>
+              <a:rPr lang="en-US" sz="1850" b="1" dirty="0">
                 <a:solidFill>
                   <a:srgbClr val="4A3B30"/>
                 </a:solidFill>
-                <a:latin typeface="Meiryo" pitchFamily="34" charset="0"/>
-                <a:ea typeface="Meiryo" pitchFamily="34" charset="-122"/>
-                <a:cs typeface="Meiryo" pitchFamily="34" charset="-120"/>
-              </a:rPr>
-              <a:t>私にもできますか？</a:t>
-            </a:r>
-            <a:endParaRPr lang="en-US" sz="1600" dirty="0"/>
+              </a:rPr>
+              <a:t>これは、6回の講義を聞くためだけの90日間ではありません。</a:t>
+            </a:r>
+            <a:endParaRPr lang="en-US" sz="1850" dirty="0"/>
+          </a:p>
+          <a:p>
+            <a:pPr algn="ctr" indent="0" marL="0">
+              <a:lnSpc>
+                <a:spcPts val="2400"/>
+              </a:lnSpc>
+              <a:spcAft>
+                <a:spcPts val="1400"/>
+              </a:spcAft>
+              <a:buNone/>
+            </a:pPr>
+            <a:r>
+              <a:rPr lang="en-US" sz="2300" b="1" dirty="0">
+                <a:solidFill>
+                  <a:srgbClr val="DD6E4E"/>
+                </a:solidFill>
+              </a:rPr>
+              <a:t>できる。止まる。相談する。変える。戻る。</a:t>
+            </a:r>
+            <a:endParaRPr lang="en-US" sz="1850" dirty="0"/>
+          </a:p>
+          <a:p>
+            <a:pPr algn="ctr" indent="0" marL="0">
+              <a:lnSpc>
+                <a:spcPts val="2400"/>
+              </a:lnSpc>
+              <a:spcAft>
+                <a:spcPts val="1400"/>
+              </a:spcAft>
+              <a:buNone/>
+            </a:pPr>
+            <a:r>
+              <a:rPr lang="en-US" sz="1850" b="1" dirty="0">
+                <a:solidFill>
+                  <a:srgbClr val="4A3B30"/>
+                </a:solidFill>
+              </a:rPr>
+              <a:t>その経験を積み重ね、「私は私を信用していい」を育てる90日間です。</a:t>
+            </a:r>
+            <a:endParaRPr lang="en-US" sz="1850" dirty="0"/>
           </a:p>
         </p:txBody>
       </p:sp>
       <p:sp>
         <p:nvSpPr>
           <p:cNvPr id="7" name="Text 5"/>
-          <p:cNvSpPr/>
-          <p:nvPr/>
-        </p:nvSpPr>
-        <p:spPr>
-          <a:xfrm>
-            <a:off x="4480560" y="1783080"/>
-            <a:ext cx="411480" cy="758952"/>
-          </a:xfrm>
-          <a:prstGeom prst="rect">
-            <a:avLst/>
-          </a:prstGeom>
-          <a:noFill/>
-          <a:ln/>
-        </p:spPr>
-        <p:txBody>
-          <a:bodyPr wrap="square" lIns="0" tIns="0" rIns="0" bIns="0" rtlCol="0" anchor="ctr"/>
-          <a:lstStyle/>
-          <a:p>
-            <a:pPr algn="ctr" indent="0" marL="0">
-              <a:buNone/>
-            </a:pPr>
-            <a:r>
-              <a:rPr lang="en-US" sz="1700" dirty="0">
-                <a:solidFill>
-                  <a:srgbClr val="B7A99A"/>
-                </a:solidFill>
-                <a:latin typeface="Meiryo" pitchFamily="34" charset="0"/>
-                <a:ea typeface="Meiryo" pitchFamily="34" charset="-122"/>
-                <a:cs typeface="Meiryo" pitchFamily="34" charset="-120"/>
-              </a:rPr>
-              <a:t>→</a:t>
-            </a:r>
-            <a:endParaRPr lang="en-US" sz="1700" dirty="0"/>
-          </a:p>
-        </p:txBody>
-      </p:sp>
-      <p:sp>
-        <p:nvSpPr>
-          <p:cNvPr id="8" name="Text 6"/>
-          <p:cNvSpPr/>
-          <p:nvPr/>
-        </p:nvSpPr>
-        <p:spPr>
-          <a:xfrm>
-            <a:off x="4983480" y="1783080"/>
-            <a:ext cx="6293815" cy="758952"/>
-          </a:xfrm>
-          <a:prstGeom prst="rect">
-            <a:avLst/>
-          </a:prstGeom>
-          <a:noFill/>
-          <a:ln/>
-        </p:spPr>
-        <p:txBody>
-          <a:bodyPr wrap="square" lIns="0" tIns="0" rIns="0" bIns="0" rtlCol="0" anchor="ctr"/>
-          <a:lstStyle/>
-          <a:p>
-            <a:pPr indent="0" marL="0">
-              <a:lnSpc>
-                <a:spcPts val="1600"/>
-              </a:lnSpc>
-              <a:buNone/>
-            </a:pPr>
-            <a:r>
-              <a:rPr lang="en-US" sz="1550" dirty="0">
-                <a:solidFill>
-                  <a:srgbClr val="8A7A6C"/>
-                </a:solidFill>
-                <a:latin typeface="Meiryo" pitchFamily="34" charset="0"/>
-                <a:ea typeface="Meiryo" pitchFamily="34" charset="-122"/>
-                <a:cs typeface="Meiryo" pitchFamily="34" charset="-120"/>
-              </a:rPr>
-              <a:t>「これならできる」から始めます。</a:t>
-            </a:r>
-            <a:endParaRPr lang="en-US" sz="1550" dirty="0"/>
-          </a:p>
-        </p:txBody>
-      </p:sp>
-      <p:sp>
-        <p:nvSpPr>
-          <p:cNvPr id="9" name="Shape 7"/>
-          <p:cNvSpPr/>
-          <p:nvPr/>
-        </p:nvSpPr>
-        <p:spPr>
-          <a:xfrm>
-            <a:off x="640080" y="2633472"/>
-            <a:ext cx="10911535" cy="758952"/>
-          </a:xfrm>
-          <a:prstGeom prst="roundRect">
-            <a:avLst>
-              <a:gd name="adj" fmla="val 14458"/>
-            </a:avLst>
-          </a:prstGeom>
-          <a:solidFill>
-            <a:srgbClr val="FFFDFA"/>
-          </a:solidFill>
-          <a:ln w="12700">
-            <a:solidFill>
-              <a:srgbClr val="EFE2D3"/>
-            </a:solidFill>
-            <a:prstDash val="solid"/>
-          </a:ln>
-        </p:spPr>
-      </p:sp>
-      <p:sp>
-        <p:nvSpPr>
-          <p:cNvPr id="10" name="Text 8"/>
-          <p:cNvSpPr/>
-          <p:nvPr/>
-        </p:nvSpPr>
-        <p:spPr>
-          <a:xfrm>
-            <a:off x="868680" y="2633472"/>
-            <a:ext cx="457200" cy="758952"/>
-          </a:xfrm>
-          <a:prstGeom prst="rect">
-            <a:avLst/>
-          </a:prstGeom>
-          <a:noFill/>
-          <a:ln/>
-        </p:spPr>
-        <p:txBody>
-          <a:bodyPr wrap="square" lIns="0" tIns="0" rIns="0" bIns="0" rtlCol="0" anchor="ctr"/>
-          <a:lstStyle/>
-          <a:p>
-            <a:pPr indent="0" marL="0">
-              <a:buNone/>
-            </a:pPr>
-            <a:r>
-              <a:rPr lang="en-US" sz="2050" b="1" dirty="0">
-                <a:solidFill>
-                  <a:srgbClr val="2F9188"/>
-                </a:solidFill>
-                <a:latin typeface="Meiryo" pitchFamily="34" charset="0"/>
-                <a:ea typeface="Meiryo" pitchFamily="34" charset="-122"/>
-                <a:cs typeface="Meiryo" pitchFamily="34" charset="-120"/>
-              </a:rPr>
-              <a:t>Q</a:t>
-            </a:r>
-            <a:endParaRPr lang="en-US" sz="2050" dirty="0"/>
-          </a:p>
-        </p:txBody>
-      </p:sp>
-      <p:sp>
-        <p:nvSpPr>
-          <p:cNvPr id="11" name="Text 9"/>
-          <p:cNvSpPr/>
-          <p:nvPr/>
-        </p:nvSpPr>
-        <p:spPr>
-          <a:xfrm>
-            <a:off x="1325880" y="2633472"/>
-            <a:ext cx="3108960" cy="758952"/>
-          </a:xfrm>
-          <a:prstGeom prst="rect">
-            <a:avLst/>
-          </a:prstGeom>
-          <a:noFill/>
-          <a:ln/>
-        </p:spPr>
-        <p:txBody>
-          <a:bodyPr wrap="square" lIns="0" tIns="0" rIns="0" bIns="0" rtlCol="0" anchor="ctr"/>
-          <a:lstStyle/>
-          <a:p>
-            <a:pPr indent="0" marL="0">
-              <a:lnSpc>
-                <a:spcPts val="1600"/>
-              </a:lnSpc>
-              <a:buNone/>
-            </a:pPr>
-            <a:r>
-              <a:rPr lang="en-US" sz="1600" b="1" dirty="0">
-                <a:solidFill>
-                  <a:srgbClr val="4A3B30"/>
-                </a:solidFill>
-                <a:latin typeface="Meiryo" pitchFamily="34" charset="0"/>
-                <a:ea typeface="Meiryo" pitchFamily="34" charset="-122"/>
-                <a:cs typeface="Meiryo" pitchFamily="34" charset="-120"/>
-              </a:rPr>
-              <a:t>忙しくても大丈夫？</a:t>
-            </a:r>
-            <a:endParaRPr lang="en-US" sz="1600" dirty="0"/>
-          </a:p>
-        </p:txBody>
-      </p:sp>
-      <p:sp>
-        <p:nvSpPr>
-          <p:cNvPr id="12" name="Text 10"/>
-          <p:cNvSpPr/>
-          <p:nvPr/>
-        </p:nvSpPr>
-        <p:spPr>
-          <a:xfrm>
-            <a:off x="4480560" y="2633472"/>
-            <a:ext cx="411480" cy="758952"/>
-          </a:xfrm>
-          <a:prstGeom prst="rect">
-            <a:avLst/>
-          </a:prstGeom>
-          <a:noFill/>
-          <a:ln/>
-        </p:spPr>
-        <p:txBody>
-          <a:bodyPr wrap="square" lIns="0" tIns="0" rIns="0" bIns="0" rtlCol="0" anchor="ctr"/>
-          <a:lstStyle/>
-          <a:p>
-            <a:pPr algn="ctr" indent="0" marL="0">
-              <a:buNone/>
-            </a:pPr>
-            <a:r>
-              <a:rPr lang="en-US" sz="1700" dirty="0">
-                <a:solidFill>
-                  <a:srgbClr val="B7A99A"/>
-                </a:solidFill>
-                <a:latin typeface="Meiryo" pitchFamily="34" charset="0"/>
-                <a:ea typeface="Meiryo" pitchFamily="34" charset="-122"/>
-                <a:cs typeface="Meiryo" pitchFamily="34" charset="-120"/>
-              </a:rPr>
-              <a:t>→</a:t>
-            </a:r>
-            <a:endParaRPr lang="en-US" sz="1700" dirty="0"/>
-          </a:p>
-        </p:txBody>
-      </p:sp>
-      <p:sp>
-        <p:nvSpPr>
-          <p:cNvPr id="13" name="Text 11"/>
-          <p:cNvSpPr/>
-          <p:nvPr/>
-        </p:nvSpPr>
-        <p:spPr>
-          <a:xfrm>
-            <a:off x="4983480" y="2633472"/>
-            <a:ext cx="6293815" cy="758952"/>
-          </a:xfrm>
-          <a:prstGeom prst="rect">
-            <a:avLst/>
-          </a:prstGeom>
-          <a:noFill/>
-          <a:ln/>
-        </p:spPr>
-        <p:txBody>
-          <a:bodyPr wrap="square" lIns="0" tIns="0" rIns="0" bIns="0" rtlCol="0" anchor="ctr"/>
-          <a:lstStyle/>
-          <a:p>
-            <a:pPr indent="0" marL="0">
-              <a:lnSpc>
-                <a:spcPts val="1600"/>
-              </a:lnSpc>
-              <a:buNone/>
-            </a:pPr>
-            <a:r>
-              <a:rPr lang="en-US" sz="1550" dirty="0">
-                <a:solidFill>
-                  <a:srgbClr val="8A7A6C"/>
-                </a:solidFill>
-                <a:latin typeface="Meiryo" pitchFamily="34" charset="0"/>
-                <a:ea typeface="Meiryo" pitchFamily="34" charset="-122"/>
-                <a:cs typeface="Meiryo" pitchFamily="34" charset="-120"/>
-              </a:rPr>
-              <a:t>今の生活に入る大きさを一緒に探します。</a:t>
-            </a:r>
-            <a:endParaRPr lang="en-US" sz="1550" dirty="0"/>
-          </a:p>
-        </p:txBody>
-      </p:sp>
-      <p:sp>
-        <p:nvSpPr>
-          <p:cNvPr id="14" name="Shape 12"/>
-          <p:cNvSpPr/>
-          <p:nvPr/>
-        </p:nvSpPr>
-        <p:spPr>
-          <a:xfrm>
-            <a:off x="640080" y="3483864"/>
-            <a:ext cx="10911535" cy="758952"/>
-          </a:xfrm>
-          <a:prstGeom prst="roundRect">
-            <a:avLst>
-              <a:gd name="adj" fmla="val 14458"/>
-            </a:avLst>
-          </a:prstGeom>
-          <a:solidFill>
-            <a:srgbClr val="FFFDFA"/>
-          </a:solidFill>
-          <a:ln w="12700">
-            <a:solidFill>
-              <a:srgbClr val="EFE2D3"/>
-            </a:solidFill>
-            <a:prstDash val="solid"/>
-          </a:ln>
-        </p:spPr>
-      </p:sp>
-      <p:sp>
-        <p:nvSpPr>
-          <p:cNvPr id="15" name="Text 13"/>
-          <p:cNvSpPr/>
-          <p:nvPr/>
-        </p:nvSpPr>
-        <p:spPr>
-          <a:xfrm>
-            <a:off x="868680" y="3483864"/>
-            <a:ext cx="457200" cy="758952"/>
-          </a:xfrm>
-          <a:prstGeom prst="rect">
-            <a:avLst/>
-          </a:prstGeom>
-          <a:noFill/>
-          <a:ln/>
-        </p:spPr>
-        <p:txBody>
-          <a:bodyPr wrap="square" lIns="0" tIns="0" rIns="0" bIns="0" rtlCol="0" anchor="ctr"/>
-          <a:lstStyle/>
-          <a:p>
-            <a:pPr indent="0" marL="0">
-              <a:buNone/>
-            </a:pPr>
-            <a:r>
-              <a:rPr lang="en-US" sz="2050" b="1" dirty="0">
-                <a:solidFill>
-                  <a:srgbClr val="2F9188"/>
-                </a:solidFill>
-                <a:latin typeface="Meiryo" pitchFamily="34" charset="0"/>
-                <a:ea typeface="Meiryo" pitchFamily="34" charset="-122"/>
-                <a:cs typeface="Meiryo" pitchFamily="34" charset="-120"/>
-              </a:rPr>
-              <a:t>Q</a:t>
-            </a:r>
-            <a:endParaRPr lang="en-US" sz="2050" dirty="0"/>
-          </a:p>
-        </p:txBody>
-      </p:sp>
-      <p:sp>
-        <p:nvSpPr>
-          <p:cNvPr id="16" name="Text 14"/>
-          <p:cNvSpPr/>
-          <p:nvPr/>
-        </p:nvSpPr>
-        <p:spPr>
-          <a:xfrm>
-            <a:off x="1325880" y="3483864"/>
-            <a:ext cx="3108960" cy="758952"/>
-          </a:xfrm>
-          <a:prstGeom prst="rect">
-            <a:avLst/>
-          </a:prstGeom>
-          <a:noFill/>
-          <a:ln/>
-        </p:spPr>
-        <p:txBody>
-          <a:bodyPr wrap="square" lIns="0" tIns="0" rIns="0" bIns="0" rtlCol="0" anchor="ctr"/>
-          <a:lstStyle/>
-          <a:p>
-            <a:pPr indent="0" marL="0">
-              <a:lnSpc>
-                <a:spcPts val="1600"/>
-              </a:lnSpc>
-              <a:buNone/>
-            </a:pPr>
-            <a:r>
-              <a:rPr lang="en-US" sz="1600" b="1" dirty="0">
-                <a:solidFill>
-                  <a:srgbClr val="4A3B30"/>
-                </a:solidFill>
-                <a:latin typeface="Meiryo" pitchFamily="34" charset="0"/>
-                <a:ea typeface="Meiryo" pitchFamily="34" charset="-122"/>
-                <a:cs typeface="Meiryo" pitchFamily="34" charset="-120"/>
-              </a:rPr>
-              <a:t>また止まったら？</a:t>
-            </a:r>
-            <a:endParaRPr lang="en-US" sz="1600" dirty="0"/>
-          </a:p>
-        </p:txBody>
-      </p:sp>
-      <p:sp>
-        <p:nvSpPr>
-          <p:cNvPr id="17" name="Text 15"/>
-          <p:cNvSpPr/>
-          <p:nvPr/>
-        </p:nvSpPr>
-        <p:spPr>
-          <a:xfrm>
-            <a:off x="4480560" y="3483864"/>
-            <a:ext cx="411480" cy="758952"/>
-          </a:xfrm>
-          <a:prstGeom prst="rect">
-            <a:avLst/>
-          </a:prstGeom>
-          <a:noFill/>
-          <a:ln/>
-        </p:spPr>
-        <p:txBody>
-          <a:bodyPr wrap="square" lIns="0" tIns="0" rIns="0" bIns="0" rtlCol="0" anchor="ctr"/>
-          <a:lstStyle/>
-          <a:p>
-            <a:pPr algn="ctr" indent="0" marL="0">
-              <a:buNone/>
-            </a:pPr>
-            <a:r>
-              <a:rPr lang="en-US" sz="1700" dirty="0">
-                <a:solidFill>
-                  <a:srgbClr val="B7A99A"/>
-                </a:solidFill>
-                <a:latin typeface="Meiryo" pitchFamily="34" charset="0"/>
-                <a:ea typeface="Meiryo" pitchFamily="34" charset="-122"/>
-                <a:cs typeface="Meiryo" pitchFamily="34" charset="-120"/>
-              </a:rPr>
-              <a:t>→</a:t>
-            </a:r>
-            <a:endParaRPr lang="en-US" sz="1700" dirty="0"/>
-          </a:p>
-        </p:txBody>
-      </p:sp>
-      <p:sp>
-        <p:nvSpPr>
-          <p:cNvPr id="18" name="Text 16"/>
-          <p:cNvSpPr/>
-          <p:nvPr/>
-        </p:nvSpPr>
-        <p:spPr>
-          <a:xfrm>
-            <a:off x="4983480" y="3483864"/>
-            <a:ext cx="6293815" cy="758952"/>
-          </a:xfrm>
-          <a:prstGeom prst="rect">
-            <a:avLst/>
-          </a:prstGeom>
-          <a:noFill/>
-          <a:ln/>
-        </p:spPr>
-        <p:txBody>
-          <a:bodyPr wrap="square" lIns="0" tIns="0" rIns="0" bIns="0" rtlCol="0" anchor="ctr"/>
-          <a:lstStyle/>
-          <a:p>
-            <a:pPr indent="0" marL="0">
-              <a:lnSpc>
-                <a:spcPts val="1600"/>
-              </a:lnSpc>
-              <a:buNone/>
-            </a:pPr>
-            <a:r>
-              <a:rPr lang="en-US" sz="1550" dirty="0">
-                <a:solidFill>
-                  <a:srgbClr val="8A7A6C"/>
-                </a:solidFill>
-                <a:latin typeface="Meiryo" pitchFamily="34" charset="0"/>
-                <a:ea typeface="Meiryo" pitchFamily="34" charset="-122"/>
-                <a:cs typeface="Meiryo" pitchFamily="34" charset="-120"/>
-              </a:rPr>
-              <a:t>止まってください。そこから戻る練習をします。</a:t>
-            </a:r>
-            <a:endParaRPr lang="en-US" sz="1550" dirty="0"/>
-          </a:p>
-        </p:txBody>
-      </p:sp>
-      <p:sp>
-        <p:nvSpPr>
-          <p:cNvPr id="19" name="Shape 17"/>
-          <p:cNvSpPr/>
-          <p:nvPr/>
-        </p:nvSpPr>
-        <p:spPr>
-          <a:xfrm>
-            <a:off x="640080" y="4334256"/>
-            <a:ext cx="10911535" cy="758952"/>
-          </a:xfrm>
-          <a:prstGeom prst="roundRect">
-            <a:avLst>
-              <a:gd name="adj" fmla="val 14458"/>
-            </a:avLst>
-          </a:prstGeom>
-          <a:solidFill>
-            <a:srgbClr val="FFFDFA"/>
-          </a:solidFill>
-          <a:ln w="12700">
-            <a:solidFill>
-              <a:srgbClr val="EFE2D3"/>
-            </a:solidFill>
-            <a:prstDash val="solid"/>
-          </a:ln>
-        </p:spPr>
-      </p:sp>
-      <p:sp>
-        <p:nvSpPr>
-          <p:cNvPr id="20" name="Text 18"/>
-          <p:cNvSpPr/>
-          <p:nvPr/>
-        </p:nvSpPr>
-        <p:spPr>
-          <a:xfrm>
-            <a:off x="868680" y="4334256"/>
-            <a:ext cx="457200" cy="758952"/>
-          </a:xfrm>
-          <a:prstGeom prst="rect">
-            <a:avLst/>
-          </a:prstGeom>
-          <a:noFill/>
-          <a:ln/>
-        </p:spPr>
-        <p:txBody>
-          <a:bodyPr wrap="square" lIns="0" tIns="0" rIns="0" bIns="0" rtlCol="0" anchor="ctr"/>
-          <a:lstStyle/>
-          <a:p>
-            <a:pPr indent="0" marL="0">
-              <a:buNone/>
-            </a:pPr>
-            <a:r>
-              <a:rPr lang="en-US" sz="2050" b="1" dirty="0">
-                <a:solidFill>
-                  <a:srgbClr val="2F9188"/>
-                </a:solidFill>
-                <a:latin typeface="Meiryo" pitchFamily="34" charset="0"/>
-                <a:ea typeface="Meiryo" pitchFamily="34" charset="-122"/>
-                <a:cs typeface="Meiryo" pitchFamily="34" charset="-120"/>
-              </a:rPr>
-              <a:t>Q</a:t>
-            </a:r>
-            <a:endParaRPr lang="en-US" sz="2050" dirty="0"/>
-          </a:p>
-        </p:txBody>
-      </p:sp>
-      <p:sp>
-        <p:nvSpPr>
-          <p:cNvPr id="21" name="Text 19"/>
-          <p:cNvSpPr/>
-          <p:nvPr/>
-        </p:nvSpPr>
-        <p:spPr>
-          <a:xfrm>
-            <a:off x="1325880" y="4334256"/>
-            <a:ext cx="3108960" cy="758952"/>
-          </a:xfrm>
-          <a:prstGeom prst="rect">
-            <a:avLst/>
-          </a:prstGeom>
-          <a:noFill/>
-          <a:ln/>
-        </p:spPr>
-        <p:txBody>
-          <a:bodyPr wrap="square" lIns="0" tIns="0" rIns="0" bIns="0" rtlCol="0" anchor="ctr"/>
-          <a:lstStyle/>
-          <a:p>
-            <a:pPr indent="0" marL="0">
-              <a:lnSpc>
-                <a:spcPts val="1600"/>
-              </a:lnSpc>
-              <a:buNone/>
-            </a:pPr>
-            <a:r>
-              <a:rPr lang="en-US" sz="1600" b="1" dirty="0">
-                <a:solidFill>
-                  <a:srgbClr val="4A3B30"/>
-                </a:solidFill>
-                <a:latin typeface="Meiryo" pitchFamily="34" charset="0"/>
-                <a:ea typeface="Meiryo" pitchFamily="34" charset="-122"/>
-                <a:cs typeface="Meiryo" pitchFamily="34" charset="-120"/>
-              </a:rPr>
-              <a:t>結果が出なかったら？</a:t>
-            </a:r>
-            <a:endParaRPr lang="en-US" sz="1600" dirty="0"/>
-          </a:p>
-        </p:txBody>
-      </p:sp>
-      <p:sp>
-        <p:nvSpPr>
-          <p:cNvPr id="22" name="Text 20"/>
-          <p:cNvSpPr/>
-          <p:nvPr/>
-        </p:nvSpPr>
-        <p:spPr>
-          <a:xfrm>
-            <a:off x="4480560" y="4334256"/>
-            <a:ext cx="411480" cy="758952"/>
-          </a:xfrm>
-          <a:prstGeom prst="rect">
-            <a:avLst/>
-          </a:prstGeom>
-          <a:noFill/>
-          <a:ln/>
-        </p:spPr>
-        <p:txBody>
-          <a:bodyPr wrap="square" lIns="0" tIns="0" rIns="0" bIns="0" rtlCol="0" anchor="ctr"/>
-          <a:lstStyle/>
-          <a:p>
-            <a:pPr algn="ctr" indent="0" marL="0">
-              <a:buNone/>
-            </a:pPr>
-            <a:r>
-              <a:rPr lang="en-US" sz="1700" dirty="0">
-                <a:solidFill>
-                  <a:srgbClr val="B7A99A"/>
-                </a:solidFill>
-                <a:latin typeface="Meiryo" pitchFamily="34" charset="0"/>
-                <a:ea typeface="Meiryo" pitchFamily="34" charset="-122"/>
-                <a:cs typeface="Meiryo" pitchFamily="34" charset="-120"/>
-              </a:rPr>
-              <a:t>→</a:t>
-            </a:r>
-            <a:endParaRPr lang="en-US" sz="1700" dirty="0"/>
-          </a:p>
-        </p:txBody>
-      </p:sp>
-      <p:sp>
-        <p:nvSpPr>
-          <p:cNvPr id="23" name="Text 21"/>
-          <p:cNvSpPr/>
-          <p:nvPr/>
-        </p:nvSpPr>
-        <p:spPr>
-          <a:xfrm>
-            <a:off x="4983480" y="4334256"/>
-            <a:ext cx="6293815" cy="758952"/>
-          </a:xfrm>
-          <a:prstGeom prst="rect">
-            <a:avLst/>
-          </a:prstGeom>
-          <a:noFill/>
-          <a:ln/>
-        </p:spPr>
-        <p:txBody>
-          <a:bodyPr wrap="square" lIns="0" tIns="0" rIns="0" bIns="0" rtlCol="0" anchor="ctr"/>
-          <a:lstStyle/>
-          <a:p>
-            <a:pPr indent="0" marL="0">
-              <a:lnSpc>
-                <a:spcPts val="1600"/>
-              </a:lnSpc>
-              <a:buNone/>
-            </a:pPr>
-            <a:r>
-              <a:rPr lang="en-US" sz="1550" dirty="0">
-                <a:solidFill>
-                  <a:srgbClr val="8A7A6C"/>
-                </a:solidFill>
-                <a:latin typeface="Meiryo" pitchFamily="34" charset="0"/>
-                <a:ea typeface="Meiryo" pitchFamily="34" charset="-122"/>
-                <a:cs typeface="Meiryo" pitchFamily="34" charset="-120"/>
-              </a:rPr>
-              <a:t>結果だけではなく、この先も使える「自分の進み方」をつくります。</a:t>
-            </a:r>
-            <a:endParaRPr lang="en-US" sz="1550" dirty="0"/>
-          </a:p>
-        </p:txBody>
-      </p:sp>
-      <p:sp>
-        <p:nvSpPr>
-          <p:cNvPr id="24" name="Shape 22"/>
-          <p:cNvSpPr/>
-          <p:nvPr/>
-        </p:nvSpPr>
-        <p:spPr>
-          <a:xfrm>
-            <a:off x="640080" y="5184648"/>
-            <a:ext cx="10911535" cy="758952"/>
-          </a:xfrm>
-          <a:prstGeom prst="roundRect">
-            <a:avLst>
-              <a:gd name="adj" fmla="val 14458"/>
-            </a:avLst>
-          </a:prstGeom>
-          <a:solidFill>
-            <a:srgbClr val="FFFDFA"/>
-          </a:solidFill>
-          <a:ln w="12700">
-            <a:solidFill>
-              <a:srgbClr val="EFE2D3"/>
-            </a:solidFill>
-            <a:prstDash val="solid"/>
-          </a:ln>
-        </p:spPr>
-      </p:sp>
-      <p:sp>
-        <p:nvSpPr>
-          <p:cNvPr id="25" name="Text 23"/>
-          <p:cNvSpPr/>
-          <p:nvPr/>
-        </p:nvSpPr>
-        <p:spPr>
-          <a:xfrm>
-            <a:off x="868680" y="5184648"/>
-            <a:ext cx="457200" cy="758952"/>
-          </a:xfrm>
-          <a:prstGeom prst="rect">
-            <a:avLst/>
-          </a:prstGeom>
-          <a:noFill/>
-          <a:ln/>
-        </p:spPr>
-        <p:txBody>
-          <a:bodyPr wrap="square" lIns="0" tIns="0" rIns="0" bIns="0" rtlCol="0" anchor="ctr"/>
-          <a:lstStyle/>
-          <a:p>
-            <a:pPr indent="0" marL="0">
-              <a:buNone/>
-            </a:pPr>
-            <a:r>
-              <a:rPr lang="en-US" sz="2050" b="1" dirty="0">
-                <a:solidFill>
-                  <a:srgbClr val="2F9188"/>
-                </a:solidFill>
-                <a:latin typeface="Meiryo" pitchFamily="34" charset="0"/>
-                <a:ea typeface="Meiryo" pitchFamily="34" charset="-122"/>
-                <a:cs typeface="Meiryo" pitchFamily="34" charset="-120"/>
-              </a:rPr>
-              <a:t>Q</a:t>
-            </a:r>
-            <a:endParaRPr lang="en-US" sz="2050" dirty="0"/>
-          </a:p>
-        </p:txBody>
-      </p:sp>
-      <p:sp>
-        <p:nvSpPr>
-          <p:cNvPr id="26" name="Text 24"/>
-          <p:cNvSpPr/>
-          <p:nvPr/>
-        </p:nvSpPr>
-        <p:spPr>
-          <a:xfrm>
-            <a:off x="1325880" y="5184648"/>
-            <a:ext cx="3108960" cy="758952"/>
-          </a:xfrm>
-          <a:prstGeom prst="rect">
-            <a:avLst/>
-          </a:prstGeom>
-          <a:noFill/>
-          <a:ln/>
-        </p:spPr>
-        <p:txBody>
-          <a:bodyPr wrap="square" lIns="0" tIns="0" rIns="0" bIns="0" rtlCol="0" anchor="ctr"/>
-          <a:lstStyle/>
-          <a:p>
-            <a:pPr indent="0" marL="0">
-              <a:lnSpc>
-                <a:spcPts val="1600"/>
-              </a:lnSpc>
-              <a:buNone/>
-            </a:pPr>
-            <a:r>
-              <a:rPr lang="en-US" sz="1600" b="1" dirty="0">
-                <a:solidFill>
-                  <a:srgbClr val="4A3B30"/>
-                </a:solidFill>
-                <a:latin typeface="Meiryo" pitchFamily="34" charset="0"/>
-                <a:ea typeface="Meiryo" pitchFamily="34" charset="-122"/>
-                <a:cs typeface="Meiryo" pitchFamily="34" charset="-120"/>
-              </a:rPr>
-              <a:t>一人でやってみてもいい？</a:t>
-            </a:r>
-            <a:endParaRPr lang="en-US" sz="1600" dirty="0"/>
-          </a:p>
-        </p:txBody>
-      </p:sp>
-      <p:sp>
-        <p:nvSpPr>
-          <p:cNvPr id="27" name="Text 25"/>
-          <p:cNvSpPr/>
-          <p:nvPr/>
-        </p:nvSpPr>
-        <p:spPr>
-          <a:xfrm>
-            <a:off x="4480560" y="5184648"/>
-            <a:ext cx="411480" cy="758952"/>
-          </a:xfrm>
-          <a:prstGeom prst="rect">
-            <a:avLst/>
-          </a:prstGeom>
-          <a:noFill/>
-          <a:ln/>
-        </p:spPr>
-        <p:txBody>
-          <a:bodyPr wrap="square" lIns="0" tIns="0" rIns="0" bIns="0" rtlCol="0" anchor="ctr"/>
-          <a:lstStyle/>
-          <a:p>
-            <a:pPr algn="ctr" indent="0" marL="0">
-              <a:buNone/>
-            </a:pPr>
-            <a:r>
-              <a:rPr lang="en-US" sz="1700" dirty="0">
-                <a:solidFill>
-                  <a:srgbClr val="B7A99A"/>
-                </a:solidFill>
-                <a:latin typeface="Meiryo" pitchFamily="34" charset="0"/>
-                <a:ea typeface="Meiryo" pitchFamily="34" charset="-122"/>
-                <a:cs typeface="Meiryo" pitchFamily="34" charset="-120"/>
-              </a:rPr>
-              <a:t>→</a:t>
-            </a:r>
-            <a:endParaRPr lang="en-US" sz="1700" dirty="0"/>
-          </a:p>
-        </p:txBody>
-      </p:sp>
-      <p:sp>
-        <p:nvSpPr>
-          <p:cNvPr id="28" name="Text 26"/>
-          <p:cNvSpPr/>
-          <p:nvPr/>
-        </p:nvSpPr>
-        <p:spPr>
-          <a:xfrm>
-            <a:off x="4983480" y="5184648"/>
-            <a:ext cx="6293815" cy="758952"/>
-          </a:xfrm>
-          <a:prstGeom prst="rect">
-            <a:avLst/>
-          </a:prstGeom>
-          <a:noFill/>
-          <a:ln/>
-        </p:spPr>
-        <p:txBody>
-          <a:bodyPr wrap="square" lIns="0" tIns="0" rIns="0" bIns="0" rtlCol="0" anchor="ctr"/>
-          <a:lstStyle/>
-          <a:p>
-            <a:pPr indent="0" marL="0">
-              <a:lnSpc>
-                <a:spcPts val="1600"/>
-              </a:lnSpc>
-              <a:buNone/>
-            </a:pPr>
-            <a:r>
-              <a:rPr lang="en-US" sz="1550" dirty="0">
-                <a:solidFill>
-                  <a:srgbClr val="8A7A6C"/>
-                </a:solidFill>
-                <a:latin typeface="Meiryo" pitchFamily="34" charset="0"/>
-                <a:ea typeface="Meiryo" pitchFamily="34" charset="-122"/>
-                <a:cs typeface="Meiryo" pitchFamily="34" charset="-120"/>
-              </a:rPr>
-              <a:t>もちろんです。でも、一人で何度も止まってきたなら、「環境を変える」ことも一つの選択です。</a:t>
-            </a:r>
-            <a:endParaRPr lang="en-US" sz="1550" dirty="0"/>
-          </a:p>
-        </p:txBody>
-      </p:sp>
-      <p:sp>
-        <p:nvSpPr>
-          <p:cNvPr id="29" name="Text 27"/>
           <p:cNvSpPr/>
           <p:nvPr/>
         </p:nvSpPr>
@@ -24021,7 +23430,7 @@
       </p:sp>
       <p:sp>
         <p:nvSpPr>
-          <p:cNvPr id="30" name="Text 28"/>
+          <p:cNvPr id="8" name="Text 6"/>
           <p:cNvSpPr/>
           <p:nvPr/>
         </p:nvSpPr>
@@ -24052,7 +23461,7 @@
                 <a:ea typeface="Meiryo" pitchFamily="34" charset="-122"/>
                 <a:cs typeface="Meiryo" pitchFamily="34" charset="-120"/>
               </a:rPr>
-              <a:t>38 / 40</a:t>
+              <a:t>38 / 42</a:t>
             </a:r>
             <a:endParaRPr lang="en-US" sz="1150" dirty="0"/>
           </a:p>
@@ -24114,210 +23523,219 @@
       </p:sp>
       <p:sp>
         <p:nvSpPr>
-          <p:cNvPr id="3" name="Shape 1"/>
-          <p:cNvSpPr/>
-          <p:nvPr/>
-        </p:nvSpPr>
-        <p:spPr>
-          <a:xfrm rot="720000">
-            <a:off x="-868680" y="5623560"/>
-            <a:ext cx="1737360" cy="1737360"/>
-          </a:xfrm>
-          <a:prstGeom prst="hexagon">
-            <a:avLst/>
+          <p:cNvPr id="3" name="Text 1"/>
+          <p:cNvSpPr/>
+          <p:nvPr/>
+        </p:nvSpPr>
+        <p:spPr>
+          <a:xfrm>
+            <a:off x="640080" y="804672"/>
+            <a:ext cx="10911535" cy="914400"/>
+          </a:xfrm>
+          <a:prstGeom prst="rect">
+            <a:avLst/>
+          </a:prstGeom>
+          <a:noFill/>
+          <a:ln/>
+        </p:spPr>
+        <p:txBody>
+          <a:bodyPr wrap="square" lIns="0" tIns="0" rIns="0" bIns="0" rtlCol="0" anchor="ctr"/>
+          <a:lstStyle/>
+          <a:p>
+            <a:pPr algn="l" indent="0" marL="0">
+              <a:lnSpc>
+                <a:spcPts val="3400"/>
+              </a:lnSpc>
+              <a:buNone/>
+            </a:pPr>
+            <a:r>
+              <a:rPr lang="en-US" sz="2600" b="1" dirty="0">
+                <a:solidFill>
+                  <a:srgbClr val="4A3B30"/>
+                </a:solidFill>
+                <a:latin typeface="Meiryo" pitchFamily="34" charset="0"/>
+                <a:ea typeface="Meiryo" pitchFamily="34" charset="-122"/>
+                <a:cs typeface="Meiryo" pitchFamily="34" charset="-120"/>
+              </a:rPr>
+              <a:t>今日中のお申し込み・ご入金で、さらに</a:t>
+            </a:r>
+            <a:endParaRPr lang="en-US" sz="2600" dirty="0"/>
+          </a:p>
+        </p:txBody>
+      </p:sp>
+      <p:sp>
+        <p:nvSpPr>
+          <p:cNvPr id="4" name="Shape 2"/>
+          <p:cNvSpPr/>
+          <p:nvPr/>
+        </p:nvSpPr>
+        <p:spPr>
+          <a:xfrm>
+            <a:off x="640080" y="1691640"/>
+            <a:ext cx="10911535" cy="2880360"/>
+          </a:xfrm>
+          <a:prstGeom prst="roundRect">
+            <a:avLst>
+              <a:gd name="adj" fmla="val 3810"/>
+            </a:avLst>
           </a:prstGeom>
           <a:solidFill>
-            <a:srgbClr val="2F9188">
-              <a:alpha val="13000"/>
-            </a:srgbClr>
+            <a:srgbClr val="FDEEE7"/>
           </a:solidFill>
           <a:ln/>
         </p:spPr>
       </p:sp>
       <p:sp>
         <p:nvSpPr>
-          <p:cNvPr id="4" name="Text 2"/>
-          <p:cNvSpPr/>
-          <p:nvPr/>
-        </p:nvSpPr>
-        <p:spPr>
-          <a:xfrm>
-            <a:off x="640080" y="457200"/>
-            <a:ext cx="9144000" cy="320040"/>
-          </a:xfrm>
-          <a:prstGeom prst="rect">
-            <a:avLst/>
-          </a:prstGeom>
-          <a:noFill/>
-          <a:ln/>
-        </p:spPr>
-        <p:txBody>
-          <a:bodyPr wrap="square" lIns="0" tIns="0" rIns="0" bIns="0" rtlCol="0" anchor="ctr"/>
-          <a:lstStyle/>
-          <a:p>
-            <a:pPr indent="0" marL="0">
-              <a:buNone/>
-            </a:pPr>
-            <a:r>
-              <a:rPr lang="en-US" sz="1500" b="1" spc="300" kern="0" dirty="0">
+          <p:cNvPr id="5" name="Text 3"/>
+          <p:cNvSpPr/>
+          <p:nvPr/>
+        </p:nvSpPr>
+        <p:spPr>
+          <a:xfrm>
+            <a:off x="640080" y="1691640"/>
+            <a:ext cx="10911535" cy="2880360"/>
+          </a:xfrm>
+          <a:prstGeom prst="rect">
+            <a:avLst/>
+          </a:prstGeom>
+          <a:noFill/>
+          <a:ln/>
+        </p:spPr>
+        <p:txBody>
+          <a:bodyPr wrap="square" lIns="0" tIns="0" rIns="0" bIns="0" rtlCol="0" anchor="ctr"/>
+          <a:lstStyle/>
+          <a:p>
+            <a:pPr algn="ctr" indent="0" marL="0">
+              <a:spcAft>
+                <a:spcPts val="600"/>
+              </a:spcAft>
+              <a:buNone/>
+            </a:pPr>
+            <a:r>
+              <a:rPr lang="en-US" sz="2400" strike="sngStrike" dirty="0">
+                <a:solidFill>
+                  <a:srgbClr val="B7A99A"/>
+                </a:solidFill>
+              </a:rPr>
+              <a:t>298,000円</a:t>
+            </a:r>
+            <a:endParaRPr lang="en-US" sz="2400" dirty="0"/>
+          </a:p>
+          <a:p>
+            <a:pPr algn="ctr" indent="0" marL="0">
+              <a:spcAft>
+                <a:spcPts val="600"/>
+              </a:spcAft>
+              <a:buNone/>
+            </a:pPr>
+            <a:r>
+              <a:rPr lang="en-US" sz="2200" dirty="0">
+                <a:solidFill>
+                  <a:srgbClr val="F0876A"/>
+                </a:solidFill>
+              </a:rPr>
+              <a:t>↓</a:t>
+            </a:r>
+            <a:endParaRPr lang="en-US" sz="2400" dirty="0"/>
+          </a:p>
+          <a:p>
+            <a:pPr algn="ctr" indent="0" marL="0">
+              <a:spcAft>
+                <a:spcPts val="600"/>
+              </a:spcAft>
+              <a:buNone/>
+            </a:pPr>
+            <a:r>
+              <a:rPr lang="en-US" sz="6800" b="1" dirty="0">
                 <a:solidFill>
                   <a:srgbClr val="DD6E4E"/>
                 </a:solidFill>
-                <a:latin typeface="Meiryo" pitchFamily="34" charset="0"/>
-                <a:ea typeface="Meiryo" pitchFamily="34" charset="-122"/>
-                <a:cs typeface="Meiryo" pitchFamily="34" charset="-120"/>
-              </a:rPr>
-              <a:t>最後に</a:t>
-            </a:r>
-            <a:endParaRPr lang="en-US" sz="1500" dirty="0"/>
-          </a:p>
-        </p:txBody>
-      </p:sp>
-      <p:sp>
-        <p:nvSpPr>
-          <p:cNvPr id="5" name="Text 3"/>
-          <p:cNvSpPr/>
-          <p:nvPr/>
-        </p:nvSpPr>
-        <p:spPr>
-          <a:xfrm>
-            <a:off x="1097280" y="1463040"/>
-            <a:ext cx="9997135" cy="4754880"/>
-          </a:xfrm>
-          <a:prstGeom prst="rect">
-            <a:avLst/>
-          </a:prstGeom>
-          <a:noFill/>
-          <a:ln/>
-        </p:spPr>
-        <p:txBody>
-          <a:bodyPr wrap="square" lIns="0" tIns="0" rIns="0" bIns="0" rtlCol="0" anchor="ctr"/>
-          <a:lstStyle/>
-          <a:p>
+              </a:rPr>
+              <a:t>248,000</a:t>
+            </a:r>
             <a:pPr algn="ctr" indent="0" marL="0">
-              <a:lnSpc>
-                <a:spcPts val="3000"/>
-              </a:lnSpc>
               <a:spcAft>
-                <a:spcPts val="1600"/>
+                <a:spcPts val="600"/>
               </a:spcAft>
               <a:buNone/>
             </a:pPr>
             <a:r>
-              <a:rPr lang="en-US" sz="2050" dirty="0">
-                <a:solidFill>
-                  <a:srgbClr val="4A3B30"/>
-                </a:solidFill>
-              </a:rPr>
-              <a:t>この90日間、一度も止まらなくていい。完璧じゃなくていい。</a:t>
-            </a:r>
-            <a:endParaRPr lang="en-US" sz="2050" dirty="0"/>
-          </a:p>
+              <a:rPr lang="en-US" sz="3200" b="1" dirty="0">
+                <a:solidFill>
+                  <a:srgbClr val="DD6E4E"/>
+                </a:solidFill>
+              </a:rPr>
+              <a:t>円</a:t>
+            </a:r>
+            <a:endParaRPr lang="en-US" sz="2400" dirty="0"/>
+          </a:p>
+        </p:txBody>
+      </p:sp>
+      <p:sp>
+        <p:nvSpPr>
+          <p:cNvPr id="6" name="Shape 4"/>
+          <p:cNvSpPr/>
+          <p:nvPr/>
+        </p:nvSpPr>
+        <p:spPr>
+          <a:xfrm>
+            <a:off x="3901288" y="4800600"/>
+            <a:ext cx="4389120" cy="502920"/>
+          </a:xfrm>
+          <a:prstGeom prst="roundRect">
+            <a:avLst>
+              <a:gd name="adj" fmla="val 50000"/>
+            </a:avLst>
+          </a:prstGeom>
+          <a:solidFill>
+            <a:srgbClr val="DD6E4E"/>
+          </a:solidFill>
+          <a:ln/>
+        </p:spPr>
+      </p:sp>
+      <p:sp>
+        <p:nvSpPr>
+          <p:cNvPr id="7" name="Text 5"/>
+          <p:cNvSpPr/>
+          <p:nvPr/>
+        </p:nvSpPr>
+        <p:spPr>
+          <a:xfrm>
+            <a:off x="3901288" y="4800600"/>
+            <a:ext cx="4389120" cy="502920"/>
+          </a:xfrm>
+          <a:prstGeom prst="rect">
+            <a:avLst/>
+          </a:prstGeom>
+          <a:noFill/>
+          <a:ln/>
+        </p:spPr>
+        <p:txBody>
+          <a:bodyPr wrap="square" lIns="0" tIns="0" rIns="0" bIns="0" rtlCol="0" anchor="ctr"/>
+          <a:lstStyle/>
           <a:p>
             <a:pPr algn="ctr" indent="0" marL="0">
-              <a:lnSpc>
-                <a:spcPts val="3000"/>
-              </a:lnSpc>
-              <a:spcAft>
-                <a:spcPts val="1600"/>
-              </a:spcAft>
-              <a:buNone/>
-            </a:pPr>
-            <a:r>
-              <a:rPr lang="en-US" sz="2050" dirty="0">
-                <a:solidFill>
-                  <a:srgbClr val="4A3B30"/>
-                </a:solidFill>
-              </a:rPr>
-              <a:t>できない日があっていい。迷っていい。誰かに頼っていい。</a:t>
-            </a:r>
-            <a:endParaRPr lang="en-US" sz="2050" dirty="0"/>
-          </a:p>
-          <a:p>
-            <a:pPr algn="ctr" indent="0" marL="0">
-              <a:lnSpc>
-                <a:spcPts val="3000"/>
-              </a:lnSpc>
-              <a:spcAft>
-                <a:spcPts val="1600"/>
-              </a:spcAft>
-              <a:buNone/>
-            </a:pPr>
-            <a:r>
-              <a:rPr lang="en-US" sz="1850" dirty="0">
-                <a:solidFill>
-                  <a:srgbClr val="8A7A6C"/>
-                </a:solidFill>
-              </a:rPr>
-              <a:t>ただ、一つだけ。</a:t>
-            </a:r>
-            <a:endParaRPr lang="en-US" sz="2050" dirty="0"/>
-          </a:p>
-          <a:p>
-            <a:pPr algn="ctr" indent="0" marL="0">
-              <a:lnSpc>
-                <a:spcPts val="3000"/>
-              </a:lnSpc>
-              <a:spcAft>
-                <a:spcPts val="1600"/>
-              </a:spcAft>
-              <a:buNone/>
-            </a:pPr>
-            <a:r>
-              <a:rPr lang="en-US" sz="2550" b="1" dirty="0">
-                <a:solidFill>
-                  <a:srgbClr val="DD6E4E"/>
-                </a:solidFill>
-              </a:rPr>
-              <a:t>止まっても、また戻ってくる。</a:t>
-            </a:r>
-            <a:endParaRPr lang="en-US" sz="2050" dirty="0"/>
-          </a:p>
-          <a:p>
-            <a:pPr algn="ctr" indent="0" marL="0">
-              <a:lnSpc>
-                <a:spcPts val="3000"/>
-              </a:lnSpc>
-              <a:spcAft>
-                <a:spcPts val="1600"/>
-              </a:spcAft>
-              <a:buNone/>
-            </a:pPr>
-            <a:r>
-              <a:rPr lang="en-US" sz="1850" dirty="0">
-                <a:solidFill>
-                  <a:srgbClr val="8A7A6C"/>
-                </a:solidFill>
-              </a:rPr>
-              <a:t>そして戻ってきたとき、一緒に言いましょう。</a:t>
-            </a:r>
-            <a:endParaRPr lang="en-US" sz="2050" dirty="0"/>
-          </a:p>
-          <a:p>
-            <a:pPr algn="ctr" indent="0" marL="0">
-              <a:lnSpc>
-                <a:spcPts val="3000"/>
-              </a:lnSpc>
-              <a:spcAft>
-                <a:spcPts val="1600"/>
-              </a:spcAft>
-              <a:buNone/>
-            </a:pPr>
-            <a:r>
-              <a:rPr lang="en-US" sz="3000" b="1" dirty="0">
-                <a:solidFill>
-                  <a:srgbClr val="4A3B30"/>
-                </a:solidFill>
-              </a:rPr>
-              <a:t>「戻ってこられた。今日も一つ、できた。」</a:t>
-            </a:r>
-            <a:endParaRPr lang="en-US" sz="2050" dirty="0"/>
-          </a:p>
-        </p:txBody>
-      </p:sp>
-      <p:sp>
-        <p:nvSpPr>
-          <p:cNvPr id="6" name="Text 4"/>
+              <a:buNone/>
+            </a:pPr>
+            <a:r>
+              <a:rPr lang="en-US" sz="1600" b="1" dirty="0">
+                <a:solidFill>
+                  <a:srgbClr val="FFFFFF"/>
+                </a:solidFill>
+                <a:latin typeface="Meiryo" pitchFamily="34" charset="0"/>
+                <a:ea typeface="Meiryo" pitchFamily="34" charset="-122"/>
+                <a:cs typeface="Meiryo" pitchFamily="34" charset="-120"/>
+              </a:rPr>
+              <a:t>本日中のお申し込み・ご入金限定</a:t>
+            </a:r>
+            <a:endParaRPr lang="en-US" sz="1600" dirty="0"/>
+          </a:p>
+        </p:txBody>
+      </p:sp>
+      <p:sp>
+        <p:nvSpPr>
+          <p:cNvPr id="8" name="Text 6"/>
           <p:cNvSpPr/>
           <p:nvPr/>
         </p:nvSpPr>
@@ -24356,7 +23774,7 @@
       </p:sp>
       <p:sp>
         <p:nvSpPr>
-          <p:cNvPr id="7" name="Text 5"/>
+          <p:cNvPr id="9" name="Text 7"/>
           <p:cNvSpPr/>
           <p:nvPr/>
         </p:nvSpPr>
@@ -24387,7 +23805,7 @@
                 <a:ea typeface="Meiryo" pitchFamily="34" charset="-122"/>
                 <a:cs typeface="Meiryo" pitchFamily="34" charset="-120"/>
               </a:rPr>
-              <a:t>39 / 40</a:t>
+              <a:t>39 / 42</a:t>
             </a:r>
             <a:endParaRPr lang="en-US" sz="1150" dirty="0"/>
           </a:p>
@@ -24788,7 +24206,7 @@
                 <a:ea typeface="Meiryo" pitchFamily="34" charset="-122"/>
                 <a:cs typeface="Meiryo" pitchFamily="34" charset="-120"/>
               </a:rPr>
-              <a:t>4 / 40</a:t>
+              <a:t>4 / 42</a:t>
             </a:r>
             <a:endParaRPr lang="en-US" sz="1150" dirty="0"/>
           </a:p>
@@ -24833,6 +24251,1460 @@
           <p:nvPr/>
         </p:nvSpPr>
         <p:spPr>
+          <a:xfrm rot="900000">
+            <a:off x="11109960" y="-685800"/>
+            <a:ext cx="1828800" cy="1828800"/>
+          </a:xfrm>
+          <a:prstGeom prst="hexagon">
+            <a:avLst/>
+          </a:prstGeom>
+          <a:solidFill>
+            <a:srgbClr val="2F9188">
+              <a:alpha val="13000"/>
+            </a:srgbClr>
+          </a:solidFill>
+          <a:ln/>
+        </p:spPr>
+      </p:sp>
+      <p:sp>
+        <p:nvSpPr>
+          <p:cNvPr id="3" name="Text 1"/>
+          <p:cNvSpPr/>
+          <p:nvPr/>
+        </p:nvSpPr>
+        <p:spPr>
+          <a:xfrm>
+            <a:off x="640080" y="804672"/>
+            <a:ext cx="10911535" cy="914400"/>
+          </a:xfrm>
+          <a:prstGeom prst="rect">
+            <a:avLst/>
+          </a:prstGeom>
+          <a:noFill/>
+          <a:ln/>
+        </p:spPr>
+        <p:txBody>
+          <a:bodyPr wrap="square" lIns="0" tIns="0" rIns="0" bIns="0" rtlCol="0" anchor="ctr"/>
+          <a:lstStyle/>
+          <a:p>
+            <a:pPr algn="l" indent="0" marL="0">
+              <a:lnSpc>
+                <a:spcPts val="3400"/>
+              </a:lnSpc>
+              <a:buNone/>
+            </a:pPr>
+            <a:r>
+              <a:rPr lang="en-US" sz="2750" b="1" dirty="0">
+                <a:solidFill>
+                  <a:srgbClr val="4A3B30"/>
+                </a:solidFill>
+                <a:latin typeface="Meiryo" pitchFamily="34" charset="0"/>
+                <a:ea typeface="Meiryo" pitchFamily="34" charset="-122"/>
+                <a:cs typeface="Meiryo" pitchFamily="34" charset="-120"/>
+              </a:rPr>
+              <a:t>「私にもできる？」と思っているあなたへ</a:t>
+            </a:r>
+            <a:endParaRPr lang="en-US" sz="2750" dirty="0"/>
+          </a:p>
+        </p:txBody>
+      </p:sp>
+      <p:sp>
+        <p:nvSpPr>
+          <p:cNvPr id="4" name="Shape 2"/>
+          <p:cNvSpPr/>
+          <p:nvPr/>
+        </p:nvSpPr>
+        <p:spPr>
+          <a:xfrm>
+            <a:off x="640080" y="1783080"/>
+            <a:ext cx="10911535" cy="758952"/>
+          </a:xfrm>
+          <a:prstGeom prst="roundRect">
+            <a:avLst>
+              <a:gd name="adj" fmla="val 14458"/>
+            </a:avLst>
+          </a:prstGeom>
+          <a:solidFill>
+            <a:srgbClr val="FFFDFA"/>
+          </a:solidFill>
+          <a:ln w="12700">
+            <a:solidFill>
+              <a:srgbClr val="EFE2D3"/>
+            </a:solidFill>
+            <a:prstDash val="solid"/>
+          </a:ln>
+        </p:spPr>
+      </p:sp>
+      <p:sp>
+        <p:nvSpPr>
+          <p:cNvPr id="5" name="Text 3"/>
+          <p:cNvSpPr/>
+          <p:nvPr/>
+        </p:nvSpPr>
+        <p:spPr>
+          <a:xfrm>
+            <a:off x="868680" y="1783080"/>
+            <a:ext cx="457200" cy="758952"/>
+          </a:xfrm>
+          <a:prstGeom prst="rect">
+            <a:avLst/>
+          </a:prstGeom>
+          <a:noFill/>
+          <a:ln/>
+        </p:spPr>
+        <p:txBody>
+          <a:bodyPr wrap="square" lIns="0" tIns="0" rIns="0" bIns="0" rtlCol="0" anchor="ctr"/>
+          <a:lstStyle/>
+          <a:p>
+            <a:pPr indent="0" marL="0">
+              <a:buNone/>
+            </a:pPr>
+            <a:r>
+              <a:rPr lang="en-US" sz="2050" b="1" dirty="0">
+                <a:solidFill>
+                  <a:srgbClr val="2F9188"/>
+                </a:solidFill>
+                <a:latin typeface="Meiryo" pitchFamily="34" charset="0"/>
+                <a:ea typeface="Meiryo" pitchFamily="34" charset="-122"/>
+                <a:cs typeface="Meiryo" pitchFamily="34" charset="-120"/>
+              </a:rPr>
+              <a:t>Q</a:t>
+            </a:r>
+            <a:endParaRPr lang="en-US" sz="2050" dirty="0"/>
+          </a:p>
+        </p:txBody>
+      </p:sp>
+      <p:sp>
+        <p:nvSpPr>
+          <p:cNvPr id="6" name="Text 4"/>
+          <p:cNvSpPr/>
+          <p:nvPr/>
+        </p:nvSpPr>
+        <p:spPr>
+          <a:xfrm>
+            <a:off x="1325880" y="1783080"/>
+            <a:ext cx="3108960" cy="758952"/>
+          </a:xfrm>
+          <a:prstGeom prst="rect">
+            <a:avLst/>
+          </a:prstGeom>
+          <a:noFill/>
+          <a:ln/>
+        </p:spPr>
+        <p:txBody>
+          <a:bodyPr wrap="square" lIns="0" tIns="0" rIns="0" bIns="0" rtlCol="0" anchor="ctr"/>
+          <a:lstStyle/>
+          <a:p>
+            <a:pPr indent="0" marL="0">
+              <a:lnSpc>
+                <a:spcPts val="1600"/>
+              </a:lnSpc>
+              <a:buNone/>
+            </a:pPr>
+            <a:r>
+              <a:rPr lang="en-US" sz="1600" b="1" dirty="0">
+                <a:solidFill>
+                  <a:srgbClr val="4A3B30"/>
+                </a:solidFill>
+                <a:latin typeface="Meiryo" pitchFamily="34" charset="0"/>
+                <a:ea typeface="Meiryo" pitchFamily="34" charset="-122"/>
+                <a:cs typeface="Meiryo" pitchFamily="34" charset="-120"/>
+              </a:rPr>
+              <a:t>私にもできますか？</a:t>
+            </a:r>
+            <a:endParaRPr lang="en-US" sz="1600" dirty="0"/>
+          </a:p>
+        </p:txBody>
+      </p:sp>
+      <p:sp>
+        <p:nvSpPr>
+          <p:cNvPr id="7" name="Text 5"/>
+          <p:cNvSpPr/>
+          <p:nvPr/>
+        </p:nvSpPr>
+        <p:spPr>
+          <a:xfrm>
+            <a:off x="4480560" y="1783080"/>
+            <a:ext cx="411480" cy="758952"/>
+          </a:xfrm>
+          <a:prstGeom prst="rect">
+            <a:avLst/>
+          </a:prstGeom>
+          <a:noFill/>
+          <a:ln/>
+        </p:spPr>
+        <p:txBody>
+          <a:bodyPr wrap="square" lIns="0" tIns="0" rIns="0" bIns="0" rtlCol="0" anchor="ctr"/>
+          <a:lstStyle/>
+          <a:p>
+            <a:pPr algn="ctr" indent="0" marL="0">
+              <a:buNone/>
+            </a:pPr>
+            <a:r>
+              <a:rPr lang="en-US" sz="1700" dirty="0">
+                <a:solidFill>
+                  <a:srgbClr val="B7A99A"/>
+                </a:solidFill>
+                <a:latin typeface="Meiryo" pitchFamily="34" charset="0"/>
+                <a:ea typeface="Meiryo" pitchFamily="34" charset="-122"/>
+                <a:cs typeface="Meiryo" pitchFamily="34" charset="-120"/>
+              </a:rPr>
+              <a:t>→</a:t>
+            </a:r>
+            <a:endParaRPr lang="en-US" sz="1700" dirty="0"/>
+          </a:p>
+        </p:txBody>
+      </p:sp>
+      <p:sp>
+        <p:nvSpPr>
+          <p:cNvPr id="8" name="Text 6"/>
+          <p:cNvSpPr/>
+          <p:nvPr/>
+        </p:nvSpPr>
+        <p:spPr>
+          <a:xfrm>
+            <a:off x="4983480" y="1783080"/>
+            <a:ext cx="6293815" cy="758952"/>
+          </a:xfrm>
+          <a:prstGeom prst="rect">
+            <a:avLst/>
+          </a:prstGeom>
+          <a:noFill/>
+          <a:ln/>
+        </p:spPr>
+        <p:txBody>
+          <a:bodyPr wrap="square" lIns="0" tIns="0" rIns="0" bIns="0" rtlCol="0" anchor="ctr"/>
+          <a:lstStyle/>
+          <a:p>
+            <a:pPr indent="0" marL="0">
+              <a:lnSpc>
+                <a:spcPts val="1600"/>
+              </a:lnSpc>
+              <a:buNone/>
+            </a:pPr>
+            <a:r>
+              <a:rPr lang="en-US" sz="1550" dirty="0">
+                <a:solidFill>
+                  <a:srgbClr val="8A7A6C"/>
+                </a:solidFill>
+                <a:latin typeface="Meiryo" pitchFamily="34" charset="0"/>
+                <a:ea typeface="Meiryo" pitchFamily="34" charset="-122"/>
+                <a:cs typeface="Meiryo" pitchFamily="34" charset="-120"/>
+              </a:rPr>
+              <a:t>「これならできる」から始めます。</a:t>
+            </a:r>
+            <a:endParaRPr lang="en-US" sz="1550" dirty="0"/>
+          </a:p>
+        </p:txBody>
+      </p:sp>
+      <p:sp>
+        <p:nvSpPr>
+          <p:cNvPr id="9" name="Shape 7"/>
+          <p:cNvSpPr/>
+          <p:nvPr/>
+        </p:nvSpPr>
+        <p:spPr>
+          <a:xfrm>
+            <a:off x="640080" y="2633472"/>
+            <a:ext cx="10911535" cy="758952"/>
+          </a:xfrm>
+          <a:prstGeom prst="roundRect">
+            <a:avLst>
+              <a:gd name="adj" fmla="val 14458"/>
+            </a:avLst>
+          </a:prstGeom>
+          <a:solidFill>
+            <a:srgbClr val="FFFDFA"/>
+          </a:solidFill>
+          <a:ln w="12700">
+            <a:solidFill>
+              <a:srgbClr val="EFE2D3"/>
+            </a:solidFill>
+            <a:prstDash val="solid"/>
+          </a:ln>
+        </p:spPr>
+      </p:sp>
+      <p:sp>
+        <p:nvSpPr>
+          <p:cNvPr id="10" name="Text 8"/>
+          <p:cNvSpPr/>
+          <p:nvPr/>
+        </p:nvSpPr>
+        <p:spPr>
+          <a:xfrm>
+            <a:off x="868680" y="2633472"/>
+            <a:ext cx="457200" cy="758952"/>
+          </a:xfrm>
+          <a:prstGeom prst="rect">
+            <a:avLst/>
+          </a:prstGeom>
+          <a:noFill/>
+          <a:ln/>
+        </p:spPr>
+        <p:txBody>
+          <a:bodyPr wrap="square" lIns="0" tIns="0" rIns="0" bIns="0" rtlCol="0" anchor="ctr"/>
+          <a:lstStyle/>
+          <a:p>
+            <a:pPr indent="0" marL="0">
+              <a:buNone/>
+            </a:pPr>
+            <a:r>
+              <a:rPr lang="en-US" sz="2050" b="1" dirty="0">
+                <a:solidFill>
+                  <a:srgbClr val="2F9188"/>
+                </a:solidFill>
+                <a:latin typeface="Meiryo" pitchFamily="34" charset="0"/>
+                <a:ea typeface="Meiryo" pitchFamily="34" charset="-122"/>
+                <a:cs typeface="Meiryo" pitchFamily="34" charset="-120"/>
+              </a:rPr>
+              <a:t>Q</a:t>
+            </a:r>
+            <a:endParaRPr lang="en-US" sz="2050" dirty="0"/>
+          </a:p>
+        </p:txBody>
+      </p:sp>
+      <p:sp>
+        <p:nvSpPr>
+          <p:cNvPr id="11" name="Text 9"/>
+          <p:cNvSpPr/>
+          <p:nvPr/>
+        </p:nvSpPr>
+        <p:spPr>
+          <a:xfrm>
+            <a:off x="1325880" y="2633472"/>
+            <a:ext cx="3108960" cy="758952"/>
+          </a:xfrm>
+          <a:prstGeom prst="rect">
+            <a:avLst/>
+          </a:prstGeom>
+          <a:noFill/>
+          <a:ln/>
+        </p:spPr>
+        <p:txBody>
+          <a:bodyPr wrap="square" lIns="0" tIns="0" rIns="0" bIns="0" rtlCol="0" anchor="ctr"/>
+          <a:lstStyle/>
+          <a:p>
+            <a:pPr indent="0" marL="0">
+              <a:lnSpc>
+                <a:spcPts val="1600"/>
+              </a:lnSpc>
+              <a:buNone/>
+            </a:pPr>
+            <a:r>
+              <a:rPr lang="en-US" sz="1600" b="1" dirty="0">
+                <a:solidFill>
+                  <a:srgbClr val="4A3B30"/>
+                </a:solidFill>
+                <a:latin typeface="Meiryo" pitchFamily="34" charset="0"/>
+                <a:ea typeface="Meiryo" pitchFamily="34" charset="-122"/>
+                <a:cs typeface="Meiryo" pitchFamily="34" charset="-120"/>
+              </a:rPr>
+              <a:t>忙しくても大丈夫？</a:t>
+            </a:r>
+            <a:endParaRPr lang="en-US" sz="1600" dirty="0"/>
+          </a:p>
+        </p:txBody>
+      </p:sp>
+      <p:sp>
+        <p:nvSpPr>
+          <p:cNvPr id="12" name="Text 10"/>
+          <p:cNvSpPr/>
+          <p:nvPr/>
+        </p:nvSpPr>
+        <p:spPr>
+          <a:xfrm>
+            <a:off x="4480560" y="2633472"/>
+            <a:ext cx="411480" cy="758952"/>
+          </a:xfrm>
+          <a:prstGeom prst="rect">
+            <a:avLst/>
+          </a:prstGeom>
+          <a:noFill/>
+          <a:ln/>
+        </p:spPr>
+        <p:txBody>
+          <a:bodyPr wrap="square" lIns="0" tIns="0" rIns="0" bIns="0" rtlCol="0" anchor="ctr"/>
+          <a:lstStyle/>
+          <a:p>
+            <a:pPr algn="ctr" indent="0" marL="0">
+              <a:buNone/>
+            </a:pPr>
+            <a:r>
+              <a:rPr lang="en-US" sz="1700" dirty="0">
+                <a:solidFill>
+                  <a:srgbClr val="B7A99A"/>
+                </a:solidFill>
+                <a:latin typeface="Meiryo" pitchFamily="34" charset="0"/>
+                <a:ea typeface="Meiryo" pitchFamily="34" charset="-122"/>
+                <a:cs typeface="Meiryo" pitchFamily="34" charset="-120"/>
+              </a:rPr>
+              <a:t>→</a:t>
+            </a:r>
+            <a:endParaRPr lang="en-US" sz="1700" dirty="0"/>
+          </a:p>
+        </p:txBody>
+      </p:sp>
+      <p:sp>
+        <p:nvSpPr>
+          <p:cNvPr id="13" name="Text 11"/>
+          <p:cNvSpPr/>
+          <p:nvPr/>
+        </p:nvSpPr>
+        <p:spPr>
+          <a:xfrm>
+            <a:off x="4983480" y="2633472"/>
+            <a:ext cx="6293815" cy="758952"/>
+          </a:xfrm>
+          <a:prstGeom prst="rect">
+            <a:avLst/>
+          </a:prstGeom>
+          <a:noFill/>
+          <a:ln/>
+        </p:spPr>
+        <p:txBody>
+          <a:bodyPr wrap="square" lIns="0" tIns="0" rIns="0" bIns="0" rtlCol="0" anchor="ctr"/>
+          <a:lstStyle/>
+          <a:p>
+            <a:pPr indent="0" marL="0">
+              <a:lnSpc>
+                <a:spcPts val="1600"/>
+              </a:lnSpc>
+              <a:buNone/>
+            </a:pPr>
+            <a:r>
+              <a:rPr lang="en-US" sz="1550" dirty="0">
+                <a:solidFill>
+                  <a:srgbClr val="8A7A6C"/>
+                </a:solidFill>
+                <a:latin typeface="Meiryo" pitchFamily="34" charset="0"/>
+                <a:ea typeface="Meiryo" pitchFamily="34" charset="-122"/>
+                <a:cs typeface="Meiryo" pitchFamily="34" charset="-120"/>
+              </a:rPr>
+              <a:t>今の生活に入る大きさを一緒に探します。</a:t>
+            </a:r>
+            <a:endParaRPr lang="en-US" sz="1550" dirty="0"/>
+          </a:p>
+        </p:txBody>
+      </p:sp>
+      <p:sp>
+        <p:nvSpPr>
+          <p:cNvPr id="14" name="Shape 12"/>
+          <p:cNvSpPr/>
+          <p:nvPr/>
+        </p:nvSpPr>
+        <p:spPr>
+          <a:xfrm>
+            <a:off x="640080" y="3483864"/>
+            <a:ext cx="10911535" cy="758952"/>
+          </a:xfrm>
+          <a:prstGeom prst="roundRect">
+            <a:avLst>
+              <a:gd name="adj" fmla="val 14458"/>
+            </a:avLst>
+          </a:prstGeom>
+          <a:solidFill>
+            <a:srgbClr val="FFFDFA"/>
+          </a:solidFill>
+          <a:ln w="12700">
+            <a:solidFill>
+              <a:srgbClr val="EFE2D3"/>
+            </a:solidFill>
+            <a:prstDash val="solid"/>
+          </a:ln>
+        </p:spPr>
+      </p:sp>
+      <p:sp>
+        <p:nvSpPr>
+          <p:cNvPr id="15" name="Text 13"/>
+          <p:cNvSpPr/>
+          <p:nvPr/>
+        </p:nvSpPr>
+        <p:spPr>
+          <a:xfrm>
+            <a:off x="868680" y="3483864"/>
+            <a:ext cx="457200" cy="758952"/>
+          </a:xfrm>
+          <a:prstGeom prst="rect">
+            <a:avLst/>
+          </a:prstGeom>
+          <a:noFill/>
+          <a:ln/>
+        </p:spPr>
+        <p:txBody>
+          <a:bodyPr wrap="square" lIns="0" tIns="0" rIns="0" bIns="0" rtlCol="0" anchor="ctr"/>
+          <a:lstStyle/>
+          <a:p>
+            <a:pPr indent="0" marL="0">
+              <a:buNone/>
+            </a:pPr>
+            <a:r>
+              <a:rPr lang="en-US" sz="2050" b="1" dirty="0">
+                <a:solidFill>
+                  <a:srgbClr val="2F9188"/>
+                </a:solidFill>
+                <a:latin typeface="Meiryo" pitchFamily="34" charset="0"/>
+                <a:ea typeface="Meiryo" pitchFamily="34" charset="-122"/>
+                <a:cs typeface="Meiryo" pitchFamily="34" charset="-120"/>
+              </a:rPr>
+              <a:t>Q</a:t>
+            </a:r>
+            <a:endParaRPr lang="en-US" sz="2050" dirty="0"/>
+          </a:p>
+        </p:txBody>
+      </p:sp>
+      <p:sp>
+        <p:nvSpPr>
+          <p:cNvPr id="16" name="Text 14"/>
+          <p:cNvSpPr/>
+          <p:nvPr/>
+        </p:nvSpPr>
+        <p:spPr>
+          <a:xfrm>
+            <a:off x="1325880" y="3483864"/>
+            <a:ext cx="3108960" cy="758952"/>
+          </a:xfrm>
+          <a:prstGeom prst="rect">
+            <a:avLst/>
+          </a:prstGeom>
+          <a:noFill/>
+          <a:ln/>
+        </p:spPr>
+        <p:txBody>
+          <a:bodyPr wrap="square" lIns="0" tIns="0" rIns="0" bIns="0" rtlCol="0" anchor="ctr"/>
+          <a:lstStyle/>
+          <a:p>
+            <a:pPr indent="0" marL="0">
+              <a:lnSpc>
+                <a:spcPts val="1600"/>
+              </a:lnSpc>
+              <a:buNone/>
+            </a:pPr>
+            <a:r>
+              <a:rPr lang="en-US" sz="1600" b="1" dirty="0">
+                <a:solidFill>
+                  <a:srgbClr val="4A3B30"/>
+                </a:solidFill>
+                <a:latin typeface="Meiryo" pitchFamily="34" charset="0"/>
+                <a:ea typeface="Meiryo" pitchFamily="34" charset="-122"/>
+                <a:cs typeface="Meiryo" pitchFamily="34" charset="-120"/>
+              </a:rPr>
+              <a:t>また止まったら？</a:t>
+            </a:r>
+            <a:endParaRPr lang="en-US" sz="1600" dirty="0"/>
+          </a:p>
+        </p:txBody>
+      </p:sp>
+      <p:sp>
+        <p:nvSpPr>
+          <p:cNvPr id="17" name="Text 15"/>
+          <p:cNvSpPr/>
+          <p:nvPr/>
+        </p:nvSpPr>
+        <p:spPr>
+          <a:xfrm>
+            <a:off x="4480560" y="3483864"/>
+            <a:ext cx="411480" cy="758952"/>
+          </a:xfrm>
+          <a:prstGeom prst="rect">
+            <a:avLst/>
+          </a:prstGeom>
+          <a:noFill/>
+          <a:ln/>
+        </p:spPr>
+        <p:txBody>
+          <a:bodyPr wrap="square" lIns="0" tIns="0" rIns="0" bIns="0" rtlCol="0" anchor="ctr"/>
+          <a:lstStyle/>
+          <a:p>
+            <a:pPr algn="ctr" indent="0" marL="0">
+              <a:buNone/>
+            </a:pPr>
+            <a:r>
+              <a:rPr lang="en-US" sz="1700" dirty="0">
+                <a:solidFill>
+                  <a:srgbClr val="B7A99A"/>
+                </a:solidFill>
+                <a:latin typeface="Meiryo" pitchFamily="34" charset="0"/>
+                <a:ea typeface="Meiryo" pitchFamily="34" charset="-122"/>
+                <a:cs typeface="Meiryo" pitchFamily="34" charset="-120"/>
+              </a:rPr>
+              <a:t>→</a:t>
+            </a:r>
+            <a:endParaRPr lang="en-US" sz="1700" dirty="0"/>
+          </a:p>
+        </p:txBody>
+      </p:sp>
+      <p:sp>
+        <p:nvSpPr>
+          <p:cNvPr id="18" name="Text 16"/>
+          <p:cNvSpPr/>
+          <p:nvPr/>
+        </p:nvSpPr>
+        <p:spPr>
+          <a:xfrm>
+            <a:off x="4983480" y="3483864"/>
+            <a:ext cx="6293815" cy="758952"/>
+          </a:xfrm>
+          <a:prstGeom prst="rect">
+            <a:avLst/>
+          </a:prstGeom>
+          <a:noFill/>
+          <a:ln/>
+        </p:spPr>
+        <p:txBody>
+          <a:bodyPr wrap="square" lIns="0" tIns="0" rIns="0" bIns="0" rtlCol="0" anchor="ctr"/>
+          <a:lstStyle/>
+          <a:p>
+            <a:pPr indent="0" marL="0">
+              <a:lnSpc>
+                <a:spcPts val="1600"/>
+              </a:lnSpc>
+              <a:buNone/>
+            </a:pPr>
+            <a:r>
+              <a:rPr lang="en-US" sz="1550" dirty="0">
+                <a:solidFill>
+                  <a:srgbClr val="8A7A6C"/>
+                </a:solidFill>
+                <a:latin typeface="Meiryo" pitchFamily="34" charset="0"/>
+                <a:ea typeface="Meiryo" pitchFamily="34" charset="-122"/>
+                <a:cs typeface="Meiryo" pitchFamily="34" charset="-120"/>
+              </a:rPr>
+              <a:t>止まってください。そこから戻る練習をします。</a:t>
+            </a:r>
+            <a:endParaRPr lang="en-US" sz="1550" dirty="0"/>
+          </a:p>
+        </p:txBody>
+      </p:sp>
+      <p:sp>
+        <p:nvSpPr>
+          <p:cNvPr id="19" name="Shape 17"/>
+          <p:cNvSpPr/>
+          <p:nvPr/>
+        </p:nvSpPr>
+        <p:spPr>
+          <a:xfrm>
+            <a:off x="640080" y="4334256"/>
+            <a:ext cx="10911535" cy="758952"/>
+          </a:xfrm>
+          <a:prstGeom prst="roundRect">
+            <a:avLst>
+              <a:gd name="adj" fmla="val 14458"/>
+            </a:avLst>
+          </a:prstGeom>
+          <a:solidFill>
+            <a:srgbClr val="FFFDFA"/>
+          </a:solidFill>
+          <a:ln w="12700">
+            <a:solidFill>
+              <a:srgbClr val="EFE2D3"/>
+            </a:solidFill>
+            <a:prstDash val="solid"/>
+          </a:ln>
+        </p:spPr>
+      </p:sp>
+      <p:sp>
+        <p:nvSpPr>
+          <p:cNvPr id="20" name="Text 18"/>
+          <p:cNvSpPr/>
+          <p:nvPr/>
+        </p:nvSpPr>
+        <p:spPr>
+          <a:xfrm>
+            <a:off x="868680" y="4334256"/>
+            <a:ext cx="457200" cy="758952"/>
+          </a:xfrm>
+          <a:prstGeom prst="rect">
+            <a:avLst/>
+          </a:prstGeom>
+          <a:noFill/>
+          <a:ln/>
+        </p:spPr>
+        <p:txBody>
+          <a:bodyPr wrap="square" lIns="0" tIns="0" rIns="0" bIns="0" rtlCol="0" anchor="ctr"/>
+          <a:lstStyle/>
+          <a:p>
+            <a:pPr indent="0" marL="0">
+              <a:buNone/>
+            </a:pPr>
+            <a:r>
+              <a:rPr lang="en-US" sz="2050" b="1" dirty="0">
+                <a:solidFill>
+                  <a:srgbClr val="2F9188"/>
+                </a:solidFill>
+                <a:latin typeface="Meiryo" pitchFamily="34" charset="0"/>
+                <a:ea typeface="Meiryo" pitchFamily="34" charset="-122"/>
+                <a:cs typeface="Meiryo" pitchFamily="34" charset="-120"/>
+              </a:rPr>
+              <a:t>Q</a:t>
+            </a:r>
+            <a:endParaRPr lang="en-US" sz="2050" dirty="0"/>
+          </a:p>
+        </p:txBody>
+      </p:sp>
+      <p:sp>
+        <p:nvSpPr>
+          <p:cNvPr id="21" name="Text 19"/>
+          <p:cNvSpPr/>
+          <p:nvPr/>
+        </p:nvSpPr>
+        <p:spPr>
+          <a:xfrm>
+            <a:off x="1325880" y="4334256"/>
+            <a:ext cx="3108960" cy="758952"/>
+          </a:xfrm>
+          <a:prstGeom prst="rect">
+            <a:avLst/>
+          </a:prstGeom>
+          <a:noFill/>
+          <a:ln/>
+        </p:spPr>
+        <p:txBody>
+          <a:bodyPr wrap="square" lIns="0" tIns="0" rIns="0" bIns="0" rtlCol="0" anchor="ctr"/>
+          <a:lstStyle/>
+          <a:p>
+            <a:pPr indent="0" marL="0">
+              <a:lnSpc>
+                <a:spcPts val="1600"/>
+              </a:lnSpc>
+              <a:buNone/>
+            </a:pPr>
+            <a:r>
+              <a:rPr lang="en-US" sz="1600" b="1" dirty="0">
+                <a:solidFill>
+                  <a:srgbClr val="4A3B30"/>
+                </a:solidFill>
+                <a:latin typeface="Meiryo" pitchFamily="34" charset="0"/>
+                <a:ea typeface="Meiryo" pitchFamily="34" charset="-122"/>
+                <a:cs typeface="Meiryo" pitchFamily="34" charset="-120"/>
+              </a:rPr>
+              <a:t>結果が出なかったら？</a:t>
+            </a:r>
+            <a:endParaRPr lang="en-US" sz="1600" dirty="0"/>
+          </a:p>
+        </p:txBody>
+      </p:sp>
+      <p:sp>
+        <p:nvSpPr>
+          <p:cNvPr id="22" name="Text 20"/>
+          <p:cNvSpPr/>
+          <p:nvPr/>
+        </p:nvSpPr>
+        <p:spPr>
+          <a:xfrm>
+            <a:off x="4480560" y="4334256"/>
+            <a:ext cx="411480" cy="758952"/>
+          </a:xfrm>
+          <a:prstGeom prst="rect">
+            <a:avLst/>
+          </a:prstGeom>
+          <a:noFill/>
+          <a:ln/>
+        </p:spPr>
+        <p:txBody>
+          <a:bodyPr wrap="square" lIns="0" tIns="0" rIns="0" bIns="0" rtlCol="0" anchor="ctr"/>
+          <a:lstStyle/>
+          <a:p>
+            <a:pPr algn="ctr" indent="0" marL="0">
+              <a:buNone/>
+            </a:pPr>
+            <a:r>
+              <a:rPr lang="en-US" sz="1700" dirty="0">
+                <a:solidFill>
+                  <a:srgbClr val="B7A99A"/>
+                </a:solidFill>
+                <a:latin typeface="Meiryo" pitchFamily="34" charset="0"/>
+                <a:ea typeface="Meiryo" pitchFamily="34" charset="-122"/>
+                <a:cs typeface="Meiryo" pitchFamily="34" charset="-120"/>
+              </a:rPr>
+              <a:t>→</a:t>
+            </a:r>
+            <a:endParaRPr lang="en-US" sz="1700" dirty="0"/>
+          </a:p>
+        </p:txBody>
+      </p:sp>
+      <p:sp>
+        <p:nvSpPr>
+          <p:cNvPr id="23" name="Text 21"/>
+          <p:cNvSpPr/>
+          <p:nvPr/>
+        </p:nvSpPr>
+        <p:spPr>
+          <a:xfrm>
+            <a:off x="4983480" y="4334256"/>
+            <a:ext cx="6293815" cy="758952"/>
+          </a:xfrm>
+          <a:prstGeom prst="rect">
+            <a:avLst/>
+          </a:prstGeom>
+          <a:noFill/>
+          <a:ln/>
+        </p:spPr>
+        <p:txBody>
+          <a:bodyPr wrap="square" lIns="0" tIns="0" rIns="0" bIns="0" rtlCol="0" anchor="ctr"/>
+          <a:lstStyle/>
+          <a:p>
+            <a:pPr indent="0" marL="0">
+              <a:lnSpc>
+                <a:spcPts val="1600"/>
+              </a:lnSpc>
+              <a:buNone/>
+            </a:pPr>
+            <a:r>
+              <a:rPr lang="en-US" sz="1550" dirty="0">
+                <a:solidFill>
+                  <a:srgbClr val="8A7A6C"/>
+                </a:solidFill>
+                <a:latin typeface="Meiryo" pitchFamily="34" charset="0"/>
+                <a:ea typeface="Meiryo" pitchFamily="34" charset="-122"/>
+                <a:cs typeface="Meiryo" pitchFamily="34" charset="-120"/>
+              </a:rPr>
+              <a:t>結果だけではなく、この先も使える「自分の進み方」をつくります。</a:t>
+            </a:r>
+            <a:endParaRPr lang="en-US" sz="1550" dirty="0"/>
+          </a:p>
+        </p:txBody>
+      </p:sp>
+      <p:sp>
+        <p:nvSpPr>
+          <p:cNvPr id="24" name="Shape 22"/>
+          <p:cNvSpPr/>
+          <p:nvPr/>
+        </p:nvSpPr>
+        <p:spPr>
+          <a:xfrm>
+            <a:off x="640080" y="5184648"/>
+            <a:ext cx="10911535" cy="758952"/>
+          </a:xfrm>
+          <a:prstGeom prst="roundRect">
+            <a:avLst>
+              <a:gd name="adj" fmla="val 14458"/>
+            </a:avLst>
+          </a:prstGeom>
+          <a:solidFill>
+            <a:srgbClr val="FFFDFA"/>
+          </a:solidFill>
+          <a:ln w="12700">
+            <a:solidFill>
+              <a:srgbClr val="EFE2D3"/>
+            </a:solidFill>
+            <a:prstDash val="solid"/>
+          </a:ln>
+        </p:spPr>
+      </p:sp>
+      <p:sp>
+        <p:nvSpPr>
+          <p:cNvPr id="25" name="Text 23"/>
+          <p:cNvSpPr/>
+          <p:nvPr/>
+        </p:nvSpPr>
+        <p:spPr>
+          <a:xfrm>
+            <a:off x="868680" y="5184648"/>
+            <a:ext cx="457200" cy="758952"/>
+          </a:xfrm>
+          <a:prstGeom prst="rect">
+            <a:avLst/>
+          </a:prstGeom>
+          <a:noFill/>
+          <a:ln/>
+        </p:spPr>
+        <p:txBody>
+          <a:bodyPr wrap="square" lIns="0" tIns="0" rIns="0" bIns="0" rtlCol="0" anchor="ctr"/>
+          <a:lstStyle/>
+          <a:p>
+            <a:pPr indent="0" marL="0">
+              <a:buNone/>
+            </a:pPr>
+            <a:r>
+              <a:rPr lang="en-US" sz="2050" b="1" dirty="0">
+                <a:solidFill>
+                  <a:srgbClr val="2F9188"/>
+                </a:solidFill>
+                <a:latin typeface="Meiryo" pitchFamily="34" charset="0"/>
+                <a:ea typeface="Meiryo" pitchFamily="34" charset="-122"/>
+                <a:cs typeface="Meiryo" pitchFamily="34" charset="-120"/>
+              </a:rPr>
+              <a:t>Q</a:t>
+            </a:r>
+            <a:endParaRPr lang="en-US" sz="2050" dirty="0"/>
+          </a:p>
+        </p:txBody>
+      </p:sp>
+      <p:sp>
+        <p:nvSpPr>
+          <p:cNvPr id="26" name="Text 24"/>
+          <p:cNvSpPr/>
+          <p:nvPr/>
+        </p:nvSpPr>
+        <p:spPr>
+          <a:xfrm>
+            <a:off x="1325880" y="5184648"/>
+            <a:ext cx="3108960" cy="758952"/>
+          </a:xfrm>
+          <a:prstGeom prst="rect">
+            <a:avLst/>
+          </a:prstGeom>
+          <a:noFill/>
+          <a:ln/>
+        </p:spPr>
+        <p:txBody>
+          <a:bodyPr wrap="square" lIns="0" tIns="0" rIns="0" bIns="0" rtlCol="0" anchor="ctr"/>
+          <a:lstStyle/>
+          <a:p>
+            <a:pPr indent="0" marL="0">
+              <a:lnSpc>
+                <a:spcPts val="1600"/>
+              </a:lnSpc>
+              <a:buNone/>
+            </a:pPr>
+            <a:r>
+              <a:rPr lang="en-US" sz="1600" b="1" dirty="0">
+                <a:solidFill>
+                  <a:srgbClr val="4A3B30"/>
+                </a:solidFill>
+                <a:latin typeface="Meiryo" pitchFamily="34" charset="0"/>
+                <a:ea typeface="Meiryo" pitchFamily="34" charset="-122"/>
+                <a:cs typeface="Meiryo" pitchFamily="34" charset="-120"/>
+              </a:rPr>
+              <a:t>一人でやってみてもいい？</a:t>
+            </a:r>
+            <a:endParaRPr lang="en-US" sz="1600" dirty="0"/>
+          </a:p>
+        </p:txBody>
+      </p:sp>
+      <p:sp>
+        <p:nvSpPr>
+          <p:cNvPr id="27" name="Text 25"/>
+          <p:cNvSpPr/>
+          <p:nvPr/>
+        </p:nvSpPr>
+        <p:spPr>
+          <a:xfrm>
+            <a:off x="4480560" y="5184648"/>
+            <a:ext cx="411480" cy="758952"/>
+          </a:xfrm>
+          <a:prstGeom prst="rect">
+            <a:avLst/>
+          </a:prstGeom>
+          <a:noFill/>
+          <a:ln/>
+        </p:spPr>
+        <p:txBody>
+          <a:bodyPr wrap="square" lIns="0" tIns="0" rIns="0" bIns="0" rtlCol="0" anchor="ctr"/>
+          <a:lstStyle/>
+          <a:p>
+            <a:pPr algn="ctr" indent="0" marL="0">
+              <a:buNone/>
+            </a:pPr>
+            <a:r>
+              <a:rPr lang="en-US" sz="1700" dirty="0">
+                <a:solidFill>
+                  <a:srgbClr val="B7A99A"/>
+                </a:solidFill>
+                <a:latin typeface="Meiryo" pitchFamily="34" charset="0"/>
+                <a:ea typeface="Meiryo" pitchFamily="34" charset="-122"/>
+                <a:cs typeface="Meiryo" pitchFamily="34" charset="-120"/>
+              </a:rPr>
+              <a:t>→</a:t>
+            </a:r>
+            <a:endParaRPr lang="en-US" sz="1700" dirty="0"/>
+          </a:p>
+        </p:txBody>
+      </p:sp>
+      <p:sp>
+        <p:nvSpPr>
+          <p:cNvPr id="28" name="Text 26"/>
+          <p:cNvSpPr/>
+          <p:nvPr/>
+        </p:nvSpPr>
+        <p:spPr>
+          <a:xfrm>
+            <a:off x="4983480" y="5184648"/>
+            <a:ext cx="6293815" cy="758952"/>
+          </a:xfrm>
+          <a:prstGeom prst="rect">
+            <a:avLst/>
+          </a:prstGeom>
+          <a:noFill/>
+          <a:ln/>
+        </p:spPr>
+        <p:txBody>
+          <a:bodyPr wrap="square" lIns="0" tIns="0" rIns="0" bIns="0" rtlCol="0" anchor="ctr"/>
+          <a:lstStyle/>
+          <a:p>
+            <a:pPr indent="0" marL="0">
+              <a:lnSpc>
+                <a:spcPts val="1600"/>
+              </a:lnSpc>
+              <a:buNone/>
+            </a:pPr>
+            <a:r>
+              <a:rPr lang="en-US" sz="1550" dirty="0">
+                <a:solidFill>
+                  <a:srgbClr val="8A7A6C"/>
+                </a:solidFill>
+                <a:latin typeface="Meiryo" pitchFamily="34" charset="0"/>
+                <a:ea typeface="Meiryo" pitchFamily="34" charset="-122"/>
+                <a:cs typeface="Meiryo" pitchFamily="34" charset="-120"/>
+              </a:rPr>
+              <a:t>もちろんです。でも、一人で何度も止まってきたなら、「環境を変える」ことも一つの選択です。</a:t>
+            </a:r>
+            <a:endParaRPr lang="en-US" sz="1550" dirty="0"/>
+          </a:p>
+        </p:txBody>
+      </p:sp>
+      <p:sp>
+        <p:nvSpPr>
+          <p:cNvPr id="29" name="Text 27"/>
+          <p:cNvSpPr/>
+          <p:nvPr/>
+        </p:nvSpPr>
+        <p:spPr>
+          <a:xfrm>
+            <a:off x="640080" y="6419088"/>
+            <a:ext cx="5486400" cy="292608"/>
+          </a:xfrm>
+          <a:prstGeom prst="rect">
+            <a:avLst/>
+          </a:prstGeom>
+          <a:noFill/>
+          <a:ln/>
+        </p:spPr>
+        <p:txBody>
+          <a:bodyPr wrap="square" lIns="0" tIns="0" rIns="0" bIns="0" rtlCol="0" anchor="ctr"/>
+          <a:lstStyle/>
+          <a:p>
+            <a:pPr algn="l" indent="0" marL="0">
+              <a:buNone/>
+            </a:pPr>
+            <a:r>
+              <a:rPr lang="en-US" sz="1150" dirty="0">
+                <a:solidFill>
+                  <a:srgbClr val="B7A99A"/>
+                </a:solidFill>
+                <a:latin typeface="Meiryo" pitchFamily="34" charset="0"/>
+                <a:ea typeface="Meiryo" pitchFamily="34" charset="-122"/>
+                <a:cs typeface="Meiryo" pitchFamily="34" charset="-120"/>
+              </a:rPr>
+              <a:t>できたのかけらワークショップ</a:t>
+            </a:r>
+            <a:endParaRPr lang="en-US" sz="1150" dirty="0"/>
+          </a:p>
+        </p:txBody>
+      </p:sp>
+      <p:sp>
+        <p:nvSpPr>
+          <p:cNvPr id="30" name="Text 28"/>
+          <p:cNvSpPr/>
+          <p:nvPr/>
+        </p:nvSpPr>
+        <p:spPr>
+          <a:xfrm>
+            <a:off x="10637215" y="6419088"/>
+            <a:ext cx="914400" cy="292608"/>
+          </a:xfrm>
+          <a:prstGeom prst="rect">
+            <a:avLst/>
+          </a:prstGeom>
+          <a:noFill/>
+          <a:ln/>
+        </p:spPr>
+        <p:txBody>
+          <a:bodyPr wrap="square" lIns="0" tIns="0" rIns="0" bIns="0" rtlCol="0" anchor="ctr"/>
+          <a:lstStyle/>
+          <a:p>
+            <a:pPr algn="r" indent="0" marL="0">
+              <a:buNone/>
+            </a:pPr>
+            <a:r>
+              <a:rPr lang="en-US" sz="1150" dirty="0">
+                <a:solidFill>
+                  <a:srgbClr val="B7A99A"/>
+                </a:solidFill>
+                <a:latin typeface="Meiryo" pitchFamily="34" charset="0"/>
+                <a:ea typeface="Meiryo" pitchFamily="34" charset="-122"/>
+                <a:cs typeface="Meiryo" pitchFamily="34" charset="-120"/>
+              </a:rPr>
+              <a:t>40 / 42</a:t>
+            </a:r>
+            <a:endParaRPr lang="en-US" sz="1150" dirty="0"/>
+          </a:p>
+        </p:txBody>
+      </p:sp>
+    </p:spTree>
+  </p:cSld>
+  <p:clrMapOvr>
+    <a:masterClrMapping/>
+  </p:clrMapOvr>
+</p:sld>
+</file>
+
+<file path=ppt/slides/slide41.xml><?xml version="1.0" encoding="utf-8"?>
+<p:sld xmlns:a="http://schemas.openxmlformats.org/drawingml/2006/main" xmlns:r="http://schemas.openxmlformats.org/officeDocument/2006/relationships" xmlns:p="http://schemas.openxmlformats.org/presentationml/2006/main">
+  <p:cSld name="Slide 41">
+    <p:bg>
+      <p:bgPr>
+        <a:solidFill>
+          <a:srgbClr val="FFF8F0"/>
+        </a:solidFill>
+      </p:bgPr>
+    </p:bg>
+    <p:spTree>
+      <p:nvGrpSpPr>
+        <p:cNvPr id="1" name=""/>
+        <p:cNvGrpSpPr/>
+        <p:nvPr/>
+      </p:nvGrpSpPr>
+      <p:grpSpPr>
+        <a:xfrm>
+          <a:off x="0" y="0"/>
+          <a:ext cx="0" cy="0"/>
+          <a:chOff x="0" y="0"/>
+          <a:chExt cx="0" cy="0"/>
+        </a:xfrm>
+      </p:grpSpPr>
+      <p:sp>
+        <p:nvSpPr>
+          <p:cNvPr id="2" name="Shape 0"/>
+          <p:cNvSpPr/>
+          <p:nvPr/>
+        </p:nvSpPr>
+        <p:spPr>
+          <a:xfrm rot="900000">
+            <a:off x="11109960" y="-685800"/>
+            <a:ext cx="1828800" cy="1828800"/>
+          </a:xfrm>
+          <a:prstGeom prst="hexagon">
+            <a:avLst/>
+          </a:prstGeom>
+          <a:solidFill>
+            <a:srgbClr val="F0876A">
+              <a:alpha val="13000"/>
+            </a:srgbClr>
+          </a:solidFill>
+          <a:ln/>
+        </p:spPr>
+      </p:sp>
+      <p:sp>
+        <p:nvSpPr>
+          <p:cNvPr id="3" name="Shape 1"/>
+          <p:cNvSpPr/>
+          <p:nvPr/>
+        </p:nvSpPr>
+        <p:spPr>
+          <a:xfrm rot="720000">
+            <a:off x="-868680" y="5623560"/>
+            <a:ext cx="1737360" cy="1737360"/>
+          </a:xfrm>
+          <a:prstGeom prst="hexagon">
+            <a:avLst/>
+          </a:prstGeom>
+          <a:solidFill>
+            <a:srgbClr val="2F9188">
+              <a:alpha val="13000"/>
+            </a:srgbClr>
+          </a:solidFill>
+          <a:ln/>
+        </p:spPr>
+      </p:sp>
+      <p:sp>
+        <p:nvSpPr>
+          <p:cNvPr id="4" name="Text 2"/>
+          <p:cNvSpPr/>
+          <p:nvPr/>
+        </p:nvSpPr>
+        <p:spPr>
+          <a:xfrm>
+            <a:off x="640080" y="457200"/>
+            <a:ext cx="9144000" cy="320040"/>
+          </a:xfrm>
+          <a:prstGeom prst="rect">
+            <a:avLst/>
+          </a:prstGeom>
+          <a:noFill/>
+          <a:ln/>
+        </p:spPr>
+        <p:txBody>
+          <a:bodyPr wrap="square" lIns="0" tIns="0" rIns="0" bIns="0" rtlCol="0" anchor="ctr"/>
+          <a:lstStyle/>
+          <a:p>
+            <a:pPr indent="0" marL="0">
+              <a:buNone/>
+            </a:pPr>
+            <a:r>
+              <a:rPr lang="en-US" sz="1500" b="1" spc="300" kern="0" dirty="0">
+                <a:solidFill>
+                  <a:srgbClr val="DD6E4E"/>
+                </a:solidFill>
+                <a:latin typeface="Meiryo" pitchFamily="34" charset="0"/>
+                <a:ea typeface="Meiryo" pitchFamily="34" charset="-122"/>
+                <a:cs typeface="Meiryo" pitchFamily="34" charset="-120"/>
+              </a:rPr>
+              <a:t>最後に</a:t>
+            </a:r>
+            <a:endParaRPr lang="en-US" sz="1500" dirty="0"/>
+          </a:p>
+        </p:txBody>
+      </p:sp>
+      <p:sp>
+        <p:nvSpPr>
+          <p:cNvPr id="5" name="Text 3"/>
+          <p:cNvSpPr/>
+          <p:nvPr/>
+        </p:nvSpPr>
+        <p:spPr>
+          <a:xfrm>
+            <a:off x="1097280" y="1463040"/>
+            <a:ext cx="9997135" cy="4754880"/>
+          </a:xfrm>
+          <a:prstGeom prst="rect">
+            <a:avLst/>
+          </a:prstGeom>
+          <a:noFill/>
+          <a:ln/>
+        </p:spPr>
+        <p:txBody>
+          <a:bodyPr wrap="square" lIns="0" tIns="0" rIns="0" bIns="0" rtlCol="0" anchor="ctr"/>
+          <a:lstStyle/>
+          <a:p>
+            <a:pPr algn="ctr" indent="0" marL="0">
+              <a:lnSpc>
+                <a:spcPts val="3000"/>
+              </a:lnSpc>
+              <a:spcAft>
+                <a:spcPts val="1600"/>
+              </a:spcAft>
+              <a:buNone/>
+            </a:pPr>
+            <a:r>
+              <a:rPr lang="en-US" sz="2050" dirty="0">
+                <a:solidFill>
+                  <a:srgbClr val="4A3B30"/>
+                </a:solidFill>
+              </a:rPr>
+              <a:t>この90日間、一度も止まらなくていい。完璧じゃなくていい。</a:t>
+            </a:r>
+            <a:endParaRPr lang="en-US" sz="2050" dirty="0"/>
+          </a:p>
+          <a:p>
+            <a:pPr algn="ctr" indent="0" marL="0">
+              <a:lnSpc>
+                <a:spcPts val="3000"/>
+              </a:lnSpc>
+              <a:spcAft>
+                <a:spcPts val="1600"/>
+              </a:spcAft>
+              <a:buNone/>
+            </a:pPr>
+            <a:r>
+              <a:rPr lang="en-US" sz="2050" dirty="0">
+                <a:solidFill>
+                  <a:srgbClr val="4A3B30"/>
+                </a:solidFill>
+              </a:rPr>
+              <a:t>できない日があっていい。迷っていい。誰かに頼っていい。</a:t>
+            </a:r>
+            <a:endParaRPr lang="en-US" sz="2050" dirty="0"/>
+          </a:p>
+          <a:p>
+            <a:pPr algn="ctr" indent="0" marL="0">
+              <a:lnSpc>
+                <a:spcPts val="3000"/>
+              </a:lnSpc>
+              <a:spcAft>
+                <a:spcPts val="1600"/>
+              </a:spcAft>
+              <a:buNone/>
+            </a:pPr>
+            <a:r>
+              <a:rPr lang="en-US" sz="1850" dirty="0">
+                <a:solidFill>
+                  <a:srgbClr val="8A7A6C"/>
+                </a:solidFill>
+              </a:rPr>
+              <a:t>ただ、一つだけ。</a:t>
+            </a:r>
+            <a:endParaRPr lang="en-US" sz="2050" dirty="0"/>
+          </a:p>
+          <a:p>
+            <a:pPr algn="ctr" indent="0" marL="0">
+              <a:lnSpc>
+                <a:spcPts val="3000"/>
+              </a:lnSpc>
+              <a:spcAft>
+                <a:spcPts val="1600"/>
+              </a:spcAft>
+              <a:buNone/>
+            </a:pPr>
+            <a:r>
+              <a:rPr lang="en-US" sz="2550" b="1" dirty="0">
+                <a:solidFill>
+                  <a:srgbClr val="DD6E4E"/>
+                </a:solidFill>
+              </a:rPr>
+              <a:t>止まっても、また戻ってくる。</a:t>
+            </a:r>
+            <a:endParaRPr lang="en-US" sz="2050" dirty="0"/>
+          </a:p>
+          <a:p>
+            <a:pPr algn="ctr" indent="0" marL="0">
+              <a:lnSpc>
+                <a:spcPts val="3000"/>
+              </a:lnSpc>
+              <a:spcAft>
+                <a:spcPts val="1600"/>
+              </a:spcAft>
+              <a:buNone/>
+            </a:pPr>
+            <a:r>
+              <a:rPr lang="en-US" sz="1850" dirty="0">
+                <a:solidFill>
+                  <a:srgbClr val="8A7A6C"/>
+                </a:solidFill>
+              </a:rPr>
+              <a:t>そして戻ってきたとき、一緒に言いましょう。</a:t>
+            </a:r>
+            <a:endParaRPr lang="en-US" sz="2050" dirty="0"/>
+          </a:p>
+          <a:p>
+            <a:pPr algn="ctr" indent="0" marL="0">
+              <a:lnSpc>
+                <a:spcPts val="3000"/>
+              </a:lnSpc>
+              <a:spcAft>
+                <a:spcPts val="1600"/>
+              </a:spcAft>
+              <a:buNone/>
+            </a:pPr>
+            <a:r>
+              <a:rPr lang="en-US" sz="3000" b="1" dirty="0">
+                <a:solidFill>
+                  <a:srgbClr val="4A3B30"/>
+                </a:solidFill>
+              </a:rPr>
+              <a:t>「戻ってこられた。今日も一つ、できた。」</a:t>
+            </a:r>
+            <a:endParaRPr lang="en-US" sz="2050" dirty="0"/>
+          </a:p>
+        </p:txBody>
+      </p:sp>
+      <p:sp>
+        <p:nvSpPr>
+          <p:cNvPr id="6" name="Text 4"/>
+          <p:cNvSpPr/>
+          <p:nvPr/>
+        </p:nvSpPr>
+        <p:spPr>
+          <a:xfrm>
+            <a:off x="640080" y="6419088"/>
+            <a:ext cx="5486400" cy="292608"/>
+          </a:xfrm>
+          <a:prstGeom prst="rect">
+            <a:avLst/>
+          </a:prstGeom>
+          <a:noFill/>
+          <a:ln/>
+        </p:spPr>
+        <p:txBody>
+          <a:bodyPr wrap="square" lIns="0" tIns="0" rIns="0" bIns="0" rtlCol="0" anchor="ctr"/>
+          <a:lstStyle/>
+          <a:p>
+            <a:pPr algn="l" indent="0" marL="0">
+              <a:buNone/>
+            </a:pPr>
+            <a:r>
+              <a:rPr lang="en-US" sz="1150" dirty="0">
+                <a:solidFill>
+                  <a:srgbClr val="B7A99A"/>
+                </a:solidFill>
+                <a:latin typeface="Meiryo" pitchFamily="34" charset="0"/>
+                <a:ea typeface="Meiryo" pitchFamily="34" charset="-122"/>
+                <a:cs typeface="Meiryo" pitchFamily="34" charset="-120"/>
+              </a:rPr>
+              <a:t>できたのかけらワークショップ</a:t>
+            </a:r>
+            <a:endParaRPr lang="en-US" sz="1150" dirty="0"/>
+          </a:p>
+        </p:txBody>
+      </p:sp>
+      <p:sp>
+        <p:nvSpPr>
+          <p:cNvPr id="7" name="Text 5"/>
+          <p:cNvSpPr/>
+          <p:nvPr/>
+        </p:nvSpPr>
+        <p:spPr>
+          <a:xfrm>
+            <a:off x="10637215" y="6419088"/>
+            <a:ext cx="914400" cy="292608"/>
+          </a:xfrm>
+          <a:prstGeom prst="rect">
+            <a:avLst/>
+          </a:prstGeom>
+          <a:noFill/>
+          <a:ln/>
+        </p:spPr>
+        <p:txBody>
+          <a:bodyPr wrap="square" lIns="0" tIns="0" rIns="0" bIns="0" rtlCol="0" anchor="ctr"/>
+          <a:lstStyle/>
+          <a:p>
+            <a:pPr algn="r" indent="0" marL="0">
+              <a:buNone/>
+            </a:pPr>
+            <a:r>
+              <a:rPr lang="en-US" sz="1150" dirty="0">
+                <a:solidFill>
+                  <a:srgbClr val="B7A99A"/>
+                </a:solidFill>
+                <a:latin typeface="Meiryo" pitchFamily="34" charset="0"/>
+                <a:ea typeface="Meiryo" pitchFamily="34" charset="-122"/>
+                <a:cs typeface="Meiryo" pitchFamily="34" charset="-120"/>
+              </a:rPr>
+              <a:t>41 / 42</a:t>
+            </a:r>
+            <a:endParaRPr lang="en-US" sz="1150" dirty="0"/>
+          </a:p>
+        </p:txBody>
+      </p:sp>
+    </p:spTree>
+  </p:cSld>
+  <p:clrMapOvr>
+    <a:masterClrMapping/>
+  </p:clrMapOvr>
+</p:sld>
+</file>
+
+<file path=ppt/slides/slide42.xml><?xml version="1.0" encoding="utf-8"?>
+<p:sld xmlns:a="http://schemas.openxmlformats.org/drawingml/2006/main" xmlns:r="http://schemas.openxmlformats.org/officeDocument/2006/relationships" xmlns:p="http://schemas.openxmlformats.org/presentationml/2006/main">
+  <p:cSld name="Slide 42">
+    <p:bg>
+      <p:bgPr>
+        <a:solidFill>
+          <a:srgbClr val="FFF8F0"/>
+        </a:solidFill>
+      </p:bgPr>
+    </p:bg>
+    <p:spTree>
+      <p:nvGrpSpPr>
+        <p:cNvPr id="1" name=""/>
+        <p:cNvGrpSpPr/>
+        <p:nvPr/>
+      </p:nvGrpSpPr>
+      <p:grpSpPr>
+        <a:xfrm>
+          <a:off x="0" y="0"/>
+          <a:ext cx="0" cy="0"/>
+          <a:chOff x="0" y="0"/>
+          <a:chExt cx="0" cy="0"/>
+        </a:xfrm>
+      </p:grpSpPr>
+      <p:sp>
+        <p:nvSpPr>
+          <p:cNvPr id="2" name="Shape 0"/>
+          <p:cNvSpPr/>
+          <p:nvPr/>
+        </p:nvSpPr>
+        <p:spPr>
           <a:xfrm rot="600000">
             <a:off x="-1097280" y="-1005840"/>
             <a:ext cx="2743200" cy="2743200"/>
@@ -25237,7 +26109,7 @@
                 <a:ea typeface="Meiryo" pitchFamily="34" charset="-122"/>
                 <a:cs typeface="Meiryo" pitchFamily="34" charset="-120"/>
               </a:rPr>
-              <a:t>40 / 40</a:t>
+              <a:t>42 / 42</a:t>
             </a:r>
             <a:endParaRPr lang="en-US" sz="1150" dirty="0"/>
           </a:p>
@@ -25899,7 +26771,7 @@
                 <a:ea typeface="Meiryo" pitchFamily="34" charset="-122"/>
                 <a:cs typeface="Meiryo" pitchFamily="34" charset="-120"/>
               </a:rPr>
-              <a:t>5 / 40</a:t>
+              <a:t>5 / 42</a:t>
             </a:r>
             <a:endParaRPr lang="en-US" sz="1150" dirty="0"/>
           </a:p>
@@ -26338,7 +27210,7 @@
                 <a:ea typeface="Meiryo" pitchFamily="34" charset="-122"/>
                 <a:cs typeface="Meiryo" pitchFamily="34" charset="-120"/>
               </a:rPr>
-              <a:t>6 / 40</a:t>
+              <a:t>6 / 42</a:t>
             </a:r>
             <a:endParaRPr lang="en-US" sz="1150" dirty="0"/>
           </a:p>
@@ -27064,7 +27936,7 @@
                 <a:ea typeface="Meiryo" pitchFamily="34" charset="-122"/>
                 <a:cs typeface="Meiryo" pitchFamily="34" charset="-120"/>
               </a:rPr>
-              <a:t>7 / 40</a:t>
+              <a:t>7 / 42</a:t>
             </a:r>
             <a:endParaRPr lang="en-US" sz="1150" dirty="0"/>
           </a:p>
@@ -27850,7 +28722,7 @@
                 <a:ea typeface="Meiryo" pitchFamily="34" charset="-122"/>
                 <a:cs typeface="Meiryo" pitchFamily="34" charset="-120"/>
               </a:rPr>
-              <a:t>8 / 40</a:t>
+              <a:t>8 / 42</a:t>
             </a:r>
             <a:endParaRPr lang="en-US" sz="1150" dirty="0"/>
           </a:p>
@@ -28642,7 +29514,7 @@
                 <a:ea typeface="Meiryo" pitchFamily="34" charset="-122"/>
                 <a:cs typeface="Meiryo" pitchFamily="34" charset="-120"/>
               </a:rPr>
-              <a:t>9 / 40</a:t>
+              <a:t>9 / 42</a:t>
             </a:r>
             <a:endParaRPr lang="en-US" sz="1150" dirty="0"/>
           </a:p>

--- a/workshop/dist/dekitanokakera-workshop.pptx
+++ b/workshop/dist/dekitanokakera-workshop.pptx
@@ -4698,8 +4698,8 @@
         </p:nvSpPr>
         <p:spPr>
           <a:xfrm>
-            <a:off x="731520" y="1536192"/>
-            <a:ext cx="10725912" cy="365760"/>
+            <a:off x="731520" y="1463040"/>
+            <a:ext cx="10725912" cy="594360"/>
           </a:xfrm>
           <a:prstGeom prst="rect">
             <a:avLst/>
@@ -4712,6 +4712,9 @@
           <a:lstStyle/>
           <a:p>
             <a:pPr algn="ctr" indent="0" marL="0">
+              <a:lnSpc>
+                <a:spcPts val="2600"/>
+              </a:lnSpc>
               <a:buNone/>
             </a:pPr>
             <a:r>
@@ -4723,7 +4726,27 @@
                 <a:ea typeface="Meiryo" pitchFamily="34" charset="-122"/>
                 <a:cs typeface="Meiryo" pitchFamily="34" charset="-120"/>
               </a:rPr>
-              <a:t>9月9日（水）10:00〜11:30　｜　オンライン（Zoom）　｜　参加費：無料</a:t>
+              <a:t>9月9日（水）10:00〜11:30　｜　オンライン（Zoom）</a:t>
+            </a:r>
+            <a:endParaRPr lang="en-US" sz="1600" dirty="0"/>
+          </a:p>
+          <a:p>
+            <a:pPr algn="ctr" indent="0" marL="0">
+              <a:lnSpc>
+                <a:spcPts val="2600"/>
+              </a:lnSpc>
+              <a:buNone/>
+            </a:pPr>
+            <a:r>
+              <a:rPr lang="en-US" sz="1600" b="1" spc="100" kern="0" dirty="0">
+                <a:solidFill>
+                  <a:srgbClr val="DD6E4E"/>
+                </a:solidFill>
+                <a:latin typeface="Meiryo" pitchFamily="34" charset="0"/>
+                <a:ea typeface="Meiryo" pitchFamily="34" charset="-122"/>
+                <a:cs typeface="Meiryo" pitchFamily="34" charset="-120"/>
+              </a:rPr>
+              <a:t>参加費：3,300円（感想アンケート協力で無料）</a:t>
             </a:r>
             <a:endParaRPr lang="en-US" sz="1600" dirty="0"/>
           </a:p>

--- a/workshop/dist/dekitanokakera-workshop.pptx
+++ b/workshop/dist/dekitanokakera-workshop.pptx
@@ -4726,7 +4726,7 @@
                 <a:ea typeface="Meiryo" pitchFamily="34" charset="-122"/>
                 <a:cs typeface="Meiryo" pitchFamily="34" charset="-120"/>
               </a:rPr>
-              <a:t>9月9日（水）10:00〜11:30　｜　オンライン（Zoom）</a:t>
+              <a:t>①9月9日（水）10:00〜11:30　｜　②9月26日（土）9:30〜11:00</a:t>
             </a:r>
             <a:endParaRPr lang="en-US" sz="1600" dirty="0"/>
           </a:p>
@@ -4746,7 +4746,7 @@
                 <a:ea typeface="Meiryo" pitchFamily="34" charset="-122"/>
                 <a:cs typeface="Meiryo" pitchFamily="34" charset="-120"/>
               </a:rPr>
-              <a:t>参加費：3,300円（感想アンケート協力で無料）</a:t>
+              <a:t>オンライン（Zoom）　｜　参加費：3,300円（感想アンケート協力で無料）</a:t>
             </a:r>
             <a:endParaRPr lang="en-US" sz="1600" dirty="0"/>
           </a:p>
@@ -16312,7 +16312,7 @@
         <p:spPr>
           <a:xfrm>
             <a:off x="640080" y="1828800"/>
-            <a:ext cx="10911535" cy="1783080"/>
+            <a:ext cx="8138160" cy="1783080"/>
           </a:xfrm>
           <a:prstGeom prst="roundRect">
             <a:avLst>
@@ -16400,7 +16400,7 @@
         <p:spPr>
           <a:xfrm>
             <a:off x="1005840" y="2606040"/>
-            <a:ext cx="10180015" cy="868680"/>
+            <a:ext cx="7406640" cy="868680"/>
           </a:xfrm>
           <a:prstGeom prst="rect">
             <a:avLst/>
@@ -16460,6 +16460,64 @@
           <p:nvPr/>
         </p:nvSpPr>
         <p:spPr>
+          <a:xfrm rot="180000">
+            <a:off x="9183319" y="1746504"/>
+            <a:ext cx="2450592" cy="3209544"/>
+          </a:xfrm>
+          <a:prstGeom prst="roundRect">
+            <a:avLst>
+              <a:gd name="adj" fmla="val 1493"/>
+            </a:avLst>
+          </a:prstGeom>
+          <a:solidFill>
+            <a:srgbClr val="FFFFFF"/>
+          </a:solidFill>
+          <a:ln w="12700">
+            <a:solidFill>
+              <a:srgbClr val="EFE2D3"/>
+            </a:solidFill>
+            <a:prstDash val="solid"/>
+          </a:ln>
+          <a:effectLst>
+            <a:outerShdw sx="100000" sy="100000" kx="0" ky="0" algn="bl" rotWithShape="0" blurRad="101600" dist="38100" dir="5400000">
+              <a:srgbClr val="4A3B30">
+                <a:alpha val="25000"/>
+              </a:srgbClr>
+            </a:outerShdw>
+          </a:effectLst>
+        </p:spPr>
+      </p:sp>
+      <p:pic>
+        <p:nvPicPr>
+          <p:cNvPr id="10" name="Image 0" descr="/home/user/dekitanokakera-LM/workshop/images/diary-2025-11-05.jpg">    </p:cNvPr>
+          <p:cNvPicPr>
+            <a:picLocks noChangeAspect="1"/>
+          </p:cNvPicPr>
+          <p:nvPr/>
+        </p:nvPicPr>
+        <p:blipFill>
+          <a:blip r:embed="rId1"/>
+          <a:stretch>
+            <a:fillRect/>
+          </a:stretch>
+        </p:blipFill>
+        <p:spPr>
+          <a:xfrm rot="180000">
+            <a:off x="9265615" y="1828800"/>
+            <a:ext cx="2286000" cy="3044952"/>
+          </a:xfrm>
+          <a:prstGeom prst="rect">
+            <a:avLst/>
+          </a:prstGeom>
+        </p:spPr>
+      </p:pic>
+      <p:sp>
+        <p:nvSpPr>
+          <p:cNvPr id="11" name="Shape 8"/>
+          <p:cNvSpPr/>
+          <p:nvPr/>
+        </p:nvSpPr>
+        <p:spPr>
           <a:xfrm>
             <a:off x="640080" y="3840480"/>
             <a:ext cx="1225296" cy="402336"/>
@@ -16477,7 +16535,7 @@
       </p:sp>
       <p:sp>
         <p:nvSpPr>
-          <p:cNvPr id="10" name="Text 8"/>
+          <p:cNvPr id="12" name="Text 9"/>
           <p:cNvSpPr/>
           <p:nvPr/>
         </p:nvSpPr>
@@ -16516,7 +16574,7 @@
       </p:sp>
       <p:sp>
         <p:nvSpPr>
-          <p:cNvPr id="11" name="Shape 9"/>
+          <p:cNvPr id="13" name="Shape 10"/>
           <p:cNvSpPr/>
           <p:nvPr/>
         </p:nvSpPr>
@@ -16538,7 +16596,7 @@
       </p:sp>
       <p:sp>
         <p:nvSpPr>
-          <p:cNvPr id="12" name="Text 10"/>
+          <p:cNvPr id="14" name="Text 11"/>
           <p:cNvSpPr/>
           <p:nvPr/>
         </p:nvSpPr>
@@ -16577,7 +16635,7 @@
       </p:sp>
       <p:sp>
         <p:nvSpPr>
-          <p:cNvPr id="13" name="Shape 11"/>
+          <p:cNvPr id="15" name="Shape 12"/>
           <p:cNvSpPr/>
           <p:nvPr/>
         </p:nvSpPr>
@@ -16599,7 +16657,7 @@
       </p:sp>
       <p:sp>
         <p:nvSpPr>
-          <p:cNvPr id="14" name="Text 12"/>
+          <p:cNvPr id="16" name="Text 13"/>
           <p:cNvSpPr/>
           <p:nvPr/>
         </p:nvSpPr>
@@ -16638,7 +16696,7 @@
       </p:sp>
       <p:sp>
         <p:nvSpPr>
-          <p:cNvPr id="15" name="Text 13"/>
+          <p:cNvPr id="17" name="Text 14"/>
           <p:cNvSpPr/>
           <p:nvPr/>
         </p:nvSpPr>
@@ -16680,7 +16738,7 @@
       </p:sp>
       <p:sp>
         <p:nvSpPr>
-          <p:cNvPr id="16" name="Shape 14"/>
+          <p:cNvPr id="18" name="Shape 15"/>
           <p:cNvSpPr/>
           <p:nvPr/>
         </p:nvSpPr>
@@ -16702,7 +16760,7 @@
       </p:sp>
       <p:sp>
         <p:nvSpPr>
-          <p:cNvPr id="17" name="Text 15"/>
+          <p:cNvPr id="19" name="Text 16"/>
           <p:cNvSpPr/>
           <p:nvPr/>
         </p:nvSpPr>
@@ -16764,7 +16822,7 @@
       </p:sp>
       <p:sp>
         <p:nvSpPr>
-          <p:cNvPr id="18" name="Text 16"/>
+          <p:cNvPr id="20" name="Text 17"/>
           <p:cNvSpPr/>
           <p:nvPr/>
         </p:nvSpPr>
@@ -16803,7 +16861,7 @@
       </p:sp>
       <p:sp>
         <p:nvSpPr>
-          <p:cNvPr id="19" name="Text 17"/>
+          <p:cNvPr id="21" name="Text 18"/>
           <p:cNvSpPr/>
           <p:nvPr/>
         </p:nvSpPr>

--- a/workshop/dist/dekitanokakera-workshop.pptx
+++ b/workshop/dist/dekitanokakera-workshop.pptx
@@ -12573,12 +12573,12 @@
         </p:nvSpPr>
         <p:spPr>
           <a:xfrm>
-            <a:off x="640080" y="2194560"/>
-            <a:ext cx="5272888" cy="1737360"/>
+            <a:off x="640080" y="2103120"/>
+            <a:ext cx="5272888" cy="3429000"/>
           </a:xfrm>
           <a:prstGeom prst="roundRect">
             <a:avLst>
-              <a:gd name="adj" fmla="val 6316"/>
+              <a:gd name="adj" fmla="val 3200"/>
             </a:avLst>
           </a:prstGeom>
           <a:solidFill>
@@ -12594,96 +12594,18 @@
       </p:sp>
       <p:sp>
         <p:nvSpPr>
-          <p:cNvPr id="6" name="Text 4"/>
-          <p:cNvSpPr/>
-          <p:nvPr/>
-        </p:nvSpPr>
-        <p:spPr>
-          <a:xfrm>
-            <a:off x="1005840" y="2423160"/>
-            <a:ext cx="4541368" cy="548640"/>
-          </a:xfrm>
-          <a:prstGeom prst="rect">
-            <a:avLst/>
-          </a:prstGeom>
-          <a:noFill/>
-          <a:ln/>
-        </p:spPr>
-        <p:txBody>
-          <a:bodyPr wrap="square" lIns="0" tIns="0" rIns="0" bIns="0" rtlCol="0" anchor="ctr"/>
-          <a:lstStyle/>
-          <a:p>
-            <a:pPr indent="0" marL="0">
-              <a:buNone/>
-            </a:pPr>
-            <a:r>
-              <a:rPr lang="en-US" sz="1900" dirty="0">
-                <a:solidFill>
-                  <a:srgbClr val="8A7A6C"/>
-                </a:solidFill>
-                <a:latin typeface="Meiryo" pitchFamily="34" charset="0"/>
-                <a:ea typeface="Meiryo" pitchFamily="34" charset="-122"/>
-                <a:cs typeface="Meiryo" pitchFamily="34" charset="-120"/>
-              </a:rPr>
-              <a:t>全日本57kg級・52kg級</a:t>
-            </a:r>
-            <a:endParaRPr lang="en-US" sz="1900" dirty="0"/>
-          </a:p>
-        </p:txBody>
-      </p:sp>
-      <p:sp>
-        <p:nvSpPr>
-          <p:cNvPr id="7" name="Text 5"/>
-          <p:cNvSpPr/>
-          <p:nvPr/>
-        </p:nvSpPr>
-        <p:spPr>
-          <a:xfrm>
-            <a:off x="1005840" y="3017520"/>
-            <a:ext cx="4541368" cy="685800"/>
-          </a:xfrm>
-          <a:prstGeom prst="rect">
-            <a:avLst/>
-          </a:prstGeom>
-          <a:noFill/>
-          <a:ln/>
-        </p:spPr>
-        <p:txBody>
-          <a:bodyPr wrap="square" lIns="0" tIns="0" rIns="0" bIns="0" rtlCol="0" anchor="ctr"/>
-          <a:lstStyle/>
-          <a:p>
-            <a:pPr indent="0" marL="0">
-              <a:buNone/>
-            </a:pPr>
-            <a:r>
-              <a:rPr lang="en-US" sz="3200" b="1" dirty="0">
-                <a:solidFill>
-                  <a:srgbClr val="CE9A2E"/>
-                </a:solidFill>
-                <a:latin typeface="Meiryo" pitchFamily="34" charset="0"/>
-                <a:ea typeface="Meiryo" pitchFamily="34" charset="-122"/>
-                <a:cs typeface="Meiryo" pitchFamily="34" charset="-120"/>
-              </a:rPr>
-              <a:t>日本一</a:t>
-            </a:r>
-            <a:endParaRPr lang="en-US" sz="3200" dirty="0"/>
-          </a:p>
-        </p:txBody>
-      </p:sp>
-      <p:sp>
-        <p:nvSpPr>
-          <p:cNvPr id="8" name="Shape 6"/>
-          <p:cNvSpPr/>
-          <p:nvPr/>
-        </p:nvSpPr>
-        <p:spPr>
-          <a:xfrm>
-            <a:off x="6278728" y="2194560"/>
-            <a:ext cx="5272888" cy="1737360"/>
+          <p:cNvPr id="6" name="Shape 4"/>
+          <p:cNvSpPr/>
+          <p:nvPr/>
+        </p:nvSpPr>
+        <p:spPr>
+          <a:xfrm>
+            <a:off x="3215488" y="2286000"/>
+            <a:ext cx="2468880" cy="3063240"/>
           </a:xfrm>
           <a:prstGeom prst="roundRect">
             <a:avLst>
-              <a:gd name="adj" fmla="val 6316"/>
+              <a:gd name="adj" fmla="val 1111"/>
             </a:avLst>
           </a:prstGeom>
           <a:solidFill>
@@ -12697,32 +12619,218 @@
           </a:ln>
         </p:spPr>
       </p:sp>
-      <p:sp>
-        <p:nvSpPr>
-          <p:cNvPr id="9" name="Text 7"/>
+      <p:pic>
+        <p:nvPicPr>
+          <p:cNvPr id="7" name="Image 0" descr="/home/user/dekitanokakera-LM/workshop/images/achievement-nantan-podium.jpg">    </p:cNvPr>
+          <p:cNvPicPr>
+            <a:picLocks noChangeAspect="1"/>
+          </p:cNvPicPr>
+          <p:nvPr/>
+        </p:nvPicPr>
+        <p:blipFill>
+          <a:blip r:embed="rId1"/>
+          <a:stretch>
+            <a:fillRect/>
+          </a:stretch>
+        </p:blipFill>
+        <p:spPr>
+          <a:xfrm>
+            <a:off x="3261208" y="2331720"/>
+            <a:ext cx="2377440" cy="2971800"/>
+          </a:xfrm>
+          <a:prstGeom prst="rect">
+            <a:avLst/>
+          </a:prstGeom>
+        </p:spPr>
+      </p:pic>
+      <p:sp>
+        <p:nvSpPr>
+          <p:cNvPr id="8" name="Text 5"/>
+          <p:cNvSpPr/>
+          <p:nvPr/>
+        </p:nvSpPr>
+        <p:spPr>
+          <a:xfrm>
+            <a:off x="1005840" y="2423160"/>
+            <a:ext cx="2026768" cy="822960"/>
+          </a:xfrm>
+          <a:prstGeom prst="rect">
+            <a:avLst/>
+          </a:prstGeom>
+          <a:noFill/>
+          <a:ln/>
+        </p:spPr>
+        <p:txBody>
+          <a:bodyPr wrap="square" lIns="0" tIns="0" rIns="0" bIns="0" rtlCol="0" anchor="t"/>
+          <a:lstStyle/>
+          <a:p>
+            <a:pPr indent="0" marL="0">
+              <a:lnSpc>
+                <a:spcPts val="2100"/>
+              </a:lnSpc>
+              <a:buNone/>
+            </a:pPr>
+            <a:r>
+              <a:rPr lang="en-US" sz="1700" dirty="0">
+                <a:solidFill>
+                  <a:srgbClr val="8A7A6C"/>
+                </a:solidFill>
+                <a:latin typeface="Meiryo" pitchFamily="34" charset="0"/>
+                <a:ea typeface="Meiryo" pitchFamily="34" charset="-122"/>
+                <a:cs typeface="Meiryo" pitchFamily="34" charset="-120"/>
+              </a:rPr>
+              <a:t>全日本57kg級・52kg級</a:t>
+            </a:r>
+            <a:endParaRPr lang="en-US" sz="1700" dirty="0"/>
+          </a:p>
+        </p:txBody>
+      </p:sp>
+      <p:sp>
+        <p:nvSpPr>
+          <p:cNvPr id="9" name="Text 6"/>
+          <p:cNvSpPr/>
+          <p:nvPr/>
+        </p:nvSpPr>
+        <p:spPr>
+          <a:xfrm>
+            <a:off x="1005840" y="3337560"/>
+            <a:ext cx="2026768" cy="822960"/>
+          </a:xfrm>
+          <a:prstGeom prst="rect">
+            <a:avLst/>
+          </a:prstGeom>
+          <a:noFill/>
+          <a:ln/>
+        </p:spPr>
+        <p:txBody>
+          <a:bodyPr wrap="square" lIns="0" tIns="0" rIns="0" bIns="0" rtlCol="0" anchor="t"/>
+          <a:lstStyle/>
+          <a:p>
+            <a:pPr indent="0" marL="0">
+              <a:buNone/>
+            </a:pPr>
+            <a:r>
+              <a:rPr lang="en-US" sz="2700" b="1" dirty="0">
+                <a:solidFill>
+                  <a:srgbClr val="CE9A2E"/>
+                </a:solidFill>
+                <a:latin typeface="Meiryo" pitchFamily="34" charset="0"/>
+                <a:ea typeface="Meiryo" pitchFamily="34" charset="-122"/>
+                <a:cs typeface="Meiryo" pitchFamily="34" charset="-120"/>
+              </a:rPr>
+              <a:t>日本一</a:t>
+            </a:r>
+            <a:endParaRPr lang="en-US" sz="2700" dirty="0"/>
+          </a:p>
+        </p:txBody>
+      </p:sp>
+      <p:sp>
+        <p:nvSpPr>
+          <p:cNvPr id="10" name="Shape 7"/>
+          <p:cNvSpPr/>
+          <p:nvPr/>
+        </p:nvSpPr>
+        <p:spPr>
+          <a:xfrm>
+            <a:off x="6278728" y="2103120"/>
+            <a:ext cx="5272888" cy="3429000"/>
+          </a:xfrm>
+          <a:prstGeom prst="roundRect">
+            <a:avLst>
+              <a:gd name="adj" fmla="val 3200"/>
+            </a:avLst>
+          </a:prstGeom>
+          <a:solidFill>
+            <a:srgbClr val="FFFFFF"/>
+          </a:solidFill>
+          <a:ln w="12700">
+            <a:solidFill>
+              <a:srgbClr val="EFE2D3"/>
+            </a:solidFill>
+            <a:prstDash val="solid"/>
+          </a:ln>
+        </p:spPr>
+      </p:sp>
+      <p:sp>
+        <p:nvSpPr>
+          <p:cNvPr id="11" name="Shape 8"/>
+          <p:cNvSpPr/>
+          <p:nvPr/>
+        </p:nvSpPr>
+        <p:spPr>
+          <a:xfrm>
+            <a:off x="9002725" y="2286000"/>
+            <a:ext cx="2320290" cy="3063240"/>
+          </a:xfrm>
+          <a:prstGeom prst="roundRect">
+            <a:avLst>
+              <a:gd name="adj" fmla="val 1182"/>
+            </a:avLst>
+          </a:prstGeom>
+          <a:solidFill>
+            <a:srgbClr val="FFFFFF"/>
+          </a:solidFill>
+          <a:ln w="12700">
+            <a:solidFill>
+              <a:srgbClr val="EFE2D3"/>
+            </a:solidFill>
+            <a:prstDash val="solid"/>
+          </a:ln>
+        </p:spPr>
+      </p:sp>
+      <p:pic>
+        <p:nvPicPr>
+          <p:cNvPr id="12" name="Image 1" descr="/home/user/dekitanokakera-LM/workshop/images/achievement-squat-record.jpg">    </p:cNvPr>
+          <p:cNvPicPr>
+            <a:picLocks noChangeAspect="1"/>
+          </p:cNvPicPr>
+          <p:nvPr/>
+        </p:nvPicPr>
+        <p:blipFill>
+          <a:blip r:embed="rId2"/>
+          <a:stretch>
+            <a:fillRect/>
+          </a:stretch>
+        </p:blipFill>
+        <p:spPr>
+          <a:xfrm>
+            <a:off x="9048445" y="2331720"/>
+            <a:ext cx="2228850" cy="2971800"/>
+          </a:xfrm>
+          <a:prstGeom prst="rect">
+            <a:avLst/>
+          </a:prstGeom>
+        </p:spPr>
+      </p:pic>
+      <p:sp>
+        <p:nvSpPr>
+          <p:cNvPr id="13" name="Text 9"/>
           <p:cNvSpPr/>
           <p:nvPr/>
         </p:nvSpPr>
         <p:spPr>
           <a:xfrm>
             <a:off x="6644488" y="2423160"/>
-            <a:ext cx="4541368" cy="548640"/>
-          </a:xfrm>
-          <a:prstGeom prst="rect">
-            <a:avLst/>
-          </a:prstGeom>
-          <a:noFill/>
-          <a:ln/>
-        </p:spPr>
-        <p:txBody>
-          <a:bodyPr wrap="square" lIns="0" tIns="0" rIns="0" bIns="0" rtlCol="0" anchor="ctr"/>
+            <a:ext cx="2175358" cy="822960"/>
+          </a:xfrm>
+          <a:prstGeom prst="rect">
+            <a:avLst/>
+          </a:prstGeom>
+          <a:noFill/>
+          <a:ln/>
+        </p:spPr>
+        <p:txBody>
+          <a:bodyPr wrap="square" lIns="0" tIns="0" rIns="0" bIns="0" rtlCol="0" anchor="t"/>
           <a:lstStyle/>
           <a:p>
             <a:pPr indent="0" marL="0">
-              <a:buNone/>
-            </a:pPr>
-            <a:r>
-              <a:rPr lang="en-US" sz="1900" dirty="0">
+              <a:lnSpc>
+                <a:spcPts val="2100"/>
+              </a:lnSpc>
+              <a:buNone/>
+            </a:pPr>
+            <a:r>
+              <a:rPr lang="en-US" sz="1700" dirty="0">
                 <a:solidFill>
                   <a:srgbClr val="8A7A6C"/>
                 </a:solidFill>
@@ -12732,36 +12840,36 @@
               </a:rPr>
               <a:t>スクワット142.5kg</a:t>
             </a:r>
-            <a:endParaRPr lang="en-US" sz="1900" dirty="0"/>
-          </a:p>
-        </p:txBody>
-      </p:sp>
-      <p:sp>
-        <p:nvSpPr>
-          <p:cNvPr id="10" name="Text 8"/>
-          <p:cNvSpPr/>
-          <p:nvPr/>
-        </p:nvSpPr>
-        <p:spPr>
-          <a:xfrm>
-            <a:off x="6644488" y="3017520"/>
-            <a:ext cx="4541368" cy="685800"/>
-          </a:xfrm>
-          <a:prstGeom prst="rect">
-            <a:avLst/>
-          </a:prstGeom>
-          <a:noFill/>
-          <a:ln/>
-        </p:spPr>
-        <p:txBody>
-          <a:bodyPr wrap="square" lIns="0" tIns="0" rIns="0" bIns="0" rtlCol="0" anchor="ctr"/>
+            <a:endParaRPr lang="en-US" sz="1700" dirty="0"/>
+          </a:p>
+        </p:txBody>
+      </p:sp>
+      <p:sp>
+        <p:nvSpPr>
+          <p:cNvPr id="14" name="Text 10"/>
+          <p:cNvSpPr/>
+          <p:nvPr/>
+        </p:nvSpPr>
+        <p:spPr>
+          <a:xfrm>
+            <a:off x="6644488" y="3337560"/>
+            <a:ext cx="2175358" cy="822960"/>
+          </a:xfrm>
+          <a:prstGeom prst="rect">
+            <a:avLst/>
+          </a:prstGeom>
+          <a:noFill/>
+          <a:ln/>
+        </p:spPr>
+        <p:txBody>
+          <a:bodyPr wrap="square" lIns="0" tIns="0" rIns="0" bIns="0" rtlCol="0" anchor="t"/>
           <a:lstStyle/>
           <a:p>
             <a:pPr indent="0" marL="0">
               <a:buNone/>
             </a:pPr>
             <a:r>
-              <a:rPr lang="en-US" sz="3200" b="1" dirty="0">
+              <a:rPr lang="en-US" sz="2700" b="1" dirty="0">
                 <a:solidFill>
                   <a:srgbClr val="CE9A2E"/>
                 </a:solidFill>
@@ -12771,13 +12879,13 @@
               </a:rPr>
               <a:t>日本記録</a:t>
             </a:r>
-            <a:endParaRPr lang="en-US" sz="3200" dirty="0"/>
-          </a:p>
-        </p:txBody>
-      </p:sp>
-      <p:sp>
-        <p:nvSpPr>
-          <p:cNvPr id="11" name="Shape 9"/>
+            <a:endParaRPr lang="en-US" sz="2700" dirty="0"/>
+          </a:p>
+        </p:txBody>
+      </p:sp>
+      <p:sp>
+        <p:nvSpPr>
+          <p:cNvPr id="15" name="Shape 11"/>
           <p:cNvSpPr/>
           <p:nvPr/>
         </p:nvSpPr>
@@ -12799,7 +12907,7 @@
       </p:sp>
       <p:sp>
         <p:nvSpPr>
-          <p:cNvPr id="12" name="Text 10"/>
+          <p:cNvPr id="16" name="Text 12"/>
           <p:cNvSpPr/>
           <p:nvPr/>
         </p:nvSpPr>
@@ -12841,7 +12949,7 @@
       </p:sp>
       <p:sp>
         <p:nvSpPr>
-          <p:cNvPr id="13" name="Text 11"/>
+          <p:cNvPr id="17" name="Text 13"/>
           <p:cNvSpPr/>
           <p:nvPr/>
         </p:nvSpPr>
@@ -12880,7 +12988,7 @@
       </p:sp>
       <p:sp>
         <p:nvSpPr>
-          <p:cNvPr id="14" name="Text 12"/>
+          <p:cNvPr id="18" name="Text 14"/>
           <p:cNvSpPr/>
           <p:nvPr/>
         </p:nvSpPr>

--- a/workshop/dist/dekitanokakera-workshop.pptx
+++ b/workshop/dist/dekitanokakera-workshop.pptx
@@ -47,9 +47,10 @@
     <p:sldId id="295" r:id="rId41"/>
     <p:sldId id="296" r:id="rId42"/>
     <p:sldId id="297" r:id="rId43"/>
+    <p:sldId id="298" r:id="rId44"/>
   </p:sldIdLst>
   <p:notesMasterIdLst>
-    <p:notesMasterId r:id="rId44"/>
+    <p:notesMasterId r:id="rId45"/>
   </p:notesMasterIdLst>
   <p:sldSz cx="12191695" cy="6858000"/>
   <p:notesSz cx="6858000" cy="12191695"/>
@@ -3735,6 +3736,94 @@
             <a:fld id="{F7021451-1387-4CA6-816F-3879F97B5CBC}" type="slidenum">
               <a:rPr lang="en-US"/>
               <a:t>42</a:t>
+            </a:fld>
+            <a:endParaRPr lang="en-US"/>
+          </a:p>
+        </p:txBody>
+      </p:sp>
+    </p:spTree>
+    <p:extLst>
+      <p:ext uri="{BB962C8B-B14F-4D97-AF65-F5344CB8AC3E}">
+        <p14:creationId xmlns:p14="http://schemas.microsoft.com/office/powerpoint/2010/main" val="1024086991"/>
+      </p:ext>
+    </p:extLst>
+  </p:cSld>
+  <p:clrMapOvr>
+    <a:masterClrMapping/>
+  </p:clrMapOvr>
+</p:notes>
+</file>
+
+<file path=ppt/notesSlides/notesSlide43.xml><?xml version="1.0" encoding="utf-8"?>
+<p:notes xmlns:a="http://schemas.openxmlformats.org/drawingml/2006/main" xmlns:r="http://schemas.openxmlformats.org/officeDocument/2006/relationships" xmlns:p="http://schemas.openxmlformats.org/presentationml/2006/main">
+  <p:cSld>
+    <p:spTree>
+      <p:nvGrpSpPr>
+        <p:cNvPr id="1" name=""/>
+        <p:cNvGrpSpPr/>
+        <p:nvPr/>
+      </p:nvGrpSpPr>
+      <p:grpSpPr>
+        <a:xfrm>
+          <a:off x="0" y="0"/>
+          <a:ext cx="0" cy="0"/>
+          <a:chOff x="0" y="0"/>
+          <a:chExt cx="0" cy="0"/>
+        </a:xfrm>
+      </p:grpSpPr>
+      <p:sp>
+        <p:nvSpPr>
+          <p:cNvPr id="2" name="Slide Image Placeholder 1"/>
+          <p:cNvSpPr>
+            <a:spLocks noGrp="1" noRot="1" noChangeAspect="1"/>
+          </p:cNvSpPr>
+          <p:nvPr>
+            <p:ph type="sldImg"/>
+          </p:nvPr>
+        </p:nvSpPr>
+        <p:spPr/>
+      </p:sp>
+      <p:sp>
+        <p:nvSpPr>
+          <p:cNvPr id="3" name="Notes Placeholder 2"/>
+          <p:cNvSpPr>
+            <a:spLocks noGrp="1"/>
+          </p:cNvSpPr>
+          <p:nvPr>
+            <p:ph type="body" idx="1"/>
+          </p:nvPr>
+        </p:nvSpPr>
+        <p:spPr/>
+        <p:txBody>
+          <a:bodyPr/>
+          <a:lstStyle/>
+          <a:p>
+            <a:r>
+              <a:rPr lang="en-US" dirty="0"/>
+              <a:t/>
+            </a:r>
+            <a:endParaRPr lang="en-US" dirty="0"/>
+          </a:p>
+        </p:txBody>
+      </p:sp>
+      <p:sp>
+        <p:nvSpPr>
+          <p:cNvPr id="4" name="Slide Number Placeholder 3"/>
+          <p:cNvSpPr>
+            <a:spLocks noGrp="1"/>
+          </p:cNvSpPr>
+          <p:nvPr>
+            <p:ph type="sldNum" sz="quarter" idx="10"/>
+          </p:nvPr>
+        </p:nvSpPr>
+        <p:spPr/>
+        <p:txBody>
+          <a:bodyPr/>
+          <a:lstStyle/>
+          <a:p>
+            <a:fld id="{F7021451-1387-4CA6-816F-3879F97B5CBC}" type="slidenum">
+              <a:rPr lang="en-US"/>
+              <a:t>43</a:t>
             </a:fld>
             <a:endParaRPr lang="en-US"/>
           </a:p>
@@ -5645,7 +5734,7 @@
                 <a:ea typeface="Meiryo" pitchFamily="34" charset="-122"/>
                 <a:cs typeface="Meiryo" pitchFamily="34" charset="-120"/>
               </a:rPr>
-              <a:t>10 / 42</a:t>
+              <a:t>10 / 43</a:t>
             </a:r>
             <a:endParaRPr lang="en-US" sz="1150" dirty="0"/>
           </a:p>
@@ -6089,7 +6178,7 @@
                 <a:ea typeface="Meiryo" pitchFamily="34" charset="-122"/>
                 <a:cs typeface="Meiryo" pitchFamily="34" charset="-120"/>
               </a:rPr>
-              <a:t>11 / 42</a:t>
+              <a:t>11 / 43</a:t>
             </a:r>
             <a:endParaRPr lang="en-US" sz="1150" dirty="0"/>
           </a:p>
@@ -6511,7 +6600,7 @@
                 <a:ea typeface="Meiryo" pitchFamily="34" charset="-122"/>
                 <a:cs typeface="Meiryo" pitchFamily="34" charset="-120"/>
               </a:rPr>
-              <a:t>12 / 42</a:t>
+              <a:t>12 / 43</a:t>
             </a:r>
             <a:endParaRPr lang="en-US" sz="1150" dirty="0"/>
           </a:p>
@@ -6933,7 +7022,7 @@
                 <a:ea typeface="Meiryo" pitchFamily="34" charset="-122"/>
                 <a:cs typeface="Meiryo" pitchFamily="34" charset="-120"/>
               </a:rPr>
-              <a:t>13 / 42</a:t>
+              <a:t>13 / 43</a:t>
             </a:r>
             <a:endParaRPr lang="en-US" sz="1150" dirty="0"/>
           </a:p>
@@ -7364,7 +7453,7 @@
                 <a:ea typeface="Meiryo" pitchFamily="34" charset="-122"/>
                 <a:cs typeface="Meiryo" pitchFamily="34" charset="-120"/>
               </a:rPr>
-              <a:t>14 / 42</a:t>
+              <a:t>14 / 43</a:t>
             </a:r>
             <a:endParaRPr lang="en-US" sz="1150" dirty="0"/>
           </a:p>
@@ -8060,7 +8149,7 @@
                 <a:ea typeface="Meiryo" pitchFamily="34" charset="-122"/>
                 <a:cs typeface="Meiryo" pitchFamily="34" charset="-120"/>
               </a:rPr>
-              <a:t>15 / 42</a:t>
+              <a:t>15 / 43</a:t>
             </a:r>
             <a:endParaRPr lang="en-US" sz="1150" dirty="0"/>
           </a:p>
@@ -8491,7 +8580,7 @@
                 <a:ea typeface="Meiryo" pitchFamily="34" charset="-122"/>
                 <a:cs typeface="Meiryo" pitchFamily="34" charset="-120"/>
               </a:rPr>
-              <a:t>16 / 42</a:t>
+              <a:t>16 / 43</a:t>
             </a:r>
             <a:endParaRPr lang="en-US" sz="1150" dirty="0"/>
           </a:p>
@@ -8962,7 +9051,7 @@
                 <a:ea typeface="Meiryo" pitchFamily="34" charset="-122"/>
                 <a:cs typeface="Meiryo" pitchFamily="34" charset="-120"/>
               </a:rPr>
-              <a:t>17 / 42</a:t>
+              <a:t>17 / 43</a:t>
             </a:r>
             <a:endParaRPr lang="en-US" sz="1150" dirty="0"/>
           </a:p>
@@ -9359,7 +9448,7 @@
                 <a:ea typeface="Meiryo" pitchFamily="34" charset="-122"/>
                 <a:cs typeface="Meiryo" pitchFamily="34" charset="-120"/>
               </a:rPr>
-              <a:t>18 / 42</a:t>
+              <a:t>18 / 43</a:t>
             </a:r>
             <a:endParaRPr lang="en-US" sz="1150" dirty="0"/>
           </a:p>
@@ -10161,7 +10250,7 @@
                 <a:ea typeface="Meiryo" pitchFamily="34" charset="-122"/>
                 <a:cs typeface="Meiryo" pitchFamily="34" charset="-120"/>
               </a:rPr>
-              <a:t>19 / 42</a:t>
+              <a:t>19 / 43</a:t>
             </a:r>
             <a:endParaRPr lang="en-US" sz="1150" dirty="0"/>
           </a:p>
@@ -10980,7 +11069,7 @@
                 <a:ea typeface="Meiryo" pitchFamily="34" charset="-122"/>
                 <a:cs typeface="Meiryo" pitchFamily="34" charset="-120"/>
               </a:rPr>
-              <a:t>2 / 42</a:t>
+              <a:t>2 / 43</a:t>
             </a:r>
             <a:endParaRPr lang="en-US" sz="1150" dirty="0"/>
           </a:p>
@@ -11708,7 +11797,7 @@
                 <a:ea typeface="Meiryo" pitchFamily="34" charset="-122"/>
                 <a:cs typeface="Meiryo" pitchFamily="34" charset="-120"/>
               </a:rPr>
-              <a:t>20 / 42</a:t>
+              <a:t>20 / 43</a:t>
             </a:r>
             <a:endParaRPr lang="en-US" sz="1150" dirty="0"/>
           </a:p>
@@ -12080,7 +12169,7 @@
                 <a:ea typeface="Meiryo" pitchFamily="34" charset="-122"/>
                 <a:cs typeface="Meiryo" pitchFamily="34" charset="-120"/>
               </a:rPr>
-              <a:t>21 / 42</a:t>
+              <a:t>21 / 43</a:t>
             </a:r>
             <a:endParaRPr lang="en-US" sz="1150" dirty="0"/>
           </a:p>
@@ -12424,7 +12513,7 @@
                 <a:ea typeface="Meiryo" pitchFamily="34" charset="-122"/>
                 <a:cs typeface="Meiryo" pitchFamily="34" charset="-120"/>
               </a:rPr>
-              <a:t>22 / 42</a:t>
+              <a:t>22 / 43</a:t>
             </a:r>
             <a:endParaRPr lang="en-US" sz="1150" dirty="0"/>
           </a:p>
@@ -13019,7 +13108,7 @@
                 <a:ea typeface="Meiryo" pitchFamily="34" charset="-122"/>
                 <a:cs typeface="Meiryo" pitchFamily="34" charset="-120"/>
               </a:rPr>
-              <a:t>23 / 42</a:t>
+              <a:t>23 / 43</a:t>
             </a:r>
             <a:endParaRPr lang="en-US" sz="1150" dirty="0"/>
           </a:p>
@@ -13424,7 +13513,7 @@
                 <a:ea typeface="Meiryo" pitchFamily="34" charset="-122"/>
                 <a:cs typeface="Meiryo" pitchFamily="34" charset="-120"/>
               </a:rPr>
-              <a:t>24 / 42</a:t>
+              <a:t>24 / 43</a:t>
             </a:r>
             <a:endParaRPr lang="en-US" sz="1150" dirty="0"/>
           </a:p>
@@ -13829,7 +13918,7 @@
                 <a:ea typeface="Meiryo" pitchFamily="34" charset="-122"/>
                 <a:cs typeface="Meiryo" pitchFamily="34" charset="-120"/>
               </a:rPr>
-              <a:t>25 / 42</a:t>
+              <a:t>25 / 43</a:t>
             </a:r>
             <a:endParaRPr lang="en-US" sz="1150" dirty="0"/>
           </a:p>
@@ -14234,7 +14323,7 @@
                 <a:ea typeface="Meiryo" pitchFamily="34" charset="-122"/>
                 <a:cs typeface="Meiryo" pitchFamily="34" charset="-120"/>
               </a:rPr>
-              <a:t>26 / 42</a:t>
+              <a:t>26 / 43</a:t>
             </a:r>
             <a:endParaRPr lang="en-US" sz="1150" dirty="0"/>
           </a:p>
@@ -14751,7 +14840,7 @@
                 <a:ea typeface="Meiryo" pitchFamily="34" charset="-122"/>
                 <a:cs typeface="Meiryo" pitchFamily="34" charset="-120"/>
               </a:rPr>
-              <a:t>27 / 42</a:t>
+              <a:t>27 / 43</a:t>
             </a:r>
             <a:endParaRPr lang="en-US" sz="1150" dirty="0"/>
           </a:p>
@@ -15760,7 +15849,7 @@
                 <a:ea typeface="Meiryo" pitchFamily="34" charset="-122"/>
                 <a:cs typeface="Meiryo" pitchFamily="34" charset="-120"/>
               </a:rPr>
-              <a:t>28 / 42</a:t>
+              <a:t>28 / 43</a:t>
             </a:r>
             <a:endParaRPr lang="en-US" sz="1150" dirty="0"/>
           </a:p>
@@ -16270,7 +16359,7 @@
                 <a:ea typeface="Meiryo" pitchFamily="34" charset="-122"/>
                 <a:cs typeface="Meiryo" pitchFamily="34" charset="-120"/>
               </a:rPr>
-              <a:t>29 / 42</a:t>
+              <a:t>29 / 43</a:t>
             </a:r>
             <a:endParaRPr lang="en-US" sz="1150" dirty="0"/>
           </a:p>
@@ -17000,7 +17089,7 @@
                 <a:ea typeface="Meiryo" pitchFamily="34" charset="-122"/>
                 <a:cs typeface="Meiryo" pitchFamily="34" charset="-120"/>
               </a:rPr>
-              <a:t>3 / 42</a:t>
+              <a:t>3 / 43</a:t>
             </a:r>
             <a:endParaRPr lang="en-US" sz="1150" dirty="0"/>
           </a:p>
@@ -17730,7 +17819,7 @@
                 <a:ea typeface="Meiryo" pitchFamily="34" charset="-122"/>
                 <a:cs typeface="Meiryo" pitchFamily="34" charset="-120"/>
               </a:rPr>
-              <a:t>30 / 42</a:t>
+              <a:t>30 / 43</a:t>
             </a:r>
             <a:endParaRPr lang="en-US" sz="1150" dirty="0"/>
           </a:p>
@@ -18427,7 +18516,7 @@
                 <a:ea typeface="Meiryo" pitchFamily="34" charset="-122"/>
                 <a:cs typeface="Meiryo" pitchFamily="34" charset="-120"/>
               </a:rPr>
-              <a:t>31 / 42</a:t>
+              <a:t>31 / 43</a:t>
             </a:r>
             <a:endParaRPr lang="en-US" sz="1150" dirty="0"/>
           </a:p>
@@ -19190,7 +19279,7 @@
                 <a:ea typeface="Meiryo" pitchFamily="34" charset="-122"/>
                 <a:cs typeface="Meiryo" pitchFamily="34" charset="-120"/>
               </a:rPr>
-              <a:t>32 / 42</a:t>
+              <a:t>32 / 43</a:t>
             </a:r>
             <a:endParaRPr lang="en-US" sz="1150" dirty="0"/>
           </a:p>
@@ -19870,7 +19959,7 @@
                 <a:ea typeface="Meiryo" pitchFamily="34" charset="-122"/>
                 <a:cs typeface="Meiryo" pitchFamily="34" charset="-120"/>
               </a:rPr>
-              <a:t>33 / 42</a:t>
+              <a:t>33 / 43</a:t>
             </a:r>
             <a:endParaRPr lang="en-US" sz="1150" dirty="0"/>
           </a:p>
@@ -20889,7 +20978,7 @@
                 <a:ea typeface="Meiryo" pitchFamily="34" charset="-122"/>
                 <a:cs typeface="Meiryo" pitchFamily="34" charset="-120"/>
               </a:rPr>
-              <a:t>34 / 42</a:t>
+              <a:t>34 / 43</a:t>
             </a:r>
             <a:endParaRPr lang="en-US" sz="1150" dirty="0"/>
           </a:p>
@@ -22004,7 +22093,7 @@
                 <a:ea typeface="Meiryo" pitchFamily="34" charset="-122"/>
                 <a:cs typeface="Meiryo" pitchFamily="34" charset="-120"/>
               </a:rPr>
-              <a:t>35 / 42</a:t>
+              <a:t>35 / 43</a:t>
             </a:r>
             <a:endParaRPr lang="en-US" sz="1150" dirty="0"/>
           </a:p>
@@ -22975,7 +23064,7 @@
                 <a:ea typeface="Meiryo" pitchFamily="34" charset="-122"/>
                 <a:cs typeface="Meiryo" pitchFamily="34" charset="-120"/>
               </a:rPr>
-              <a:t>36 / 42</a:t>
+              <a:t>36 / 43</a:t>
             </a:r>
             <a:endParaRPr lang="en-US" sz="1150" dirty="0"/>
           </a:p>
@@ -23325,7 +23414,7 @@
                 <a:ea typeface="Meiryo" pitchFamily="34" charset="-122"/>
                 <a:cs typeface="Meiryo" pitchFamily="34" charset="-120"/>
               </a:rPr>
-              <a:t>37 / 42</a:t>
+              <a:t>37 / 43</a:t>
             </a:r>
             <a:endParaRPr lang="en-US" sz="1150" dirty="0"/>
           </a:p>
@@ -23650,7 +23739,7 @@
                 <a:ea typeface="Meiryo" pitchFamily="34" charset="-122"/>
                 <a:cs typeface="Meiryo" pitchFamily="34" charset="-120"/>
               </a:rPr>
-              <a:t>38 / 42</a:t>
+              <a:t>38 / 43</a:t>
             </a:r>
             <a:endParaRPr lang="en-US" sz="1150" dirty="0"/>
           </a:p>
@@ -23994,7 +24083,7 @@
                 <a:ea typeface="Meiryo" pitchFamily="34" charset="-122"/>
                 <a:cs typeface="Meiryo" pitchFamily="34" charset="-120"/>
               </a:rPr>
-              <a:t>39 / 42</a:t>
+              <a:t>39 / 43</a:t>
             </a:r>
             <a:endParaRPr lang="en-US" sz="1150" dirty="0"/>
           </a:p>
@@ -24395,7 +24484,7 @@
                 <a:ea typeface="Meiryo" pitchFamily="34" charset="-122"/>
                 <a:cs typeface="Meiryo" pitchFamily="34" charset="-120"/>
               </a:rPr>
-              <a:t>4 / 42</a:t>
+              <a:t>4 / 43</a:t>
             </a:r>
             <a:endParaRPr lang="en-US" sz="1150" dirty="0"/>
           </a:p>
@@ -25514,7 +25603,7 @@
                 <a:ea typeface="Meiryo" pitchFamily="34" charset="-122"/>
                 <a:cs typeface="Meiryo" pitchFamily="34" charset="-120"/>
               </a:rPr>
-              <a:t>40 / 42</a:t>
+              <a:t>40 / 43</a:t>
             </a:r>
             <a:endParaRPr lang="en-US" sz="1150" dirty="0"/>
           </a:p>
@@ -25559,9 +25648,9 @@
           <p:nvPr/>
         </p:nvSpPr>
         <p:spPr>
-          <a:xfrm rot="900000">
-            <a:off x="11109960" y="-685800"/>
-            <a:ext cx="1828800" cy="1828800"/>
+          <a:xfrm rot="720000">
+            <a:off x="-868680" y="5623560"/>
+            <a:ext cx="1737360" cy="1737360"/>
           </a:xfrm>
           <a:prstGeom prst="hexagon">
             <a:avLst/>
@@ -25576,29 +25665,7 @@
       </p:sp>
       <p:sp>
         <p:nvSpPr>
-          <p:cNvPr id="3" name="Shape 1"/>
-          <p:cNvSpPr/>
-          <p:nvPr/>
-        </p:nvSpPr>
-        <p:spPr>
-          <a:xfrm rot="720000">
-            <a:off x="-868680" y="5623560"/>
-            <a:ext cx="1737360" cy="1737360"/>
-          </a:xfrm>
-          <a:prstGeom prst="hexagon">
-            <a:avLst/>
-          </a:prstGeom>
-          <a:solidFill>
-            <a:srgbClr val="2F9188">
-              <a:alpha val="13000"/>
-            </a:srgbClr>
-          </a:solidFill>
-          <a:ln/>
-        </p:spPr>
-      </p:sp>
-      <p:sp>
-        <p:nvSpPr>
-          <p:cNvPr id="4" name="Text 2"/>
+          <p:cNvPr id="3" name="Text 1"/>
           <p:cNvSpPr/>
           <p:nvPr/>
         </p:nvSpPr>
@@ -25629,7 +25696,7 @@
                 <a:ea typeface="Meiryo" pitchFamily="34" charset="-122"/>
                 <a:cs typeface="Meiryo" pitchFamily="34" charset="-120"/>
               </a:rPr>
-              <a:t>最後に</a:t>
+              <a:t>参加者限定特典</a:t>
             </a:r>
             <a:endParaRPr lang="en-US" sz="1500" dirty="0"/>
           </a:p>
@@ -25637,14 +25704,279 @@
       </p:sp>
       <p:sp>
         <p:nvSpPr>
-          <p:cNvPr id="5" name="Text 3"/>
-          <p:cNvSpPr/>
-          <p:nvPr/>
-        </p:nvSpPr>
-        <p:spPr>
-          <a:xfrm>
-            <a:off x="1097280" y="1463040"/>
-            <a:ext cx="9997135" cy="4754880"/>
+          <p:cNvPr id="4" name="Text 2"/>
+          <p:cNvSpPr/>
+          <p:nvPr/>
+        </p:nvSpPr>
+        <p:spPr>
+          <a:xfrm>
+            <a:off x="640080" y="804672"/>
+            <a:ext cx="10911535" cy="914400"/>
+          </a:xfrm>
+          <a:prstGeom prst="rect">
+            <a:avLst/>
+          </a:prstGeom>
+          <a:noFill/>
+          <a:ln/>
+        </p:spPr>
+        <p:txBody>
+          <a:bodyPr wrap="square" lIns="0" tIns="0" rIns="0" bIns="0" rtlCol="0" anchor="ctr"/>
+          <a:lstStyle/>
+          <a:p>
+            <a:pPr algn="l" indent="0" marL="0">
+              <a:lnSpc>
+                <a:spcPts val="3400"/>
+              </a:lnSpc>
+              <a:buNone/>
+            </a:pPr>
+            <a:r>
+              <a:rPr lang="en-US" sz="3200" b="1" dirty="0">
+                <a:solidFill>
+                  <a:srgbClr val="4A3B30"/>
+                </a:solidFill>
+                <a:latin typeface="Meiryo" pitchFamily="34" charset="0"/>
+                <a:ea typeface="Meiryo" pitchFamily="34" charset="-122"/>
+                <a:cs typeface="Meiryo" pitchFamily="34" charset="-120"/>
+              </a:rPr>
+              <a:t>講師との15分間、個別ミニ相談</a:t>
+            </a:r>
+            <a:endParaRPr lang="en-US" sz="3200" dirty="0"/>
+          </a:p>
+        </p:txBody>
+      </p:sp>
+      <p:sp>
+        <p:nvSpPr>
+          <p:cNvPr id="5" name="Shape 3"/>
+          <p:cNvSpPr/>
+          <p:nvPr/>
+        </p:nvSpPr>
+        <p:spPr>
+          <a:xfrm>
+            <a:off x="640080" y="1874520"/>
+            <a:ext cx="10911535" cy="1417320"/>
+          </a:xfrm>
+          <a:prstGeom prst="roundRect">
+            <a:avLst>
+              <a:gd name="adj" fmla="val 7742"/>
+            </a:avLst>
+          </a:prstGeom>
+          <a:solidFill>
+            <a:srgbClr val="FDEEE7"/>
+          </a:solidFill>
+          <a:ln/>
+        </p:spPr>
+      </p:sp>
+      <p:sp>
+        <p:nvSpPr>
+          <p:cNvPr id="6" name="Shape 4"/>
+          <p:cNvSpPr/>
+          <p:nvPr/>
+        </p:nvSpPr>
+        <p:spPr>
+          <a:xfrm>
+            <a:off x="1051560" y="2148840"/>
+            <a:ext cx="868680" cy="868680"/>
+          </a:xfrm>
+          <a:prstGeom prst="ellipse">
+            <a:avLst/>
+          </a:prstGeom>
+          <a:solidFill>
+            <a:srgbClr val="FFFFFF"/>
+          </a:solidFill>
+          <a:ln/>
+        </p:spPr>
+      </p:sp>
+      <p:sp>
+        <p:nvSpPr>
+          <p:cNvPr id="7" name="Text 5"/>
+          <p:cNvSpPr/>
+          <p:nvPr/>
+        </p:nvSpPr>
+        <p:spPr>
+          <a:xfrm>
+            <a:off x="1051560" y="2148840"/>
+            <a:ext cx="868680" cy="868680"/>
+          </a:xfrm>
+          <a:prstGeom prst="rect">
+            <a:avLst/>
+          </a:prstGeom>
+          <a:noFill/>
+          <a:ln/>
+        </p:spPr>
+        <p:txBody>
+          <a:bodyPr wrap="square" lIns="0" tIns="0" rIns="0" bIns="0" rtlCol="0" anchor="ctr"/>
+          <a:lstStyle/>
+          <a:p>
+            <a:pPr algn="ctr" indent="0" marL="0">
+              <a:buNone/>
+            </a:pPr>
+            <a:r>
+              <a:rPr lang="en-US" sz="4000" dirty="0">
+                <a:solidFill>
+                  <a:srgbClr val="000000"/>
+                </a:solidFill>
+              </a:rPr>
+              <a:t>💬</a:t>
+            </a:r>
+            <a:endParaRPr lang="en-US" sz="4000" dirty="0"/>
+          </a:p>
+        </p:txBody>
+      </p:sp>
+      <p:sp>
+        <p:nvSpPr>
+          <p:cNvPr id="8" name="Text 6"/>
+          <p:cNvSpPr/>
+          <p:nvPr/>
+        </p:nvSpPr>
+        <p:spPr>
+          <a:xfrm>
+            <a:off x="2194560" y="1874520"/>
+            <a:ext cx="8991295" cy="1417320"/>
+          </a:xfrm>
+          <a:prstGeom prst="rect">
+            <a:avLst/>
+          </a:prstGeom>
+          <a:noFill/>
+          <a:ln/>
+        </p:spPr>
+        <p:txBody>
+          <a:bodyPr wrap="square" lIns="0" tIns="0" rIns="0" bIns="0" rtlCol="0" anchor="ctr"/>
+          <a:lstStyle/>
+          <a:p>
+            <a:pPr indent="0" marL="0">
+              <a:lnSpc>
+                <a:spcPts val="2700"/>
+              </a:lnSpc>
+              <a:buNone/>
+            </a:pPr>
+            <a:r>
+              <a:rPr lang="en-US" sz="1900" b="1" dirty="0">
+                <a:solidFill>
+                  <a:srgbClr val="4A3B30"/>
+                </a:solidFill>
+                <a:latin typeface="Meiryo" pitchFamily="34" charset="0"/>
+                <a:ea typeface="Meiryo" pitchFamily="34" charset="-122"/>
+                <a:cs typeface="Meiryo" pitchFamily="34" charset="-120"/>
+              </a:rPr>
+              <a:t>参加者限定で、講師と1対1で話せる15分間。</a:t>
+            </a:r>
+            <a:endParaRPr lang="en-US" sz="1900" dirty="0"/>
+          </a:p>
+          <a:p>
+            <a:pPr indent="0" marL="0">
+              <a:lnSpc>
+                <a:spcPts val="2700"/>
+              </a:lnSpc>
+              <a:buNone/>
+            </a:pPr>
+            <a:r>
+              <a:rPr lang="en-US" sz="1900" b="1" dirty="0">
+                <a:solidFill>
+                  <a:srgbClr val="4A3B30"/>
+                </a:solidFill>
+                <a:latin typeface="Meiryo" pitchFamily="34" charset="0"/>
+                <a:ea typeface="Meiryo" pitchFamily="34" charset="-122"/>
+                <a:cs typeface="Meiryo" pitchFamily="34" charset="-120"/>
+              </a:rPr>
+              <a:t>あなたの「今」に合わせて、一緒に考えます。</a:t>
+            </a:r>
+            <a:endParaRPr lang="en-US" sz="1900" dirty="0"/>
+          </a:p>
+        </p:txBody>
+      </p:sp>
+      <p:sp>
+        <p:nvSpPr>
+          <p:cNvPr id="9" name="Shape 7"/>
+          <p:cNvSpPr/>
+          <p:nvPr/>
+        </p:nvSpPr>
+        <p:spPr>
+          <a:xfrm>
+            <a:off x="640080" y="3657600"/>
+            <a:ext cx="3484778" cy="1417320"/>
+          </a:xfrm>
+          <a:prstGeom prst="roundRect">
+            <a:avLst>
+              <a:gd name="adj" fmla="val 7742"/>
+            </a:avLst>
+          </a:prstGeom>
+          <a:solidFill>
+            <a:srgbClr val="FFFDFA"/>
+          </a:solidFill>
+          <a:ln w="12700">
+            <a:solidFill>
+              <a:srgbClr val="EFE2D3"/>
+            </a:solidFill>
+            <a:prstDash val="solid"/>
+          </a:ln>
+        </p:spPr>
+      </p:sp>
+      <p:sp>
+        <p:nvSpPr>
+          <p:cNvPr id="10" name="Shape 8"/>
+          <p:cNvSpPr/>
+          <p:nvPr/>
+        </p:nvSpPr>
+        <p:spPr>
+          <a:xfrm>
+            <a:off x="2089861" y="3858768"/>
+            <a:ext cx="585216" cy="585216"/>
+          </a:xfrm>
+          <a:prstGeom prst="ellipse">
+            <a:avLst/>
+          </a:prstGeom>
+          <a:solidFill>
+            <a:srgbClr val="FDEEE7"/>
+          </a:solidFill>
+          <a:ln/>
+        </p:spPr>
+      </p:sp>
+      <p:sp>
+        <p:nvSpPr>
+          <p:cNvPr id="11" name="Text 9"/>
+          <p:cNvSpPr/>
+          <p:nvPr/>
+        </p:nvSpPr>
+        <p:spPr>
+          <a:xfrm>
+            <a:off x="2089861" y="3858768"/>
+            <a:ext cx="585216" cy="585216"/>
+          </a:xfrm>
+          <a:prstGeom prst="rect">
+            <a:avLst/>
+          </a:prstGeom>
+          <a:noFill/>
+          <a:ln/>
+        </p:spPr>
+        <p:txBody>
+          <a:bodyPr wrap="square" lIns="0" tIns="0" rIns="0" bIns="0" rtlCol="0" anchor="ctr"/>
+          <a:lstStyle/>
+          <a:p>
+            <a:pPr algn="ctr" indent="0" marL="0">
+              <a:buNone/>
+            </a:pPr>
+            <a:r>
+              <a:rPr lang="en-US" sz="2400" dirty="0">
+                <a:solidFill>
+                  <a:srgbClr val="000000"/>
+                </a:solidFill>
+              </a:rPr>
+              <a:t>🎯</a:t>
+            </a:r>
+            <a:endParaRPr lang="en-US" sz="2400" dirty="0"/>
+          </a:p>
+        </p:txBody>
+      </p:sp>
+      <p:sp>
+        <p:nvSpPr>
+          <p:cNvPr id="12" name="Text 10"/>
+          <p:cNvSpPr/>
+          <p:nvPr/>
+        </p:nvSpPr>
+        <p:spPr>
+          <a:xfrm>
+            <a:off x="777240" y="4526280"/>
+            <a:ext cx="3210458" cy="457200"/>
           </a:xfrm>
           <a:prstGeom prst="rect">
             <a:avLst/>
@@ -25658,128 +25990,402 @@
           <a:p>
             <a:pPr algn="ctr" indent="0" marL="0">
               <a:lnSpc>
-                <a:spcPts val="3000"/>
+                <a:spcPts val="1600"/>
               </a:lnSpc>
-              <a:spcAft>
-                <a:spcPts val="1600"/>
-              </a:spcAft>
-              <a:buNone/>
-            </a:pPr>
-            <a:r>
-              <a:rPr lang="en-US" sz="2050" dirty="0">
+              <a:buNone/>
+            </a:pPr>
+            <a:r>
+              <a:rPr lang="en-US" sz="1350" dirty="0">
                 <a:solidFill>
                   <a:srgbClr val="4A3B30"/>
                 </a:solidFill>
-              </a:rPr>
-              <a:t>この90日間、一度も止まらなくていい。完璧じゃなくていい。</a:t>
-            </a:r>
-            <a:endParaRPr lang="en-US" sz="2050" dirty="0"/>
+                <a:latin typeface="Meiryo" pitchFamily="34" charset="0"/>
+                <a:ea typeface="Meiryo" pitchFamily="34" charset="-122"/>
+                <a:cs typeface="Meiryo" pitchFamily="34" charset="-120"/>
+              </a:rPr>
+              <a:t>自分に合った目標の</a:t>
+            </a:r>
+            <a:endParaRPr lang="en-US" sz="1350" dirty="0"/>
           </a:p>
           <a:p>
             <a:pPr algn="ctr" indent="0" marL="0">
               <a:lnSpc>
-                <a:spcPts val="3000"/>
+                <a:spcPts val="1600"/>
               </a:lnSpc>
-              <a:spcAft>
-                <a:spcPts val="1600"/>
-              </a:spcAft>
-              <a:buNone/>
-            </a:pPr>
-            <a:r>
-              <a:rPr lang="en-US" sz="2050" dirty="0">
+              <a:buNone/>
+            </a:pPr>
+            <a:r>
+              <a:rPr lang="en-US" sz="1350" dirty="0">
                 <a:solidFill>
                   <a:srgbClr val="4A3B30"/>
                 </a:solidFill>
-              </a:rPr>
-              <a:t>できない日があっていい。迷っていい。誰かに頼っていい。</a:t>
-            </a:r>
-            <a:endParaRPr lang="en-US" sz="2050" dirty="0"/>
-          </a:p>
+                <a:latin typeface="Meiryo" pitchFamily="34" charset="0"/>
+                <a:ea typeface="Meiryo" pitchFamily="34" charset="-122"/>
+                <a:cs typeface="Meiryo" pitchFamily="34" charset="-120"/>
+              </a:rPr>
+              <a:t>立て方を相談したい</a:t>
+            </a:r>
+            <a:endParaRPr lang="en-US" sz="1350" dirty="0"/>
+          </a:p>
+        </p:txBody>
+      </p:sp>
+      <p:sp>
+        <p:nvSpPr>
+          <p:cNvPr id="13" name="Shape 11"/>
+          <p:cNvSpPr/>
+          <p:nvPr/>
+        </p:nvSpPr>
+        <p:spPr>
+          <a:xfrm>
+            <a:off x="4353458" y="3657600"/>
+            <a:ext cx="3484778" cy="1417320"/>
+          </a:xfrm>
+          <a:prstGeom prst="roundRect">
+            <a:avLst>
+              <a:gd name="adj" fmla="val 7742"/>
+            </a:avLst>
+          </a:prstGeom>
+          <a:solidFill>
+            <a:srgbClr val="FFFDFA"/>
+          </a:solidFill>
+          <a:ln w="12700">
+            <a:solidFill>
+              <a:srgbClr val="EFE2D3"/>
+            </a:solidFill>
+            <a:prstDash val="solid"/>
+          </a:ln>
+        </p:spPr>
+      </p:sp>
+      <p:sp>
+        <p:nvSpPr>
+          <p:cNvPr id="14" name="Shape 12"/>
+          <p:cNvSpPr/>
+          <p:nvPr/>
+        </p:nvSpPr>
+        <p:spPr>
+          <a:xfrm>
+            <a:off x="5803240" y="3858768"/>
+            <a:ext cx="585216" cy="585216"/>
+          </a:xfrm>
+          <a:prstGeom prst="ellipse">
+            <a:avLst/>
+          </a:prstGeom>
+          <a:solidFill>
+            <a:srgbClr val="FDEEE7"/>
+          </a:solidFill>
+          <a:ln/>
+        </p:spPr>
+      </p:sp>
+      <p:sp>
+        <p:nvSpPr>
+          <p:cNvPr id="15" name="Text 13"/>
+          <p:cNvSpPr/>
+          <p:nvPr/>
+        </p:nvSpPr>
+        <p:spPr>
+          <a:xfrm>
+            <a:off x="5803240" y="3858768"/>
+            <a:ext cx="585216" cy="585216"/>
+          </a:xfrm>
+          <a:prstGeom prst="rect">
+            <a:avLst/>
+          </a:prstGeom>
+          <a:noFill/>
+          <a:ln/>
+        </p:spPr>
+        <p:txBody>
+          <a:bodyPr wrap="square" lIns="0" tIns="0" rIns="0" bIns="0" rtlCol="0" anchor="ctr"/>
+          <a:lstStyle/>
+          <a:p>
+            <a:pPr algn="ctr" indent="0" marL="0">
+              <a:buNone/>
+            </a:pPr>
+            <a:r>
+              <a:rPr lang="en-US" sz="2400" dirty="0">
+                <a:solidFill>
+                  <a:srgbClr val="000000"/>
+                </a:solidFill>
+              </a:rPr>
+              <a:t>🧭</a:t>
+            </a:r>
+            <a:endParaRPr lang="en-US" sz="2400" dirty="0"/>
+          </a:p>
+        </p:txBody>
+      </p:sp>
+      <p:sp>
+        <p:nvSpPr>
+          <p:cNvPr id="16" name="Text 14"/>
+          <p:cNvSpPr/>
+          <p:nvPr/>
+        </p:nvSpPr>
+        <p:spPr>
+          <a:xfrm>
+            <a:off x="4490618" y="4526280"/>
+            <a:ext cx="3210458" cy="457200"/>
+          </a:xfrm>
+          <a:prstGeom prst="rect">
+            <a:avLst/>
+          </a:prstGeom>
+          <a:noFill/>
+          <a:ln/>
+        </p:spPr>
+        <p:txBody>
+          <a:bodyPr wrap="square" lIns="0" tIns="0" rIns="0" bIns="0" rtlCol="0" anchor="ctr"/>
+          <a:lstStyle/>
           <a:p>
             <a:pPr algn="ctr" indent="0" marL="0">
               <a:lnSpc>
-                <a:spcPts val="3000"/>
+                <a:spcPts val="1600"/>
               </a:lnSpc>
-              <a:spcAft>
-                <a:spcPts val="1600"/>
-              </a:spcAft>
-              <a:buNone/>
-            </a:pPr>
-            <a:r>
-              <a:rPr lang="en-US" sz="1850" dirty="0">
-                <a:solidFill>
-                  <a:srgbClr val="8A7A6C"/>
-                </a:solidFill>
-              </a:rPr>
-              <a:t>ただ、一つだけ。</a:t>
-            </a:r>
-            <a:endParaRPr lang="en-US" sz="2050" dirty="0"/>
+              <a:buNone/>
+            </a:pPr>
+            <a:r>
+              <a:rPr lang="en-US" sz="1350" dirty="0">
+                <a:solidFill>
+                  <a:srgbClr val="4A3B30"/>
+                </a:solidFill>
+                <a:latin typeface="Meiryo" pitchFamily="34" charset="0"/>
+                <a:ea typeface="Meiryo" pitchFamily="34" charset="-122"/>
+                <a:cs typeface="Meiryo" pitchFamily="34" charset="-120"/>
+              </a:rPr>
+              <a:t>今、何から始めれば</a:t>
+            </a:r>
+            <a:endParaRPr lang="en-US" sz="1350" dirty="0"/>
           </a:p>
           <a:p>
             <a:pPr algn="ctr" indent="0" marL="0">
               <a:lnSpc>
-                <a:spcPts val="3000"/>
+                <a:spcPts val="1600"/>
               </a:lnSpc>
-              <a:spcAft>
-                <a:spcPts val="1600"/>
-              </a:spcAft>
-              <a:buNone/>
-            </a:pPr>
-            <a:r>
-              <a:rPr lang="en-US" sz="2550" b="1" dirty="0">
-                <a:solidFill>
-                  <a:srgbClr val="DD6E4E"/>
-                </a:solidFill>
-              </a:rPr>
-              <a:t>止まっても、また戻ってくる。</a:t>
-            </a:r>
-            <a:endParaRPr lang="en-US" sz="2050" dirty="0"/>
-          </a:p>
+              <a:buNone/>
+            </a:pPr>
+            <a:r>
+              <a:rPr lang="en-US" sz="1350" dirty="0">
+                <a:solidFill>
+                  <a:srgbClr val="4A3B30"/>
+                </a:solidFill>
+                <a:latin typeface="Meiryo" pitchFamily="34" charset="0"/>
+                <a:ea typeface="Meiryo" pitchFamily="34" charset="-122"/>
+                <a:cs typeface="Meiryo" pitchFamily="34" charset="-120"/>
+              </a:rPr>
+              <a:t>いいか分からない</a:t>
+            </a:r>
+            <a:endParaRPr lang="en-US" sz="1350" dirty="0"/>
+          </a:p>
+        </p:txBody>
+      </p:sp>
+      <p:sp>
+        <p:nvSpPr>
+          <p:cNvPr id="17" name="Shape 15"/>
+          <p:cNvSpPr/>
+          <p:nvPr/>
+        </p:nvSpPr>
+        <p:spPr>
+          <a:xfrm>
+            <a:off x="8066837" y="3657600"/>
+            <a:ext cx="3484778" cy="1417320"/>
+          </a:xfrm>
+          <a:prstGeom prst="roundRect">
+            <a:avLst>
+              <a:gd name="adj" fmla="val 7742"/>
+            </a:avLst>
+          </a:prstGeom>
+          <a:solidFill>
+            <a:srgbClr val="FFFDFA"/>
+          </a:solidFill>
+          <a:ln w="12700">
+            <a:solidFill>
+              <a:srgbClr val="EFE2D3"/>
+            </a:solidFill>
+            <a:prstDash val="solid"/>
+          </a:ln>
+        </p:spPr>
+      </p:sp>
+      <p:sp>
+        <p:nvSpPr>
+          <p:cNvPr id="18" name="Shape 16"/>
+          <p:cNvSpPr/>
+          <p:nvPr/>
+        </p:nvSpPr>
+        <p:spPr>
+          <a:xfrm>
+            <a:off x="9516618" y="3858768"/>
+            <a:ext cx="585216" cy="585216"/>
+          </a:xfrm>
+          <a:prstGeom prst="ellipse">
+            <a:avLst/>
+          </a:prstGeom>
+          <a:solidFill>
+            <a:srgbClr val="FDEEE7"/>
+          </a:solidFill>
+          <a:ln/>
+        </p:spPr>
+      </p:sp>
+      <p:sp>
+        <p:nvSpPr>
+          <p:cNvPr id="19" name="Text 17"/>
+          <p:cNvSpPr/>
+          <p:nvPr/>
+        </p:nvSpPr>
+        <p:spPr>
+          <a:xfrm>
+            <a:off x="9516618" y="3858768"/>
+            <a:ext cx="585216" cy="585216"/>
+          </a:xfrm>
+          <a:prstGeom prst="rect">
+            <a:avLst/>
+          </a:prstGeom>
+          <a:noFill/>
+          <a:ln/>
+        </p:spPr>
+        <p:txBody>
+          <a:bodyPr wrap="square" lIns="0" tIns="0" rIns="0" bIns="0" rtlCol="0" anchor="ctr"/>
+          <a:lstStyle/>
+          <a:p>
+            <a:pPr algn="ctr" indent="0" marL="0">
+              <a:buNone/>
+            </a:pPr>
+            <a:r>
+              <a:rPr lang="en-US" sz="2400" dirty="0">
+                <a:solidFill>
+                  <a:srgbClr val="000000"/>
+                </a:solidFill>
+              </a:rPr>
+              <a:t>🔄</a:t>
+            </a:r>
+            <a:endParaRPr lang="en-US" sz="2400" dirty="0"/>
+          </a:p>
+        </p:txBody>
+      </p:sp>
+      <p:sp>
+        <p:nvSpPr>
+          <p:cNvPr id="20" name="Text 18"/>
+          <p:cNvSpPr/>
+          <p:nvPr/>
+        </p:nvSpPr>
+        <p:spPr>
+          <a:xfrm>
+            <a:off x="8203997" y="4526280"/>
+            <a:ext cx="3210458" cy="457200"/>
+          </a:xfrm>
+          <a:prstGeom prst="rect">
+            <a:avLst/>
+          </a:prstGeom>
+          <a:noFill/>
+          <a:ln/>
+        </p:spPr>
+        <p:txBody>
+          <a:bodyPr wrap="square" lIns="0" tIns="0" rIns="0" bIns="0" rtlCol="0" anchor="ctr"/>
+          <a:lstStyle/>
           <a:p>
             <a:pPr algn="ctr" indent="0" marL="0">
               <a:lnSpc>
-                <a:spcPts val="3000"/>
+                <a:spcPts val="1600"/>
               </a:lnSpc>
-              <a:spcAft>
-                <a:spcPts val="1600"/>
-              </a:spcAft>
-              <a:buNone/>
-            </a:pPr>
-            <a:r>
-              <a:rPr lang="en-US" sz="1850" dirty="0">
-                <a:solidFill>
-                  <a:srgbClr val="8A7A6C"/>
-                </a:solidFill>
-              </a:rPr>
-              <a:t>そして戻ってきたとき、一緒に言いましょう。</a:t>
-            </a:r>
-            <a:endParaRPr lang="en-US" sz="2050" dirty="0"/>
+              <a:buNone/>
+            </a:pPr>
+            <a:r>
+              <a:rPr lang="en-US" sz="1350" dirty="0">
+                <a:solidFill>
+                  <a:srgbClr val="4A3B30"/>
+                </a:solidFill>
+                <a:latin typeface="Meiryo" pitchFamily="34" charset="0"/>
+                <a:ea typeface="Meiryo" pitchFamily="34" charset="-122"/>
+                <a:cs typeface="Meiryo" pitchFamily="34" charset="-120"/>
+              </a:rPr>
+              <a:t>続かなかった過去を</a:t>
+            </a:r>
+            <a:endParaRPr lang="en-US" sz="1350" dirty="0"/>
           </a:p>
           <a:p>
             <a:pPr algn="ctr" indent="0" marL="0">
               <a:lnSpc>
-                <a:spcPts val="3000"/>
+                <a:spcPts val="1600"/>
               </a:lnSpc>
-              <a:spcAft>
-                <a:spcPts val="1600"/>
-              </a:spcAft>
-              <a:buNone/>
-            </a:pPr>
-            <a:r>
-              <a:rPr lang="en-US" sz="3000" b="1" dirty="0">
+              <a:buNone/>
+            </a:pPr>
+            <a:r>
+              <a:rPr lang="en-US" sz="1350" dirty="0">
                 <a:solidFill>
                   <a:srgbClr val="4A3B30"/>
                 </a:solidFill>
-              </a:rPr>
-              <a:t>「戻ってこられた。今日も一つ、できた。」</a:t>
-            </a:r>
-            <a:endParaRPr lang="en-US" sz="2050" dirty="0"/>
-          </a:p>
-        </p:txBody>
-      </p:sp>
-      <p:sp>
-        <p:nvSpPr>
-          <p:cNvPr id="6" name="Text 4"/>
+                <a:latin typeface="Meiryo" pitchFamily="34" charset="0"/>
+                <a:ea typeface="Meiryo" pitchFamily="34" charset="-122"/>
+                <a:cs typeface="Meiryo" pitchFamily="34" charset="-120"/>
+              </a:rPr>
+              <a:t>どう活かせばいいか</a:t>
+            </a:r>
+            <a:endParaRPr lang="en-US" sz="1350" dirty="0"/>
+          </a:p>
+        </p:txBody>
+      </p:sp>
+      <p:sp>
+        <p:nvSpPr>
+          <p:cNvPr id="21" name="Shape 19"/>
+          <p:cNvSpPr/>
+          <p:nvPr/>
+        </p:nvSpPr>
+        <p:spPr>
+          <a:xfrm>
+            <a:off x="640080" y="5349240"/>
+            <a:ext cx="10911535" cy="658368"/>
+          </a:xfrm>
+          <a:prstGeom prst="roundRect">
+            <a:avLst>
+              <a:gd name="adj" fmla="val 19444"/>
+            </a:avLst>
+          </a:prstGeom>
+          <a:solidFill>
+            <a:srgbClr val="FDEEE7"/>
+          </a:solidFill>
+          <a:ln/>
+        </p:spPr>
+      </p:sp>
+      <p:sp>
+        <p:nvSpPr>
+          <p:cNvPr id="22" name="Text 20"/>
+          <p:cNvSpPr/>
+          <p:nvPr/>
+        </p:nvSpPr>
+        <p:spPr>
+          <a:xfrm>
+            <a:off x="960120" y="5349240"/>
+            <a:ext cx="10271455" cy="658368"/>
+          </a:xfrm>
+          <a:prstGeom prst="rect">
+            <a:avLst/>
+          </a:prstGeom>
+          <a:noFill/>
+          <a:ln/>
+        </p:spPr>
+        <p:txBody>
+          <a:bodyPr wrap="square" lIns="0" tIns="0" rIns="0" bIns="0" rtlCol="0" anchor="ctr"/>
+          <a:lstStyle/>
+          <a:p>
+            <a:pPr indent="0" marL="0">
+              <a:lnSpc>
+                <a:spcPts val="2100"/>
+              </a:lnSpc>
+              <a:buNone/>
+            </a:pPr>
+            <a:r>
+              <a:rPr lang="en-US" sz="1850" b="1" dirty="0">
+                <a:solidFill>
+                  <a:srgbClr val="DD6E4E"/>
+                </a:solidFill>
+                <a:latin typeface="Meiryo" pitchFamily="34" charset="0"/>
+                <a:ea typeface="Meiryo" pitchFamily="34" charset="-122"/>
+                <a:cs typeface="Meiryo" pitchFamily="34" charset="-120"/>
+              </a:rPr>
+              <a:t>予約方法は、ワークショップ当日にご案内します。</a:t>
+            </a:r>
+            <a:endParaRPr lang="en-US" sz="1850" dirty="0"/>
+          </a:p>
+        </p:txBody>
+      </p:sp>
+      <p:sp>
+        <p:nvSpPr>
+          <p:cNvPr id="23" name="Text 21"/>
           <p:cNvSpPr/>
           <p:nvPr/>
         </p:nvSpPr>
@@ -25818,7 +26424,7 @@
       </p:sp>
       <p:sp>
         <p:nvSpPr>
-          <p:cNvPr id="7" name="Text 5"/>
+          <p:cNvPr id="24" name="Text 22"/>
           <p:cNvSpPr/>
           <p:nvPr/>
         </p:nvSpPr>
@@ -25849,7 +26455,7 @@
                 <a:ea typeface="Meiryo" pitchFamily="34" charset="-122"/>
                 <a:cs typeface="Meiryo" pitchFamily="34" charset="-120"/>
               </a:rPr>
-              <a:t>41 / 42</a:t>
+              <a:t>41 / 43</a:t>
             </a:r>
             <a:endParaRPr lang="en-US" sz="1150" dirty="0"/>
           </a:p>
@@ -25894,6 +26500,341 @@
           <p:nvPr/>
         </p:nvSpPr>
         <p:spPr>
+          <a:xfrm rot="900000">
+            <a:off x="11109960" y="-685800"/>
+            <a:ext cx="1828800" cy="1828800"/>
+          </a:xfrm>
+          <a:prstGeom prst="hexagon">
+            <a:avLst/>
+          </a:prstGeom>
+          <a:solidFill>
+            <a:srgbClr val="F0876A">
+              <a:alpha val="13000"/>
+            </a:srgbClr>
+          </a:solidFill>
+          <a:ln/>
+        </p:spPr>
+      </p:sp>
+      <p:sp>
+        <p:nvSpPr>
+          <p:cNvPr id="3" name="Shape 1"/>
+          <p:cNvSpPr/>
+          <p:nvPr/>
+        </p:nvSpPr>
+        <p:spPr>
+          <a:xfrm rot="720000">
+            <a:off x="-868680" y="5623560"/>
+            <a:ext cx="1737360" cy="1737360"/>
+          </a:xfrm>
+          <a:prstGeom prst="hexagon">
+            <a:avLst/>
+          </a:prstGeom>
+          <a:solidFill>
+            <a:srgbClr val="2F9188">
+              <a:alpha val="13000"/>
+            </a:srgbClr>
+          </a:solidFill>
+          <a:ln/>
+        </p:spPr>
+      </p:sp>
+      <p:sp>
+        <p:nvSpPr>
+          <p:cNvPr id="4" name="Text 2"/>
+          <p:cNvSpPr/>
+          <p:nvPr/>
+        </p:nvSpPr>
+        <p:spPr>
+          <a:xfrm>
+            <a:off x="640080" y="457200"/>
+            <a:ext cx="9144000" cy="320040"/>
+          </a:xfrm>
+          <a:prstGeom prst="rect">
+            <a:avLst/>
+          </a:prstGeom>
+          <a:noFill/>
+          <a:ln/>
+        </p:spPr>
+        <p:txBody>
+          <a:bodyPr wrap="square" lIns="0" tIns="0" rIns="0" bIns="0" rtlCol="0" anchor="ctr"/>
+          <a:lstStyle/>
+          <a:p>
+            <a:pPr indent="0" marL="0">
+              <a:buNone/>
+            </a:pPr>
+            <a:r>
+              <a:rPr lang="en-US" sz="1500" b="1" spc="300" kern="0" dirty="0">
+                <a:solidFill>
+                  <a:srgbClr val="DD6E4E"/>
+                </a:solidFill>
+                <a:latin typeface="Meiryo" pitchFamily="34" charset="0"/>
+                <a:ea typeface="Meiryo" pitchFamily="34" charset="-122"/>
+                <a:cs typeface="Meiryo" pitchFamily="34" charset="-120"/>
+              </a:rPr>
+              <a:t>最後に</a:t>
+            </a:r>
+            <a:endParaRPr lang="en-US" sz="1500" dirty="0"/>
+          </a:p>
+        </p:txBody>
+      </p:sp>
+      <p:sp>
+        <p:nvSpPr>
+          <p:cNvPr id="5" name="Text 3"/>
+          <p:cNvSpPr/>
+          <p:nvPr/>
+        </p:nvSpPr>
+        <p:spPr>
+          <a:xfrm>
+            <a:off x="1097280" y="1463040"/>
+            <a:ext cx="9997135" cy="4754880"/>
+          </a:xfrm>
+          <a:prstGeom prst="rect">
+            <a:avLst/>
+          </a:prstGeom>
+          <a:noFill/>
+          <a:ln/>
+        </p:spPr>
+        <p:txBody>
+          <a:bodyPr wrap="square" lIns="0" tIns="0" rIns="0" bIns="0" rtlCol="0" anchor="ctr"/>
+          <a:lstStyle/>
+          <a:p>
+            <a:pPr algn="ctr" indent="0" marL="0">
+              <a:lnSpc>
+                <a:spcPts val="3000"/>
+              </a:lnSpc>
+              <a:spcAft>
+                <a:spcPts val="1600"/>
+              </a:spcAft>
+              <a:buNone/>
+            </a:pPr>
+            <a:r>
+              <a:rPr lang="en-US" sz="2050" dirty="0">
+                <a:solidFill>
+                  <a:srgbClr val="4A3B30"/>
+                </a:solidFill>
+              </a:rPr>
+              <a:t>この90日間、一度も止まらなくていい。完璧じゃなくていい。</a:t>
+            </a:r>
+            <a:endParaRPr lang="en-US" sz="2050" dirty="0"/>
+          </a:p>
+          <a:p>
+            <a:pPr algn="ctr" indent="0" marL="0">
+              <a:lnSpc>
+                <a:spcPts val="3000"/>
+              </a:lnSpc>
+              <a:spcAft>
+                <a:spcPts val="1600"/>
+              </a:spcAft>
+              <a:buNone/>
+            </a:pPr>
+            <a:r>
+              <a:rPr lang="en-US" sz="2050" dirty="0">
+                <a:solidFill>
+                  <a:srgbClr val="4A3B30"/>
+                </a:solidFill>
+              </a:rPr>
+              <a:t>できない日があっていい。迷っていい。誰かに頼っていい。</a:t>
+            </a:r>
+            <a:endParaRPr lang="en-US" sz="2050" dirty="0"/>
+          </a:p>
+          <a:p>
+            <a:pPr algn="ctr" indent="0" marL="0">
+              <a:lnSpc>
+                <a:spcPts val="3000"/>
+              </a:lnSpc>
+              <a:spcAft>
+                <a:spcPts val="1600"/>
+              </a:spcAft>
+              <a:buNone/>
+            </a:pPr>
+            <a:r>
+              <a:rPr lang="en-US" sz="1850" dirty="0">
+                <a:solidFill>
+                  <a:srgbClr val="8A7A6C"/>
+                </a:solidFill>
+              </a:rPr>
+              <a:t>ただ、一つだけ。</a:t>
+            </a:r>
+            <a:endParaRPr lang="en-US" sz="2050" dirty="0"/>
+          </a:p>
+          <a:p>
+            <a:pPr algn="ctr" indent="0" marL="0">
+              <a:lnSpc>
+                <a:spcPts val="3000"/>
+              </a:lnSpc>
+              <a:spcAft>
+                <a:spcPts val="1600"/>
+              </a:spcAft>
+              <a:buNone/>
+            </a:pPr>
+            <a:r>
+              <a:rPr lang="en-US" sz="2550" b="1" dirty="0">
+                <a:solidFill>
+                  <a:srgbClr val="DD6E4E"/>
+                </a:solidFill>
+              </a:rPr>
+              <a:t>止まっても、また戻ってくる。</a:t>
+            </a:r>
+            <a:endParaRPr lang="en-US" sz="2050" dirty="0"/>
+          </a:p>
+          <a:p>
+            <a:pPr algn="ctr" indent="0" marL="0">
+              <a:lnSpc>
+                <a:spcPts val="3000"/>
+              </a:lnSpc>
+              <a:spcAft>
+                <a:spcPts val="1600"/>
+              </a:spcAft>
+              <a:buNone/>
+            </a:pPr>
+            <a:r>
+              <a:rPr lang="en-US" sz="1850" dirty="0">
+                <a:solidFill>
+                  <a:srgbClr val="8A7A6C"/>
+                </a:solidFill>
+              </a:rPr>
+              <a:t>そして戻ってきたとき、一緒に言いましょう。</a:t>
+            </a:r>
+            <a:endParaRPr lang="en-US" sz="2050" dirty="0"/>
+          </a:p>
+          <a:p>
+            <a:pPr algn="ctr" indent="0" marL="0">
+              <a:lnSpc>
+                <a:spcPts val="3000"/>
+              </a:lnSpc>
+              <a:spcAft>
+                <a:spcPts val="1600"/>
+              </a:spcAft>
+              <a:buNone/>
+            </a:pPr>
+            <a:r>
+              <a:rPr lang="en-US" sz="3000" b="1" dirty="0">
+                <a:solidFill>
+                  <a:srgbClr val="4A3B30"/>
+                </a:solidFill>
+              </a:rPr>
+              <a:t>「戻ってこられた。今日も一つ、できた。」</a:t>
+            </a:r>
+            <a:endParaRPr lang="en-US" sz="2050" dirty="0"/>
+          </a:p>
+        </p:txBody>
+      </p:sp>
+      <p:sp>
+        <p:nvSpPr>
+          <p:cNvPr id="6" name="Text 4"/>
+          <p:cNvSpPr/>
+          <p:nvPr/>
+        </p:nvSpPr>
+        <p:spPr>
+          <a:xfrm>
+            <a:off x="640080" y="6419088"/>
+            <a:ext cx="5486400" cy="292608"/>
+          </a:xfrm>
+          <a:prstGeom prst="rect">
+            <a:avLst/>
+          </a:prstGeom>
+          <a:noFill/>
+          <a:ln/>
+        </p:spPr>
+        <p:txBody>
+          <a:bodyPr wrap="square" lIns="0" tIns="0" rIns="0" bIns="0" rtlCol="0" anchor="ctr"/>
+          <a:lstStyle/>
+          <a:p>
+            <a:pPr algn="l" indent="0" marL="0">
+              <a:buNone/>
+            </a:pPr>
+            <a:r>
+              <a:rPr lang="en-US" sz="1150" dirty="0">
+                <a:solidFill>
+                  <a:srgbClr val="B7A99A"/>
+                </a:solidFill>
+                <a:latin typeface="Meiryo" pitchFamily="34" charset="0"/>
+                <a:ea typeface="Meiryo" pitchFamily="34" charset="-122"/>
+                <a:cs typeface="Meiryo" pitchFamily="34" charset="-120"/>
+              </a:rPr>
+              <a:t>できたのかけらワークショップ</a:t>
+            </a:r>
+            <a:endParaRPr lang="en-US" sz="1150" dirty="0"/>
+          </a:p>
+        </p:txBody>
+      </p:sp>
+      <p:sp>
+        <p:nvSpPr>
+          <p:cNvPr id="7" name="Text 5"/>
+          <p:cNvSpPr/>
+          <p:nvPr/>
+        </p:nvSpPr>
+        <p:spPr>
+          <a:xfrm>
+            <a:off x="10637215" y="6419088"/>
+            <a:ext cx="914400" cy="292608"/>
+          </a:xfrm>
+          <a:prstGeom prst="rect">
+            <a:avLst/>
+          </a:prstGeom>
+          <a:noFill/>
+          <a:ln/>
+        </p:spPr>
+        <p:txBody>
+          <a:bodyPr wrap="square" lIns="0" tIns="0" rIns="0" bIns="0" rtlCol="0" anchor="ctr"/>
+          <a:lstStyle/>
+          <a:p>
+            <a:pPr algn="r" indent="0" marL="0">
+              <a:buNone/>
+            </a:pPr>
+            <a:r>
+              <a:rPr lang="en-US" sz="1150" dirty="0">
+                <a:solidFill>
+                  <a:srgbClr val="B7A99A"/>
+                </a:solidFill>
+                <a:latin typeface="Meiryo" pitchFamily="34" charset="0"/>
+                <a:ea typeface="Meiryo" pitchFamily="34" charset="-122"/>
+                <a:cs typeface="Meiryo" pitchFamily="34" charset="-120"/>
+              </a:rPr>
+              <a:t>42 / 43</a:t>
+            </a:r>
+            <a:endParaRPr lang="en-US" sz="1150" dirty="0"/>
+          </a:p>
+        </p:txBody>
+      </p:sp>
+    </p:spTree>
+  </p:cSld>
+  <p:clrMapOvr>
+    <a:masterClrMapping/>
+  </p:clrMapOvr>
+</p:sld>
+</file>
+
+<file path=ppt/slides/slide43.xml><?xml version="1.0" encoding="utf-8"?>
+<p:sld xmlns:a="http://schemas.openxmlformats.org/drawingml/2006/main" xmlns:r="http://schemas.openxmlformats.org/officeDocument/2006/relationships" xmlns:p="http://schemas.openxmlformats.org/presentationml/2006/main">
+  <p:cSld name="Slide 43">
+    <p:bg>
+      <p:bgPr>
+        <a:solidFill>
+          <a:srgbClr val="FFF8F0"/>
+        </a:solidFill>
+      </p:bgPr>
+    </p:bg>
+    <p:spTree>
+      <p:nvGrpSpPr>
+        <p:cNvPr id="1" name=""/>
+        <p:cNvGrpSpPr/>
+        <p:nvPr/>
+      </p:nvGrpSpPr>
+      <p:grpSpPr>
+        <a:xfrm>
+          <a:off x="0" y="0"/>
+          <a:ext cx="0" cy="0"/>
+          <a:chOff x="0" y="0"/>
+          <a:chExt cx="0" cy="0"/>
+        </a:xfrm>
+      </p:grpSpPr>
+      <p:sp>
+        <p:nvSpPr>
+          <p:cNvPr id="2" name="Shape 0"/>
+          <p:cNvSpPr/>
+          <p:nvPr/>
+        </p:nvSpPr>
+        <p:spPr>
           <a:xfrm rot="600000">
             <a:off x="-1097280" y="-1005840"/>
             <a:ext cx="2743200" cy="2743200"/>
@@ -26298,7 +27239,7 @@
                 <a:ea typeface="Meiryo" pitchFamily="34" charset="-122"/>
                 <a:cs typeface="Meiryo" pitchFamily="34" charset="-120"/>
               </a:rPr>
-              <a:t>42 / 42</a:t>
+              <a:t>43 / 43</a:t>
             </a:r>
             <a:endParaRPr lang="en-US" sz="1150" dirty="0"/>
           </a:p>
@@ -26960,7 +27901,7 @@
                 <a:ea typeface="Meiryo" pitchFamily="34" charset="-122"/>
                 <a:cs typeface="Meiryo" pitchFamily="34" charset="-120"/>
               </a:rPr>
-              <a:t>5 / 42</a:t>
+              <a:t>5 / 43</a:t>
             </a:r>
             <a:endParaRPr lang="en-US" sz="1150" dirty="0"/>
           </a:p>
@@ -27399,7 +28340,7 @@
                 <a:ea typeface="Meiryo" pitchFamily="34" charset="-122"/>
                 <a:cs typeface="Meiryo" pitchFamily="34" charset="-120"/>
               </a:rPr>
-              <a:t>6 / 42</a:t>
+              <a:t>6 / 43</a:t>
             </a:r>
             <a:endParaRPr lang="en-US" sz="1150" dirty="0"/>
           </a:p>
@@ -28125,7 +29066,7 @@
                 <a:ea typeface="Meiryo" pitchFamily="34" charset="-122"/>
                 <a:cs typeface="Meiryo" pitchFamily="34" charset="-120"/>
               </a:rPr>
-              <a:t>7 / 42</a:t>
+              <a:t>7 / 43</a:t>
             </a:r>
             <a:endParaRPr lang="en-US" sz="1150" dirty="0"/>
           </a:p>
@@ -28911,7 +29852,7 @@
                 <a:ea typeface="Meiryo" pitchFamily="34" charset="-122"/>
                 <a:cs typeface="Meiryo" pitchFamily="34" charset="-120"/>
               </a:rPr>
-              <a:t>8 / 42</a:t>
+              <a:t>8 / 43</a:t>
             </a:r>
             <a:endParaRPr lang="en-US" sz="1150" dirty="0"/>
           </a:p>
@@ -29703,7 +30644,7 @@
                 <a:ea typeface="Meiryo" pitchFamily="34" charset="-122"/>
                 <a:cs typeface="Meiryo" pitchFamily="34" charset="-120"/>
               </a:rPr>
-              <a:t>9 / 42</a:t>
+              <a:t>9 / 43</a:t>
             </a:r>
             <a:endParaRPr lang="en-US" sz="1150" dirty="0"/>
           </a:p>

--- a/workshop/dist/dekitanokakera-workshop.pptx
+++ b/workshop/dist/dekitanokakera-workshop.pptx
@@ -48,9 +48,10 @@
     <p:sldId id="296" r:id="rId42"/>
     <p:sldId id="297" r:id="rId43"/>
     <p:sldId id="298" r:id="rId44"/>
+    <p:sldId id="299" r:id="rId45"/>
   </p:sldIdLst>
   <p:notesMasterIdLst>
-    <p:notesMasterId r:id="rId45"/>
+    <p:notesMasterId r:id="rId46"/>
   </p:notesMasterIdLst>
   <p:sldSz cx="12191695" cy="6858000"/>
   <p:notesSz cx="6858000" cy="12191695"/>
@@ -3824,6 +3825,94 @@
             <a:fld id="{F7021451-1387-4CA6-816F-3879F97B5CBC}" type="slidenum">
               <a:rPr lang="en-US"/>
               <a:t>43</a:t>
+            </a:fld>
+            <a:endParaRPr lang="en-US"/>
+          </a:p>
+        </p:txBody>
+      </p:sp>
+    </p:spTree>
+    <p:extLst>
+      <p:ext uri="{BB962C8B-B14F-4D97-AF65-F5344CB8AC3E}">
+        <p14:creationId xmlns:p14="http://schemas.microsoft.com/office/powerpoint/2010/main" val="1024086991"/>
+      </p:ext>
+    </p:extLst>
+  </p:cSld>
+  <p:clrMapOvr>
+    <a:masterClrMapping/>
+  </p:clrMapOvr>
+</p:notes>
+</file>
+
+<file path=ppt/notesSlides/notesSlide44.xml><?xml version="1.0" encoding="utf-8"?>
+<p:notes xmlns:a="http://schemas.openxmlformats.org/drawingml/2006/main" xmlns:r="http://schemas.openxmlformats.org/officeDocument/2006/relationships" xmlns:p="http://schemas.openxmlformats.org/presentationml/2006/main">
+  <p:cSld>
+    <p:spTree>
+      <p:nvGrpSpPr>
+        <p:cNvPr id="1" name=""/>
+        <p:cNvGrpSpPr/>
+        <p:nvPr/>
+      </p:nvGrpSpPr>
+      <p:grpSpPr>
+        <a:xfrm>
+          <a:off x="0" y="0"/>
+          <a:ext cx="0" cy="0"/>
+          <a:chOff x="0" y="0"/>
+          <a:chExt cx="0" cy="0"/>
+        </a:xfrm>
+      </p:grpSpPr>
+      <p:sp>
+        <p:nvSpPr>
+          <p:cNvPr id="2" name="Slide Image Placeholder 1"/>
+          <p:cNvSpPr>
+            <a:spLocks noGrp="1" noRot="1" noChangeAspect="1"/>
+          </p:cNvSpPr>
+          <p:nvPr>
+            <p:ph type="sldImg"/>
+          </p:nvPr>
+        </p:nvSpPr>
+        <p:spPr/>
+      </p:sp>
+      <p:sp>
+        <p:nvSpPr>
+          <p:cNvPr id="3" name="Notes Placeholder 2"/>
+          <p:cNvSpPr>
+            <a:spLocks noGrp="1"/>
+          </p:cNvSpPr>
+          <p:nvPr>
+            <p:ph type="body" idx="1"/>
+          </p:nvPr>
+        </p:nvSpPr>
+        <p:spPr/>
+        <p:txBody>
+          <a:bodyPr/>
+          <a:lstStyle/>
+          <a:p>
+            <a:r>
+              <a:rPr lang="en-US" dirty="0"/>
+              <a:t/>
+            </a:r>
+            <a:endParaRPr lang="en-US" dirty="0"/>
+          </a:p>
+        </p:txBody>
+      </p:sp>
+      <p:sp>
+        <p:nvSpPr>
+          <p:cNvPr id="4" name="Slide Number Placeholder 3"/>
+          <p:cNvSpPr>
+            <a:spLocks noGrp="1"/>
+          </p:cNvSpPr>
+          <p:nvPr>
+            <p:ph type="sldNum" sz="quarter" idx="10"/>
+          </p:nvPr>
+        </p:nvSpPr>
+        <p:spPr/>
+        <p:txBody>
+          <a:bodyPr/>
+          <a:lstStyle/>
+          <a:p>
+            <a:fld id="{F7021451-1387-4CA6-816F-3879F97B5CBC}" type="slidenum">
+              <a:rPr lang="en-US"/>
+              <a:t>44</a:t>
             </a:fld>
             <a:endParaRPr lang="en-US"/>
           </a:p>
@@ -5734,7 +5823,7 @@
                 <a:ea typeface="Meiryo" pitchFamily="34" charset="-122"/>
                 <a:cs typeface="Meiryo" pitchFamily="34" charset="-120"/>
               </a:rPr>
-              <a:t>10 / 43</a:t>
+              <a:t>10 / 44</a:t>
             </a:r>
             <a:endParaRPr lang="en-US" sz="1150" dirty="0"/>
           </a:p>
@@ -6178,7 +6267,7 @@
                 <a:ea typeface="Meiryo" pitchFamily="34" charset="-122"/>
                 <a:cs typeface="Meiryo" pitchFamily="34" charset="-120"/>
               </a:rPr>
-              <a:t>11 / 43</a:t>
+              <a:t>11 / 44</a:t>
             </a:r>
             <a:endParaRPr lang="en-US" sz="1150" dirty="0"/>
           </a:p>
@@ -6600,7 +6689,7 @@
                 <a:ea typeface="Meiryo" pitchFamily="34" charset="-122"/>
                 <a:cs typeface="Meiryo" pitchFamily="34" charset="-120"/>
               </a:rPr>
-              <a:t>12 / 43</a:t>
+              <a:t>12 / 44</a:t>
             </a:r>
             <a:endParaRPr lang="en-US" sz="1150" dirty="0"/>
           </a:p>
@@ -7022,7 +7111,7 @@
                 <a:ea typeface="Meiryo" pitchFamily="34" charset="-122"/>
                 <a:cs typeface="Meiryo" pitchFamily="34" charset="-120"/>
               </a:rPr>
-              <a:t>13 / 43</a:t>
+              <a:t>13 / 44</a:t>
             </a:r>
             <a:endParaRPr lang="en-US" sz="1150" dirty="0"/>
           </a:p>
@@ -7453,7 +7542,7 @@
                 <a:ea typeface="Meiryo" pitchFamily="34" charset="-122"/>
                 <a:cs typeface="Meiryo" pitchFamily="34" charset="-120"/>
               </a:rPr>
-              <a:t>14 / 43</a:t>
+              <a:t>14 / 44</a:t>
             </a:r>
             <a:endParaRPr lang="en-US" sz="1150" dirty="0"/>
           </a:p>
@@ -8149,7 +8238,7 @@
                 <a:ea typeface="Meiryo" pitchFamily="34" charset="-122"/>
                 <a:cs typeface="Meiryo" pitchFamily="34" charset="-120"/>
               </a:rPr>
-              <a:t>15 / 43</a:t>
+              <a:t>15 / 44</a:t>
             </a:r>
             <a:endParaRPr lang="en-US" sz="1150" dirty="0"/>
           </a:p>
@@ -8580,7 +8669,7 @@
                 <a:ea typeface="Meiryo" pitchFamily="34" charset="-122"/>
                 <a:cs typeface="Meiryo" pitchFamily="34" charset="-120"/>
               </a:rPr>
-              <a:t>16 / 43</a:t>
+              <a:t>16 / 44</a:t>
             </a:r>
             <a:endParaRPr lang="en-US" sz="1150" dirty="0"/>
           </a:p>
@@ -9051,7 +9140,7 @@
                 <a:ea typeface="Meiryo" pitchFamily="34" charset="-122"/>
                 <a:cs typeface="Meiryo" pitchFamily="34" charset="-120"/>
               </a:rPr>
-              <a:t>17 / 43</a:t>
+              <a:t>17 / 44</a:t>
             </a:r>
             <a:endParaRPr lang="en-US" sz="1150" dirty="0"/>
           </a:p>
@@ -9448,7 +9537,7 @@
                 <a:ea typeface="Meiryo" pitchFamily="34" charset="-122"/>
                 <a:cs typeface="Meiryo" pitchFamily="34" charset="-120"/>
               </a:rPr>
-              <a:t>18 / 43</a:t>
+              <a:t>18 / 44</a:t>
             </a:r>
             <a:endParaRPr lang="en-US" sz="1150" dirty="0"/>
           </a:p>
@@ -10250,7 +10339,7 @@
                 <a:ea typeface="Meiryo" pitchFamily="34" charset="-122"/>
                 <a:cs typeface="Meiryo" pitchFamily="34" charset="-120"/>
               </a:rPr>
-              <a:t>19 / 43</a:t>
+              <a:t>19 / 44</a:t>
             </a:r>
             <a:endParaRPr lang="en-US" sz="1150" dirty="0"/>
           </a:p>
@@ -11069,7 +11158,7 @@
                 <a:ea typeface="Meiryo" pitchFamily="34" charset="-122"/>
                 <a:cs typeface="Meiryo" pitchFamily="34" charset="-120"/>
               </a:rPr>
-              <a:t>2 / 43</a:t>
+              <a:t>2 / 44</a:t>
             </a:r>
             <a:endParaRPr lang="en-US" sz="1150" dirty="0"/>
           </a:p>
@@ -11797,7 +11886,7 @@
                 <a:ea typeface="Meiryo" pitchFamily="34" charset="-122"/>
                 <a:cs typeface="Meiryo" pitchFamily="34" charset="-120"/>
               </a:rPr>
-              <a:t>20 / 43</a:t>
+              <a:t>20 / 44</a:t>
             </a:r>
             <a:endParaRPr lang="en-US" sz="1150" dirty="0"/>
           </a:p>
@@ -12169,7 +12258,7 @@
                 <a:ea typeface="Meiryo" pitchFamily="34" charset="-122"/>
                 <a:cs typeface="Meiryo" pitchFamily="34" charset="-120"/>
               </a:rPr>
-              <a:t>21 / 43</a:t>
+              <a:t>21 / 44</a:t>
             </a:r>
             <a:endParaRPr lang="en-US" sz="1150" dirty="0"/>
           </a:p>
@@ -12513,7 +12602,7 @@
                 <a:ea typeface="Meiryo" pitchFamily="34" charset="-122"/>
                 <a:cs typeface="Meiryo" pitchFamily="34" charset="-120"/>
               </a:rPr>
-              <a:t>22 / 43</a:t>
+              <a:t>22 / 44</a:t>
             </a:r>
             <a:endParaRPr lang="en-US" sz="1150" dirty="0"/>
           </a:p>
@@ -13108,7 +13197,7 @@
                 <a:ea typeface="Meiryo" pitchFamily="34" charset="-122"/>
                 <a:cs typeface="Meiryo" pitchFamily="34" charset="-120"/>
               </a:rPr>
-              <a:t>23 / 43</a:t>
+              <a:t>23 / 44</a:t>
             </a:r>
             <a:endParaRPr lang="en-US" sz="1150" dirty="0"/>
           </a:p>
@@ -13513,7 +13602,7 @@
                 <a:ea typeface="Meiryo" pitchFamily="34" charset="-122"/>
                 <a:cs typeface="Meiryo" pitchFamily="34" charset="-120"/>
               </a:rPr>
-              <a:t>24 / 43</a:t>
+              <a:t>24 / 44</a:t>
             </a:r>
             <a:endParaRPr lang="en-US" sz="1150" dirty="0"/>
           </a:p>
@@ -13918,7 +14007,7 @@
                 <a:ea typeface="Meiryo" pitchFamily="34" charset="-122"/>
                 <a:cs typeface="Meiryo" pitchFamily="34" charset="-120"/>
               </a:rPr>
-              <a:t>25 / 43</a:t>
+              <a:t>25 / 44</a:t>
             </a:r>
             <a:endParaRPr lang="en-US" sz="1150" dirty="0"/>
           </a:p>
@@ -14323,7 +14412,7 @@
                 <a:ea typeface="Meiryo" pitchFamily="34" charset="-122"/>
                 <a:cs typeface="Meiryo" pitchFamily="34" charset="-120"/>
               </a:rPr>
-              <a:t>26 / 43</a:t>
+              <a:t>26 / 44</a:t>
             </a:r>
             <a:endParaRPr lang="en-US" sz="1150" dirty="0"/>
           </a:p>
@@ -14840,7 +14929,7 @@
                 <a:ea typeface="Meiryo" pitchFamily="34" charset="-122"/>
                 <a:cs typeface="Meiryo" pitchFamily="34" charset="-120"/>
               </a:rPr>
-              <a:t>27 / 43</a:t>
+              <a:t>27 / 44</a:t>
             </a:r>
             <a:endParaRPr lang="en-US" sz="1150" dirty="0"/>
           </a:p>
@@ -15849,7 +15938,7 @@
                 <a:ea typeface="Meiryo" pitchFamily="34" charset="-122"/>
                 <a:cs typeface="Meiryo" pitchFamily="34" charset="-120"/>
               </a:rPr>
-              <a:t>28 / 43</a:t>
+              <a:t>28 / 44</a:t>
             </a:r>
             <a:endParaRPr lang="en-US" sz="1150" dirty="0"/>
           </a:p>
@@ -16359,7 +16448,7 @@
                 <a:ea typeface="Meiryo" pitchFamily="34" charset="-122"/>
                 <a:cs typeface="Meiryo" pitchFamily="34" charset="-120"/>
               </a:rPr>
-              <a:t>29 / 43</a:t>
+              <a:t>29 / 44</a:t>
             </a:r>
             <a:endParaRPr lang="en-US" sz="1150" dirty="0"/>
           </a:p>
@@ -17089,7 +17178,7 @@
                 <a:ea typeface="Meiryo" pitchFamily="34" charset="-122"/>
                 <a:cs typeface="Meiryo" pitchFamily="34" charset="-120"/>
               </a:rPr>
-              <a:t>3 / 43</a:t>
+              <a:t>3 / 44</a:t>
             </a:r>
             <a:endParaRPr lang="en-US" sz="1150" dirty="0"/>
           </a:p>
@@ -17819,7 +17908,7 @@
                 <a:ea typeface="Meiryo" pitchFamily="34" charset="-122"/>
                 <a:cs typeface="Meiryo" pitchFamily="34" charset="-120"/>
               </a:rPr>
-              <a:t>30 / 43</a:t>
+              <a:t>30 / 44</a:t>
             </a:r>
             <a:endParaRPr lang="en-US" sz="1150" dirty="0"/>
           </a:p>
@@ -18516,7 +18605,7 @@
                 <a:ea typeface="Meiryo" pitchFamily="34" charset="-122"/>
                 <a:cs typeface="Meiryo" pitchFamily="34" charset="-120"/>
               </a:rPr>
-              <a:t>31 / 43</a:t>
+              <a:t>31 / 44</a:t>
             </a:r>
             <a:endParaRPr lang="en-US" sz="1150" dirty="0"/>
           </a:p>
@@ -19279,7 +19368,7 @@
                 <a:ea typeface="Meiryo" pitchFamily="34" charset="-122"/>
                 <a:cs typeface="Meiryo" pitchFamily="34" charset="-120"/>
               </a:rPr>
-              <a:t>32 / 43</a:t>
+              <a:t>32 / 44</a:t>
             </a:r>
             <a:endParaRPr lang="en-US" sz="1150" dirty="0"/>
           </a:p>
@@ -19959,7 +20048,7 @@
                 <a:ea typeface="Meiryo" pitchFamily="34" charset="-122"/>
                 <a:cs typeface="Meiryo" pitchFamily="34" charset="-120"/>
               </a:rPr>
-              <a:t>33 / 43</a:t>
+              <a:t>33 / 44</a:t>
             </a:r>
             <a:endParaRPr lang="en-US" sz="1150" dirty="0"/>
           </a:p>
@@ -20978,7 +21067,7 @@
                 <a:ea typeface="Meiryo" pitchFamily="34" charset="-122"/>
                 <a:cs typeface="Meiryo" pitchFamily="34" charset="-120"/>
               </a:rPr>
-              <a:t>34 / 43</a:t>
+              <a:t>34 / 44</a:t>
             </a:r>
             <a:endParaRPr lang="en-US" sz="1150" dirty="0"/>
           </a:p>
@@ -22093,7 +22182,7 @@
                 <a:ea typeface="Meiryo" pitchFamily="34" charset="-122"/>
                 <a:cs typeface="Meiryo" pitchFamily="34" charset="-120"/>
               </a:rPr>
-              <a:t>35 / 43</a:t>
+              <a:t>35 / 44</a:t>
             </a:r>
             <a:endParaRPr lang="en-US" sz="1150" dirty="0"/>
           </a:p>
@@ -23064,7 +23153,7 @@
                 <a:ea typeface="Meiryo" pitchFamily="34" charset="-122"/>
                 <a:cs typeface="Meiryo" pitchFamily="34" charset="-120"/>
               </a:rPr>
-              <a:t>36 / 43</a:t>
+              <a:t>36 / 44</a:t>
             </a:r>
             <a:endParaRPr lang="en-US" sz="1150" dirty="0"/>
           </a:p>
@@ -23414,7 +23503,7 @@
                 <a:ea typeface="Meiryo" pitchFamily="34" charset="-122"/>
                 <a:cs typeface="Meiryo" pitchFamily="34" charset="-120"/>
               </a:rPr>
-              <a:t>37 / 43</a:t>
+              <a:t>37 / 44</a:t>
             </a:r>
             <a:endParaRPr lang="en-US" sz="1150" dirty="0"/>
           </a:p>
@@ -23739,7 +23828,7 @@
                 <a:ea typeface="Meiryo" pitchFamily="34" charset="-122"/>
                 <a:cs typeface="Meiryo" pitchFamily="34" charset="-120"/>
               </a:rPr>
-              <a:t>38 / 43</a:t>
+              <a:t>38 / 44</a:t>
             </a:r>
             <a:endParaRPr lang="en-US" sz="1150" dirty="0"/>
           </a:p>
@@ -24083,7 +24172,7 @@
                 <a:ea typeface="Meiryo" pitchFamily="34" charset="-122"/>
                 <a:cs typeface="Meiryo" pitchFamily="34" charset="-120"/>
               </a:rPr>
-              <a:t>39 / 43</a:t>
+              <a:t>39 / 44</a:t>
             </a:r>
             <a:endParaRPr lang="en-US" sz="1150" dirty="0"/>
           </a:p>
@@ -24484,7 +24573,7 @@
                 <a:ea typeface="Meiryo" pitchFamily="34" charset="-122"/>
                 <a:cs typeface="Meiryo" pitchFamily="34" charset="-120"/>
               </a:rPr>
-              <a:t>4 / 43</a:t>
+              <a:t>4 / 44</a:t>
             </a:r>
             <a:endParaRPr lang="en-US" sz="1150" dirty="0"/>
           </a:p>
@@ -25603,7 +25692,7 @@
                 <a:ea typeface="Meiryo" pitchFamily="34" charset="-122"/>
                 <a:cs typeface="Meiryo" pitchFamily="34" charset="-120"/>
               </a:rPr>
-              <a:t>40 / 43</a:t>
+              <a:t>40 / 44</a:t>
             </a:r>
             <a:endParaRPr lang="en-US" sz="1150" dirty="0"/>
           </a:p>
@@ -25648,9 +25737,9 @@
           <p:nvPr/>
         </p:nvSpPr>
         <p:spPr>
-          <a:xfrm rot="720000">
-            <a:off x="-868680" y="5623560"/>
-            <a:ext cx="1737360" cy="1737360"/>
+          <a:xfrm rot="900000">
+            <a:off x="11109960" y="-685800"/>
+            <a:ext cx="1828800" cy="1828800"/>
           </a:xfrm>
           <a:prstGeom prst="hexagon">
             <a:avLst/>
@@ -25711,7 +25800,7 @@
         <p:spPr>
           <a:xfrm>
             <a:off x="640080" y="804672"/>
-            <a:ext cx="10911535" cy="914400"/>
+            <a:ext cx="10911535" cy="1188720"/>
           </a:xfrm>
           <a:prstGeom prst="rect">
             <a:avLst/>
@@ -25730,7 +25819,7 @@
               <a:buNone/>
             </a:pPr>
             <a:r>
-              <a:rPr lang="en-US" sz="3200" b="1" dirty="0">
+              <a:rPr lang="en-US" sz="2700" b="1" dirty="0">
                 <a:solidFill>
                   <a:srgbClr val="4A3B30"/>
                 </a:solidFill>
@@ -25738,9 +25827,29 @@
                 <a:ea typeface="Meiryo" pitchFamily="34" charset="-122"/>
                 <a:cs typeface="Meiryo" pitchFamily="34" charset="-120"/>
               </a:rPr>
-              <a:t>講師との15分間、個別ミニ相談</a:t>
-            </a:r>
-            <a:endParaRPr lang="en-US" sz="3200" dirty="0"/>
+              <a:t>ワークシート＆7STEPチェックシートを</a:t>
+            </a:r>
+            <a:endParaRPr lang="en-US" sz="2700" dirty="0"/>
+          </a:p>
+          <a:p>
+            <a:pPr algn="l" indent="0" marL="0">
+              <a:lnSpc>
+                <a:spcPts val="3400"/>
+              </a:lnSpc>
+              <a:buNone/>
+            </a:pPr>
+            <a:r>
+              <a:rPr lang="en-US" sz="2700" b="1" dirty="0">
+                <a:solidFill>
+                  <a:srgbClr val="4A3B30"/>
+                </a:solidFill>
+                <a:latin typeface="Meiryo" pitchFamily="34" charset="0"/>
+                <a:ea typeface="Meiryo" pitchFamily="34" charset="-122"/>
+                <a:cs typeface="Meiryo" pitchFamily="34" charset="-120"/>
+              </a:rPr>
+              <a:t>プレゼント</a:t>
+            </a:r>
+            <a:endParaRPr lang="en-US" sz="2700" dirty="0"/>
           </a:p>
         </p:txBody>
       </p:sp>
@@ -25752,156 +25861,16 @@
         </p:nvSpPr>
         <p:spPr>
           <a:xfrm>
-            <a:off x="640080" y="1874520"/>
-            <a:ext cx="10911535" cy="1417320"/>
+            <a:off x="548640" y="2240280"/>
+            <a:ext cx="3108960" cy="3108960"/>
           </a:xfrm>
           <a:prstGeom prst="roundRect">
             <a:avLst>
-              <a:gd name="adj" fmla="val 7742"/>
+              <a:gd name="adj" fmla="val 1765"/>
             </a:avLst>
-          </a:prstGeom>
-          <a:solidFill>
-            <a:srgbClr val="FDEEE7"/>
-          </a:solidFill>
-          <a:ln/>
-        </p:spPr>
-      </p:sp>
-      <p:sp>
-        <p:nvSpPr>
-          <p:cNvPr id="6" name="Shape 4"/>
-          <p:cNvSpPr/>
-          <p:nvPr/>
-        </p:nvSpPr>
-        <p:spPr>
-          <a:xfrm>
-            <a:off x="1051560" y="2148840"/>
-            <a:ext cx="868680" cy="868680"/>
-          </a:xfrm>
-          <a:prstGeom prst="ellipse">
-            <a:avLst/>
           </a:prstGeom>
           <a:solidFill>
             <a:srgbClr val="FFFFFF"/>
-          </a:solidFill>
-          <a:ln/>
-        </p:spPr>
-      </p:sp>
-      <p:sp>
-        <p:nvSpPr>
-          <p:cNvPr id="7" name="Text 5"/>
-          <p:cNvSpPr/>
-          <p:nvPr/>
-        </p:nvSpPr>
-        <p:spPr>
-          <a:xfrm>
-            <a:off x="1051560" y="2148840"/>
-            <a:ext cx="868680" cy="868680"/>
-          </a:xfrm>
-          <a:prstGeom prst="rect">
-            <a:avLst/>
-          </a:prstGeom>
-          <a:noFill/>
-          <a:ln/>
-        </p:spPr>
-        <p:txBody>
-          <a:bodyPr wrap="square" lIns="0" tIns="0" rIns="0" bIns="0" rtlCol="0" anchor="ctr"/>
-          <a:lstStyle/>
-          <a:p>
-            <a:pPr algn="ctr" indent="0" marL="0">
-              <a:buNone/>
-            </a:pPr>
-            <a:r>
-              <a:rPr lang="en-US" sz="4000" dirty="0">
-                <a:solidFill>
-                  <a:srgbClr val="000000"/>
-                </a:solidFill>
-              </a:rPr>
-              <a:t>💬</a:t>
-            </a:r>
-            <a:endParaRPr lang="en-US" sz="4000" dirty="0"/>
-          </a:p>
-        </p:txBody>
-      </p:sp>
-      <p:sp>
-        <p:nvSpPr>
-          <p:cNvPr id="8" name="Text 6"/>
-          <p:cNvSpPr/>
-          <p:nvPr/>
-        </p:nvSpPr>
-        <p:spPr>
-          <a:xfrm>
-            <a:off x="2194560" y="1874520"/>
-            <a:ext cx="8991295" cy="1417320"/>
-          </a:xfrm>
-          <a:prstGeom prst="rect">
-            <a:avLst/>
-          </a:prstGeom>
-          <a:noFill/>
-          <a:ln/>
-        </p:spPr>
-        <p:txBody>
-          <a:bodyPr wrap="square" lIns="0" tIns="0" rIns="0" bIns="0" rtlCol="0" anchor="ctr"/>
-          <a:lstStyle/>
-          <a:p>
-            <a:pPr indent="0" marL="0">
-              <a:lnSpc>
-                <a:spcPts val="2700"/>
-              </a:lnSpc>
-              <a:buNone/>
-            </a:pPr>
-            <a:r>
-              <a:rPr lang="en-US" sz="1900" b="1" dirty="0">
-                <a:solidFill>
-                  <a:srgbClr val="4A3B30"/>
-                </a:solidFill>
-                <a:latin typeface="Meiryo" pitchFamily="34" charset="0"/>
-                <a:ea typeface="Meiryo" pitchFamily="34" charset="-122"/>
-                <a:cs typeface="Meiryo" pitchFamily="34" charset="-120"/>
-              </a:rPr>
-              <a:t>参加者限定で、講師と1対1で話せる15分間。</a:t>
-            </a:r>
-            <a:endParaRPr lang="en-US" sz="1900" dirty="0"/>
-          </a:p>
-          <a:p>
-            <a:pPr indent="0" marL="0">
-              <a:lnSpc>
-                <a:spcPts val="2700"/>
-              </a:lnSpc>
-              <a:buNone/>
-            </a:pPr>
-            <a:r>
-              <a:rPr lang="en-US" sz="1900" b="1" dirty="0">
-                <a:solidFill>
-                  <a:srgbClr val="4A3B30"/>
-                </a:solidFill>
-                <a:latin typeface="Meiryo" pitchFamily="34" charset="0"/>
-                <a:ea typeface="Meiryo" pitchFamily="34" charset="-122"/>
-                <a:cs typeface="Meiryo" pitchFamily="34" charset="-120"/>
-              </a:rPr>
-              <a:t>あなたの「今」に合わせて、一緒に考えます。</a:t>
-            </a:r>
-            <a:endParaRPr lang="en-US" sz="1900" dirty="0"/>
-          </a:p>
-        </p:txBody>
-      </p:sp>
-      <p:sp>
-        <p:nvSpPr>
-          <p:cNvPr id="9" name="Shape 7"/>
-          <p:cNvSpPr/>
-          <p:nvPr/>
-        </p:nvSpPr>
-        <p:spPr>
-          <a:xfrm>
-            <a:off x="640080" y="3657600"/>
-            <a:ext cx="3484778" cy="1417320"/>
-          </a:xfrm>
-          <a:prstGeom prst="roundRect">
-            <a:avLst>
-              <a:gd name="adj" fmla="val 7742"/>
-            </a:avLst>
-          </a:prstGeom>
-          <a:solidFill>
-            <a:srgbClr val="FFFDFA"/>
           </a:solidFill>
           <a:ln w="12700">
             <a:solidFill>
@@ -25911,91 +25880,59 @@
           </a:ln>
         </p:spPr>
       </p:sp>
-      <p:sp>
-        <p:nvSpPr>
-          <p:cNvPr id="10" name="Shape 8"/>
-          <p:cNvSpPr/>
-          <p:nvPr/>
-        </p:nvSpPr>
-        <p:spPr>
-          <a:xfrm>
-            <a:off x="2089861" y="3858768"/>
-            <a:ext cx="585216" cy="585216"/>
-          </a:xfrm>
-          <a:prstGeom prst="ellipse">
-            <a:avLst/>
-          </a:prstGeom>
-          <a:solidFill>
-            <a:srgbClr val="FDEEE7"/>
-          </a:solidFill>
-          <a:ln/>
-        </p:spPr>
-      </p:sp>
-      <p:sp>
-        <p:nvSpPr>
-          <p:cNvPr id="11" name="Text 9"/>
-          <p:cNvSpPr/>
-          <p:nvPr/>
-        </p:nvSpPr>
-        <p:spPr>
-          <a:xfrm>
-            <a:off x="2089861" y="3858768"/>
-            <a:ext cx="585216" cy="585216"/>
-          </a:xfrm>
-          <a:prstGeom prst="rect">
-            <a:avLst/>
-          </a:prstGeom>
-          <a:noFill/>
-          <a:ln/>
-        </p:spPr>
-        <p:txBody>
-          <a:bodyPr wrap="square" lIns="0" tIns="0" rIns="0" bIns="0" rtlCol="0" anchor="ctr"/>
-          <a:lstStyle/>
-          <a:p>
-            <a:pPr algn="ctr" indent="0" marL="0">
-              <a:buNone/>
-            </a:pPr>
-            <a:r>
-              <a:rPr lang="en-US" sz="2400" dirty="0">
-                <a:solidFill>
-                  <a:srgbClr val="000000"/>
-                </a:solidFill>
-              </a:rPr>
-              <a:t>🎯</a:t>
-            </a:r>
-            <a:endParaRPr lang="en-US" sz="2400" dirty="0"/>
-          </a:p>
-        </p:txBody>
-      </p:sp>
-      <p:sp>
-        <p:nvSpPr>
-          <p:cNvPr id="12" name="Text 10"/>
-          <p:cNvSpPr/>
-          <p:nvPr/>
-        </p:nvSpPr>
-        <p:spPr>
-          <a:xfrm>
-            <a:off x="777240" y="4526280"/>
-            <a:ext cx="3210458" cy="457200"/>
-          </a:xfrm>
-          <a:prstGeom prst="rect">
-            <a:avLst/>
-          </a:prstGeom>
-          <a:noFill/>
-          <a:ln/>
-        </p:spPr>
-        <p:txBody>
-          <a:bodyPr wrap="square" lIns="0" tIns="0" rIns="0" bIns="0" rtlCol="0" anchor="ctr"/>
-          <a:lstStyle/>
-          <a:p>
-            <a:pPr algn="ctr" indent="0" marL="0">
+      <p:pic>
+        <p:nvPicPr>
+          <p:cNvPr id="6" name="Image 0" descr="/home/user/dekitanokakera-LM/workshop/images/gift-qr.png">    </p:cNvPr>
+          <p:cNvPicPr>
+            <a:picLocks noChangeAspect="1"/>
+          </p:cNvPicPr>
+          <p:nvPr/>
+        </p:nvPicPr>
+        <p:blipFill>
+          <a:blip r:embed="rId1"/>
+          <a:stretch>
+            <a:fillRect/>
+          </a:stretch>
+        </p:blipFill>
+        <p:spPr>
+          <a:xfrm>
+            <a:off x="640080" y="2331720"/>
+            <a:ext cx="2926080" cy="2926080"/>
+          </a:xfrm>
+          <a:prstGeom prst="rect">
+            <a:avLst/>
+          </a:prstGeom>
+        </p:spPr>
+      </p:pic>
+      <p:sp>
+        <p:nvSpPr>
+          <p:cNvPr id="7" name="Text 4"/>
+          <p:cNvSpPr/>
+          <p:nvPr/>
+        </p:nvSpPr>
+        <p:spPr>
+          <a:xfrm>
+            <a:off x="4114800" y="2331720"/>
+            <a:ext cx="7436815" cy="1554480"/>
+          </a:xfrm>
+          <a:prstGeom prst="rect">
+            <a:avLst/>
+          </a:prstGeom>
+          <a:noFill/>
+          <a:ln/>
+        </p:spPr>
+        <p:txBody>
+          <a:bodyPr wrap="square" lIns="0" tIns="0" rIns="0" bIns="0" rtlCol="0" anchor="t"/>
+          <a:lstStyle/>
+          <a:p>
+            <a:pPr indent="0" marL="0">
               <a:lnSpc>
-                <a:spcPts val="1600"/>
+                <a:spcPts val="2800"/>
               </a:lnSpc>
               <a:buNone/>
             </a:pPr>
             <a:r>
-              <a:rPr lang="en-US" sz="1350" dirty="0">
+              <a:rPr lang="en-US" sz="1900" b="1" dirty="0">
                 <a:solidFill>
                   <a:srgbClr val="4A3B30"/>
                 </a:solidFill>
@@ -26003,19 +25940,19 @@
                 <a:ea typeface="Meiryo" pitchFamily="34" charset="-122"/>
                 <a:cs typeface="Meiryo" pitchFamily="34" charset="-120"/>
               </a:rPr>
-              <a:t>自分に合った目標の</a:t>
-            </a:r>
-            <a:endParaRPr lang="en-US" sz="1350" dirty="0"/>
-          </a:p>
-          <a:p>
-            <a:pPr algn="ctr" indent="0" marL="0">
+              <a:t>今日のワークで使った「4つの問い」と、</a:t>
+            </a:r>
+            <a:endParaRPr lang="en-US" sz="1900" dirty="0"/>
+          </a:p>
+          <a:p>
+            <a:pPr indent="0" marL="0">
               <a:lnSpc>
-                <a:spcPts val="1600"/>
+                <a:spcPts val="2800"/>
               </a:lnSpc>
               <a:buNone/>
             </a:pPr>
             <a:r>
-              <a:rPr lang="en-US" sz="1350" dirty="0">
+              <a:rPr lang="en-US" sz="1900" b="1" dirty="0">
                 <a:solidFill>
                   <a:srgbClr val="4A3B30"/>
                 </a:solidFill>
@@ -26023,124 +25960,19 @@
                 <a:ea typeface="Meiryo" pitchFamily="34" charset="-122"/>
                 <a:cs typeface="Meiryo" pitchFamily="34" charset="-120"/>
               </a:rPr>
-              <a:t>立て方を相談したい</a:t>
-            </a:r>
-            <a:endParaRPr lang="en-US" sz="1350" dirty="0"/>
-          </a:p>
-        </p:txBody>
-      </p:sp>
-      <p:sp>
-        <p:nvSpPr>
-          <p:cNvPr id="13" name="Shape 11"/>
-          <p:cNvSpPr/>
-          <p:nvPr/>
-        </p:nvSpPr>
-        <p:spPr>
-          <a:xfrm>
-            <a:off x="4353458" y="3657600"/>
-            <a:ext cx="3484778" cy="1417320"/>
-          </a:xfrm>
-          <a:prstGeom prst="roundRect">
-            <a:avLst>
-              <a:gd name="adj" fmla="val 7742"/>
-            </a:avLst>
-          </a:prstGeom>
-          <a:solidFill>
-            <a:srgbClr val="FFFDFA"/>
-          </a:solidFill>
-          <a:ln w="12700">
-            <a:solidFill>
-              <a:srgbClr val="EFE2D3"/>
-            </a:solidFill>
-            <a:prstDash val="solid"/>
-          </a:ln>
-        </p:spPr>
-      </p:sp>
-      <p:sp>
-        <p:nvSpPr>
-          <p:cNvPr id="14" name="Shape 12"/>
-          <p:cNvSpPr/>
-          <p:nvPr/>
-        </p:nvSpPr>
-        <p:spPr>
-          <a:xfrm>
-            <a:off x="5803240" y="3858768"/>
-            <a:ext cx="585216" cy="585216"/>
-          </a:xfrm>
-          <a:prstGeom prst="ellipse">
-            <a:avLst/>
-          </a:prstGeom>
-          <a:solidFill>
-            <a:srgbClr val="FDEEE7"/>
-          </a:solidFill>
-          <a:ln/>
-        </p:spPr>
-      </p:sp>
-      <p:sp>
-        <p:nvSpPr>
-          <p:cNvPr id="15" name="Text 13"/>
-          <p:cNvSpPr/>
-          <p:nvPr/>
-        </p:nvSpPr>
-        <p:spPr>
-          <a:xfrm>
-            <a:off x="5803240" y="3858768"/>
-            <a:ext cx="585216" cy="585216"/>
-          </a:xfrm>
-          <a:prstGeom prst="rect">
-            <a:avLst/>
-          </a:prstGeom>
-          <a:noFill/>
-          <a:ln/>
-        </p:spPr>
-        <p:txBody>
-          <a:bodyPr wrap="square" lIns="0" tIns="0" rIns="0" bIns="0" rtlCol="0" anchor="ctr"/>
-          <a:lstStyle/>
-          <a:p>
-            <a:pPr algn="ctr" indent="0" marL="0">
-              <a:buNone/>
-            </a:pPr>
-            <a:r>
-              <a:rPr lang="en-US" sz="2400" dirty="0">
-                <a:solidFill>
-                  <a:srgbClr val="000000"/>
-                </a:solidFill>
-              </a:rPr>
-              <a:t>🧭</a:t>
-            </a:r>
-            <a:endParaRPr lang="en-US" sz="2400" dirty="0"/>
-          </a:p>
-        </p:txBody>
-      </p:sp>
-      <p:sp>
-        <p:nvSpPr>
-          <p:cNvPr id="16" name="Text 14"/>
-          <p:cNvSpPr/>
-          <p:nvPr/>
-        </p:nvSpPr>
-        <p:spPr>
-          <a:xfrm>
-            <a:off x="4490618" y="4526280"/>
-            <a:ext cx="3210458" cy="457200"/>
-          </a:xfrm>
-          <a:prstGeom prst="rect">
-            <a:avLst/>
-          </a:prstGeom>
-          <a:noFill/>
-          <a:ln/>
-        </p:spPr>
-        <p:txBody>
-          <a:bodyPr wrap="square" lIns="0" tIns="0" rIns="0" bIns="0" rtlCol="0" anchor="ctr"/>
-          <a:lstStyle/>
-          <a:p>
-            <a:pPr algn="ctr" indent="0" marL="0">
+              <a:t>「できた」を結果につなげる7STEPを、</a:t>
+            </a:r>
+            <a:endParaRPr lang="en-US" sz="1900" dirty="0"/>
+          </a:p>
+          <a:p>
+            <a:pPr indent="0" marL="0">
               <a:lnSpc>
-                <a:spcPts val="1600"/>
+                <a:spcPts val="2800"/>
               </a:lnSpc>
               <a:buNone/>
             </a:pPr>
             <a:r>
-              <a:rPr lang="en-US" sz="1350" dirty="0">
+              <a:rPr lang="en-US" sz="1900" b="1" dirty="0">
                 <a:solidFill>
                   <a:srgbClr val="4A3B30"/>
                 </a:solidFill>
@@ -26148,186 +25980,60 @@
                 <a:ea typeface="Meiryo" pitchFamily="34" charset="-122"/>
                 <a:cs typeface="Meiryo" pitchFamily="34" charset="-120"/>
               </a:rPr>
-              <a:t>今、何から始めれば</a:t>
-            </a:r>
-            <a:endParaRPr lang="en-US" sz="1350" dirty="0"/>
-          </a:p>
-          <a:p>
-            <a:pPr algn="ctr" indent="0" marL="0">
-              <a:lnSpc>
-                <a:spcPts val="1600"/>
-              </a:lnSpc>
-              <a:buNone/>
-            </a:pPr>
-            <a:r>
-              <a:rPr lang="en-US" sz="1350" dirty="0">
-                <a:solidFill>
-                  <a:srgbClr val="4A3B30"/>
-                </a:solidFill>
-                <a:latin typeface="Meiryo" pitchFamily="34" charset="0"/>
-                <a:ea typeface="Meiryo" pitchFamily="34" charset="-122"/>
-                <a:cs typeface="Meiryo" pitchFamily="34" charset="-120"/>
-              </a:rPr>
-              <a:t>いいか分からない</a:t>
-            </a:r>
-            <a:endParaRPr lang="en-US" sz="1350" dirty="0"/>
-          </a:p>
-        </p:txBody>
-      </p:sp>
-      <p:sp>
-        <p:nvSpPr>
-          <p:cNvPr id="17" name="Shape 15"/>
-          <p:cNvSpPr/>
-          <p:nvPr/>
-        </p:nvSpPr>
-        <p:spPr>
-          <a:xfrm>
-            <a:off x="8066837" y="3657600"/>
-            <a:ext cx="3484778" cy="1417320"/>
-          </a:xfrm>
-          <a:prstGeom prst="roundRect">
-            <a:avLst>
-              <a:gd name="adj" fmla="val 7742"/>
-            </a:avLst>
-          </a:prstGeom>
-          <a:solidFill>
-            <a:srgbClr val="FFFDFA"/>
-          </a:solidFill>
-          <a:ln w="12700">
-            <a:solidFill>
-              <a:srgbClr val="EFE2D3"/>
-            </a:solidFill>
-            <a:prstDash val="solid"/>
-          </a:ln>
-        </p:spPr>
-      </p:sp>
-      <p:sp>
-        <p:nvSpPr>
-          <p:cNvPr id="18" name="Shape 16"/>
-          <p:cNvSpPr/>
-          <p:nvPr/>
-        </p:nvSpPr>
-        <p:spPr>
-          <a:xfrm>
-            <a:off x="9516618" y="3858768"/>
-            <a:ext cx="585216" cy="585216"/>
-          </a:xfrm>
-          <a:prstGeom prst="ellipse">
-            <a:avLst/>
-          </a:prstGeom>
-          <a:solidFill>
-            <a:srgbClr val="FDEEE7"/>
-          </a:solidFill>
-          <a:ln/>
-        </p:spPr>
-      </p:sp>
-      <p:sp>
-        <p:nvSpPr>
-          <p:cNvPr id="19" name="Text 17"/>
-          <p:cNvSpPr/>
-          <p:nvPr/>
-        </p:nvSpPr>
-        <p:spPr>
-          <a:xfrm>
-            <a:off x="9516618" y="3858768"/>
-            <a:ext cx="585216" cy="585216"/>
-          </a:xfrm>
-          <a:prstGeom prst="rect">
-            <a:avLst/>
-          </a:prstGeom>
-          <a:noFill/>
-          <a:ln/>
-        </p:spPr>
-        <p:txBody>
-          <a:bodyPr wrap="square" lIns="0" tIns="0" rIns="0" bIns="0" rtlCol="0" anchor="ctr"/>
-          <a:lstStyle/>
-          <a:p>
-            <a:pPr algn="ctr" indent="0" marL="0">
-              <a:buNone/>
-            </a:pPr>
-            <a:r>
-              <a:rPr lang="en-US" sz="2400" dirty="0">
-                <a:solidFill>
-                  <a:srgbClr val="000000"/>
-                </a:solidFill>
-              </a:rPr>
-              <a:t>🔄</a:t>
-            </a:r>
-            <a:endParaRPr lang="en-US" sz="2400" dirty="0"/>
-          </a:p>
-        </p:txBody>
-      </p:sp>
-      <p:sp>
-        <p:nvSpPr>
-          <p:cNvPr id="20" name="Text 18"/>
-          <p:cNvSpPr/>
-          <p:nvPr/>
-        </p:nvSpPr>
-        <p:spPr>
-          <a:xfrm>
-            <a:off x="8203997" y="4526280"/>
-            <a:ext cx="3210458" cy="457200"/>
-          </a:xfrm>
-          <a:prstGeom prst="rect">
-            <a:avLst/>
-          </a:prstGeom>
-          <a:noFill/>
-          <a:ln/>
-        </p:spPr>
-        <p:txBody>
-          <a:bodyPr wrap="square" lIns="0" tIns="0" rIns="0" bIns="0" rtlCol="0" anchor="ctr"/>
-          <a:lstStyle/>
-          <a:p>
-            <a:pPr algn="ctr" indent="0" marL="0">
-              <a:lnSpc>
-                <a:spcPts val="1600"/>
-              </a:lnSpc>
-              <a:buNone/>
-            </a:pPr>
-            <a:r>
-              <a:rPr lang="en-US" sz="1350" dirty="0">
-                <a:solidFill>
-                  <a:srgbClr val="4A3B30"/>
-                </a:solidFill>
-                <a:latin typeface="Meiryo" pitchFamily="34" charset="0"/>
-                <a:ea typeface="Meiryo" pitchFamily="34" charset="-122"/>
-                <a:cs typeface="Meiryo" pitchFamily="34" charset="-120"/>
-              </a:rPr>
-              <a:t>続かなかった過去を</a:t>
-            </a:r>
-            <a:endParaRPr lang="en-US" sz="1350" dirty="0"/>
-          </a:p>
-          <a:p>
-            <a:pPr algn="ctr" indent="0" marL="0">
-              <a:lnSpc>
-                <a:spcPts val="1600"/>
-              </a:lnSpc>
-              <a:buNone/>
-            </a:pPr>
-            <a:r>
-              <a:rPr lang="en-US" sz="1350" dirty="0">
-                <a:solidFill>
-                  <a:srgbClr val="4A3B30"/>
-                </a:solidFill>
-                <a:latin typeface="Meiryo" pitchFamily="34" charset="0"/>
-                <a:ea typeface="Meiryo" pitchFamily="34" charset="-122"/>
-                <a:cs typeface="Meiryo" pitchFamily="34" charset="-120"/>
-              </a:rPr>
-              <a:t>どう活かせばいいか</a:t>
-            </a:r>
-            <a:endParaRPr lang="en-US" sz="1350" dirty="0"/>
-          </a:p>
-        </p:txBody>
-      </p:sp>
-      <p:sp>
-        <p:nvSpPr>
-          <p:cNvPr id="21" name="Shape 19"/>
-          <p:cNvSpPr/>
-          <p:nvPr/>
-        </p:nvSpPr>
-        <p:spPr>
-          <a:xfrm>
-            <a:off x="640080" y="5349240"/>
+              <a:t>1枚（2ページ）のPDFにまとめました。</a:t>
+            </a:r>
+            <a:endParaRPr lang="en-US" sz="1900" dirty="0"/>
+          </a:p>
+        </p:txBody>
+      </p:sp>
+      <p:sp>
+        <p:nvSpPr>
+          <p:cNvPr id="8" name="Text 5"/>
+          <p:cNvSpPr/>
+          <p:nvPr/>
+        </p:nvSpPr>
+        <p:spPr>
+          <a:xfrm>
+            <a:off x="4114800" y="3977640"/>
+            <a:ext cx="7436815" cy="457200"/>
+          </a:xfrm>
+          <a:prstGeom prst="rect">
+            <a:avLst/>
+          </a:prstGeom>
+          <a:noFill/>
+          <a:ln/>
+        </p:spPr>
+        <p:txBody>
+          <a:bodyPr wrap="square" lIns="0" tIns="0" rIns="0" bIns="0" rtlCol="0" anchor="t"/>
+          <a:lstStyle/>
+          <a:p>
+            <a:pPr indent="0" marL="0">
+              <a:buNone/>
+            </a:pPr>
+            <a:r>
+              <a:rPr lang="en-US" sz="1600" dirty="0">
+                <a:solidFill>
+                  <a:srgbClr val="8A7A6C"/>
+                </a:solidFill>
+                <a:latin typeface="Meiryo" pitchFamily="34" charset="0"/>
+                <a:ea typeface="Meiryo" pitchFamily="34" charset="-122"/>
+                <a:cs typeface="Meiryo" pitchFamily="34" charset="-120"/>
+              </a:rPr>
+              <a:t>QRコードを読み取って、お受け取りください。</a:t>
+            </a:r>
+            <a:endParaRPr lang="en-US" sz="1600" dirty="0"/>
+          </a:p>
+        </p:txBody>
+      </p:sp>
+      <p:sp>
+        <p:nvSpPr>
+          <p:cNvPr id="9" name="Shape 6"/>
+          <p:cNvSpPr/>
+          <p:nvPr/>
+        </p:nvSpPr>
+        <p:spPr>
+          <a:xfrm>
+            <a:off x="640080" y="5742432"/>
             <a:ext cx="10911535" cy="658368"/>
           </a:xfrm>
           <a:prstGeom prst="roundRect">
@@ -26343,13 +26049,13 @@
       </p:sp>
       <p:sp>
         <p:nvSpPr>
-          <p:cNvPr id="22" name="Text 20"/>
-          <p:cNvSpPr/>
-          <p:nvPr/>
-        </p:nvSpPr>
-        <p:spPr>
-          <a:xfrm>
-            <a:off x="960120" y="5349240"/>
+          <p:cNvPr id="10" name="Text 7"/>
+          <p:cNvSpPr/>
+          <p:nvPr/>
+        </p:nvSpPr>
+        <p:spPr>
+          <a:xfrm>
+            <a:off x="960120" y="5742432"/>
             <a:ext cx="10271455" cy="658368"/>
           </a:xfrm>
           <a:prstGeom prst="rect">
@@ -26377,7 +26083,7 @@
                 <a:ea typeface="Meiryo" pitchFamily="34" charset="-122"/>
                 <a:cs typeface="Meiryo" pitchFamily="34" charset="-120"/>
               </a:rPr>
-              <a:t>予約方法は、ワークショップ当日にご案内します。</a:t>
+              <a:t>今日の「できた」を、明日のあなたにも思い出させてあげてください。</a:t>
             </a:r>
             <a:endParaRPr lang="en-US" sz="1850" dirty="0"/>
           </a:p>
@@ -26385,7 +26091,7 @@
       </p:sp>
       <p:sp>
         <p:nvSpPr>
-          <p:cNvPr id="23" name="Text 21"/>
+          <p:cNvPr id="11" name="Text 8"/>
           <p:cNvSpPr/>
           <p:nvPr/>
         </p:nvSpPr>
@@ -26424,7 +26130,7 @@
       </p:sp>
       <p:sp>
         <p:nvSpPr>
-          <p:cNvPr id="24" name="Text 22"/>
+          <p:cNvPr id="12" name="Text 9"/>
           <p:cNvSpPr/>
           <p:nvPr/>
         </p:nvSpPr>
@@ -26455,7 +26161,7 @@
                 <a:ea typeface="Meiryo" pitchFamily="34" charset="-122"/>
                 <a:cs typeface="Meiryo" pitchFamily="34" charset="-120"/>
               </a:rPr>
-              <a:t>41 / 43</a:t>
+              <a:t>41 / 44</a:t>
             </a:r>
             <a:endParaRPr lang="en-US" sz="1150" dirty="0"/>
           </a:p>
@@ -26500,9 +26206,9 @@
           <p:nvPr/>
         </p:nvSpPr>
         <p:spPr>
-          <a:xfrm rot="900000">
-            <a:off x="11109960" y="-685800"/>
-            <a:ext cx="1828800" cy="1828800"/>
+          <a:xfrm rot="720000">
+            <a:off x="-868680" y="5623560"/>
+            <a:ext cx="1737360" cy="1737360"/>
           </a:xfrm>
           <a:prstGeom prst="hexagon">
             <a:avLst/>
@@ -26517,29 +26223,7 @@
       </p:sp>
       <p:sp>
         <p:nvSpPr>
-          <p:cNvPr id="3" name="Shape 1"/>
-          <p:cNvSpPr/>
-          <p:nvPr/>
-        </p:nvSpPr>
-        <p:spPr>
-          <a:xfrm rot="720000">
-            <a:off x="-868680" y="5623560"/>
-            <a:ext cx="1737360" cy="1737360"/>
-          </a:xfrm>
-          <a:prstGeom prst="hexagon">
-            <a:avLst/>
-          </a:prstGeom>
-          <a:solidFill>
-            <a:srgbClr val="2F9188">
-              <a:alpha val="13000"/>
-            </a:srgbClr>
-          </a:solidFill>
-          <a:ln/>
-        </p:spPr>
-      </p:sp>
-      <p:sp>
-        <p:nvSpPr>
-          <p:cNvPr id="4" name="Text 2"/>
+          <p:cNvPr id="3" name="Text 1"/>
           <p:cNvSpPr/>
           <p:nvPr/>
         </p:nvSpPr>
@@ -26570,7 +26254,7 @@
                 <a:ea typeface="Meiryo" pitchFamily="34" charset="-122"/>
                 <a:cs typeface="Meiryo" pitchFamily="34" charset="-120"/>
               </a:rPr>
-              <a:t>最後に</a:t>
+              <a:t>参加者限定特典</a:t>
             </a:r>
             <a:endParaRPr lang="en-US" sz="1500" dirty="0"/>
           </a:p>
@@ -26578,14 +26262,279 @@
       </p:sp>
       <p:sp>
         <p:nvSpPr>
-          <p:cNvPr id="5" name="Text 3"/>
-          <p:cNvSpPr/>
-          <p:nvPr/>
-        </p:nvSpPr>
-        <p:spPr>
-          <a:xfrm>
-            <a:off x="1097280" y="1463040"/>
-            <a:ext cx="9997135" cy="4754880"/>
+          <p:cNvPr id="4" name="Text 2"/>
+          <p:cNvSpPr/>
+          <p:nvPr/>
+        </p:nvSpPr>
+        <p:spPr>
+          <a:xfrm>
+            <a:off x="640080" y="804672"/>
+            <a:ext cx="10911535" cy="914400"/>
+          </a:xfrm>
+          <a:prstGeom prst="rect">
+            <a:avLst/>
+          </a:prstGeom>
+          <a:noFill/>
+          <a:ln/>
+        </p:spPr>
+        <p:txBody>
+          <a:bodyPr wrap="square" lIns="0" tIns="0" rIns="0" bIns="0" rtlCol="0" anchor="ctr"/>
+          <a:lstStyle/>
+          <a:p>
+            <a:pPr algn="l" indent="0" marL="0">
+              <a:lnSpc>
+                <a:spcPts val="3400"/>
+              </a:lnSpc>
+              <a:buNone/>
+            </a:pPr>
+            <a:r>
+              <a:rPr lang="en-US" sz="3200" b="1" dirty="0">
+                <a:solidFill>
+                  <a:srgbClr val="4A3B30"/>
+                </a:solidFill>
+                <a:latin typeface="Meiryo" pitchFamily="34" charset="0"/>
+                <a:ea typeface="Meiryo" pitchFamily="34" charset="-122"/>
+                <a:cs typeface="Meiryo" pitchFamily="34" charset="-120"/>
+              </a:rPr>
+              <a:t>講師との15分間、個別ミニ相談</a:t>
+            </a:r>
+            <a:endParaRPr lang="en-US" sz="3200" dirty="0"/>
+          </a:p>
+        </p:txBody>
+      </p:sp>
+      <p:sp>
+        <p:nvSpPr>
+          <p:cNvPr id="5" name="Shape 3"/>
+          <p:cNvSpPr/>
+          <p:nvPr/>
+        </p:nvSpPr>
+        <p:spPr>
+          <a:xfrm>
+            <a:off x="640080" y="1874520"/>
+            <a:ext cx="10911535" cy="1417320"/>
+          </a:xfrm>
+          <a:prstGeom prst="roundRect">
+            <a:avLst>
+              <a:gd name="adj" fmla="val 7742"/>
+            </a:avLst>
+          </a:prstGeom>
+          <a:solidFill>
+            <a:srgbClr val="FDEEE7"/>
+          </a:solidFill>
+          <a:ln/>
+        </p:spPr>
+      </p:sp>
+      <p:sp>
+        <p:nvSpPr>
+          <p:cNvPr id="6" name="Shape 4"/>
+          <p:cNvSpPr/>
+          <p:nvPr/>
+        </p:nvSpPr>
+        <p:spPr>
+          <a:xfrm>
+            <a:off x="1051560" y="2148840"/>
+            <a:ext cx="868680" cy="868680"/>
+          </a:xfrm>
+          <a:prstGeom prst="ellipse">
+            <a:avLst/>
+          </a:prstGeom>
+          <a:solidFill>
+            <a:srgbClr val="FFFFFF"/>
+          </a:solidFill>
+          <a:ln/>
+        </p:spPr>
+      </p:sp>
+      <p:sp>
+        <p:nvSpPr>
+          <p:cNvPr id="7" name="Text 5"/>
+          <p:cNvSpPr/>
+          <p:nvPr/>
+        </p:nvSpPr>
+        <p:spPr>
+          <a:xfrm>
+            <a:off x="1051560" y="2148840"/>
+            <a:ext cx="868680" cy="868680"/>
+          </a:xfrm>
+          <a:prstGeom prst="rect">
+            <a:avLst/>
+          </a:prstGeom>
+          <a:noFill/>
+          <a:ln/>
+        </p:spPr>
+        <p:txBody>
+          <a:bodyPr wrap="square" lIns="0" tIns="0" rIns="0" bIns="0" rtlCol="0" anchor="ctr"/>
+          <a:lstStyle/>
+          <a:p>
+            <a:pPr algn="ctr" indent="0" marL="0">
+              <a:buNone/>
+            </a:pPr>
+            <a:r>
+              <a:rPr lang="en-US" sz="4000" dirty="0">
+                <a:solidFill>
+                  <a:srgbClr val="000000"/>
+                </a:solidFill>
+              </a:rPr>
+              <a:t>💬</a:t>
+            </a:r>
+            <a:endParaRPr lang="en-US" sz="4000" dirty="0"/>
+          </a:p>
+        </p:txBody>
+      </p:sp>
+      <p:sp>
+        <p:nvSpPr>
+          <p:cNvPr id="8" name="Text 6"/>
+          <p:cNvSpPr/>
+          <p:nvPr/>
+        </p:nvSpPr>
+        <p:spPr>
+          <a:xfrm>
+            <a:off x="2194560" y="1874520"/>
+            <a:ext cx="8991295" cy="1417320"/>
+          </a:xfrm>
+          <a:prstGeom prst="rect">
+            <a:avLst/>
+          </a:prstGeom>
+          <a:noFill/>
+          <a:ln/>
+        </p:spPr>
+        <p:txBody>
+          <a:bodyPr wrap="square" lIns="0" tIns="0" rIns="0" bIns="0" rtlCol="0" anchor="ctr"/>
+          <a:lstStyle/>
+          <a:p>
+            <a:pPr indent="0" marL="0">
+              <a:lnSpc>
+                <a:spcPts val="2700"/>
+              </a:lnSpc>
+              <a:buNone/>
+            </a:pPr>
+            <a:r>
+              <a:rPr lang="en-US" sz="1900" b="1" dirty="0">
+                <a:solidFill>
+                  <a:srgbClr val="4A3B30"/>
+                </a:solidFill>
+                <a:latin typeface="Meiryo" pitchFamily="34" charset="0"/>
+                <a:ea typeface="Meiryo" pitchFamily="34" charset="-122"/>
+                <a:cs typeface="Meiryo" pitchFamily="34" charset="-120"/>
+              </a:rPr>
+              <a:t>参加者限定で、講師と1対1で話せる15分間。</a:t>
+            </a:r>
+            <a:endParaRPr lang="en-US" sz="1900" dirty="0"/>
+          </a:p>
+          <a:p>
+            <a:pPr indent="0" marL="0">
+              <a:lnSpc>
+                <a:spcPts val="2700"/>
+              </a:lnSpc>
+              <a:buNone/>
+            </a:pPr>
+            <a:r>
+              <a:rPr lang="en-US" sz="1900" b="1" dirty="0">
+                <a:solidFill>
+                  <a:srgbClr val="4A3B30"/>
+                </a:solidFill>
+                <a:latin typeface="Meiryo" pitchFamily="34" charset="0"/>
+                <a:ea typeface="Meiryo" pitchFamily="34" charset="-122"/>
+                <a:cs typeface="Meiryo" pitchFamily="34" charset="-120"/>
+              </a:rPr>
+              <a:t>あなたの「今」に合わせて、一緒に考えます。</a:t>
+            </a:r>
+            <a:endParaRPr lang="en-US" sz="1900" dirty="0"/>
+          </a:p>
+        </p:txBody>
+      </p:sp>
+      <p:sp>
+        <p:nvSpPr>
+          <p:cNvPr id="9" name="Shape 7"/>
+          <p:cNvSpPr/>
+          <p:nvPr/>
+        </p:nvSpPr>
+        <p:spPr>
+          <a:xfrm>
+            <a:off x="640080" y="3657600"/>
+            <a:ext cx="3484778" cy="1417320"/>
+          </a:xfrm>
+          <a:prstGeom prst="roundRect">
+            <a:avLst>
+              <a:gd name="adj" fmla="val 7742"/>
+            </a:avLst>
+          </a:prstGeom>
+          <a:solidFill>
+            <a:srgbClr val="FFFDFA"/>
+          </a:solidFill>
+          <a:ln w="12700">
+            <a:solidFill>
+              <a:srgbClr val="EFE2D3"/>
+            </a:solidFill>
+            <a:prstDash val="solid"/>
+          </a:ln>
+        </p:spPr>
+      </p:sp>
+      <p:sp>
+        <p:nvSpPr>
+          <p:cNvPr id="10" name="Shape 8"/>
+          <p:cNvSpPr/>
+          <p:nvPr/>
+        </p:nvSpPr>
+        <p:spPr>
+          <a:xfrm>
+            <a:off x="2089861" y="3858768"/>
+            <a:ext cx="585216" cy="585216"/>
+          </a:xfrm>
+          <a:prstGeom prst="ellipse">
+            <a:avLst/>
+          </a:prstGeom>
+          <a:solidFill>
+            <a:srgbClr val="FDEEE7"/>
+          </a:solidFill>
+          <a:ln/>
+        </p:spPr>
+      </p:sp>
+      <p:sp>
+        <p:nvSpPr>
+          <p:cNvPr id="11" name="Text 9"/>
+          <p:cNvSpPr/>
+          <p:nvPr/>
+        </p:nvSpPr>
+        <p:spPr>
+          <a:xfrm>
+            <a:off x="2089861" y="3858768"/>
+            <a:ext cx="585216" cy="585216"/>
+          </a:xfrm>
+          <a:prstGeom prst="rect">
+            <a:avLst/>
+          </a:prstGeom>
+          <a:noFill/>
+          <a:ln/>
+        </p:spPr>
+        <p:txBody>
+          <a:bodyPr wrap="square" lIns="0" tIns="0" rIns="0" bIns="0" rtlCol="0" anchor="ctr"/>
+          <a:lstStyle/>
+          <a:p>
+            <a:pPr algn="ctr" indent="0" marL="0">
+              <a:buNone/>
+            </a:pPr>
+            <a:r>
+              <a:rPr lang="en-US" sz="2400" dirty="0">
+                <a:solidFill>
+                  <a:srgbClr val="000000"/>
+                </a:solidFill>
+              </a:rPr>
+              <a:t>🎯</a:t>
+            </a:r>
+            <a:endParaRPr lang="en-US" sz="2400" dirty="0"/>
+          </a:p>
+        </p:txBody>
+      </p:sp>
+      <p:sp>
+        <p:nvSpPr>
+          <p:cNvPr id="12" name="Text 10"/>
+          <p:cNvSpPr/>
+          <p:nvPr/>
+        </p:nvSpPr>
+        <p:spPr>
+          <a:xfrm>
+            <a:off x="777240" y="4526280"/>
+            <a:ext cx="3210458" cy="457200"/>
           </a:xfrm>
           <a:prstGeom prst="rect">
             <a:avLst/>
@@ -26599,128 +26548,402 @@
           <a:p>
             <a:pPr algn="ctr" indent="0" marL="0">
               <a:lnSpc>
-                <a:spcPts val="3000"/>
+                <a:spcPts val="1600"/>
               </a:lnSpc>
-              <a:spcAft>
-                <a:spcPts val="1600"/>
-              </a:spcAft>
-              <a:buNone/>
-            </a:pPr>
-            <a:r>
-              <a:rPr lang="en-US" sz="2050" dirty="0">
+              <a:buNone/>
+            </a:pPr>
+            <a:r>
+              <a:rPr lang="en-US" sz="1350" dirty="0">
                 <a:solidFill>
                   <a:srgbClr val="4A3B30"/>
                 </a:solidFill>
-              </a:rPr>
-              <a:t>この90日間、一度も止まらなくていい。完璧じゃなくていい。</a:t>
-            </a:r>
-            <a:endParaRPr lang="en-US" sz="2050" dirty="0"/>
+                <a:latin typeface="Meiryo" pitchFamily="34" charset="0"/>
+                <a:ea typeface="Meiryo" pitchFamily="34" charset="-122"/>
+                <a:cs typeface="Meiryo" pitchFamily="34" charset="-120"/>
+              </a:rPr>
+              <a:t>自分に合った目標の</a:t>
+            </a:r>
+            <a:endParaRPr lang="en-US" sz="1350" dirty="0"/>
           </a:p>
           <a:p>
             <a:pPr algn="ctr" indent="0" marL="0">
               <a:lnSpc>
-                <a:spcPts val="3000"/>
+                <a:spcPts val="1600"/>
               </a:lnSpc>
-              <a:spcAft>
-                <a:spcPts val="1600"/>
-              </a:spcAft>
-              <a:buNone/>
-            </a:pPr>
-            <a:r>
-              <a:rPr lang="en-US" sz="2050" dirty="0">
+              <a:buNone/>
+            </a:pPr>
+            <a:r>
+              <a:rPr lang="en-US" sz="1350" dirty="0">
                 <a:solidFill>
                   <a:srgbClr val="4A3B30"/>
                 </a:solidFill>
-              </a:rPr>
-              <a:t>できない日があっていい。迷っていい。誰かに頼っていい。</a:t>
-            </a:r>
-            <a:endParaRPr lang="en-US" sz="2050" dirty="0"/>
-          </a:p>
+                <a:latin typeface="Meiryo" pitchFamily="34" charset="0"/>
+                <a:ea typeface="Meiryo" pitchFamily="34" charset="-122"/>
+                <a:cs typeface="Meiryo" pitchFamily="34" charset="-120"/>
+              </a:rPr>
+              <a:t>立て方を相談したい</a:t>
+            </a:r>
+            <a:endParaRPr lang="en-US" sz="1350" dirty="0"/>
+          </a:p>
+        </p:txBody>
+      </p:sp>
+      <p:sp>
+        <p:nvSpPr>
+          <p:cNvPr id="13" name="Shape 11"/>
+          <p:cNvSpPr/>
+          <p:nvPr/>
+        </p:nvSpPr>
+        <p:spPr>
+          <a:xfrm>
+            <a:off x="4353458" y="3657600"/>
+            <a:ext cx="3484778" cy="1417320"/>
+          </a:xfrm>
+          <a:prstGeom prst="roundRect">
+            <a:avLst>
+              <a:gd name="adj" fmla="val 7742"/>
+            </a:avLst>
+          </a:prstGeom>
+          <a:solidFill>
+            <a:srgbClr val="FFFDFA"/>
+          </a:solidFill>
+          <a:ln w="12700">
+            <a:solidFill>
+              <a:srgbClr val="EFE2D3"/>
+            </a:solidFill>
+            <a:prstDash val="solid"/>
+          </a:ln>
+        </p:spPr>
+      </p:sp>
+      <p:sp>
+        <p:nvSpPr>
+          <p:cNvPr id="14" name="Shape 12"/>
+          <p:cNvSpPr/>
+          <p:nvPr/>
+        </p:nvSpPr>
+        <p:spPr>
+          <a:xfrm>
+            <a:off x="5803240" y="3858768"/>
+            <a:ext cx="585216" cy="585216"/>
+          </a:xfrm>
+          <a:prstGeom prst="ellipse">
+            <a:avLst/>
+          </a:prstGeom>
+          <a:solidFill>
+            <a:srgbClr val="FDEEE7"/>
+          </a:solidFill>
+          <a:ln/>
+        </p:spPr>
+      </p:sp>
+      <p:sp>
+        <p:nvSpPr>
+          <p:cNvPr id="15" name="Text 13"/>
+          <p:cNvSpPr/>
+          <p:nvPr/>
+        </p:nvSpPr>
+        <p:spPr>
+          <a:xfrm>
+            <a:off x="5803240" y="3858768"/>
+            <a:ext cx="585216" cy="585216"/>
+          </a:xfrm>
+          <a:prstGeom prst="rect">
+            <a:avLst/>
+          </a:prstGeom>
+          <a:noFill/>
+          <a:ln/>
+        </p:spPr>
+        <p:txBody>
+          <a:bodyPr wrap="square" lIns="0" tIns="0" rIns="0" bIns="0" rtlCol="0" anchor="ctr"/>
+          <a:lstStyle/>
+          <a:p>
+            <a:pPr algn="ctr" indent="0" marL="0">
+              <a:buNone/>
+            </a:pPr>
+            <a:r>
+              <a:rPr lang="en-US" sz="2400" dirty="0">
+                <a:solidFill>
+                  <a:srgbClr val="000000"/>
+                </a:solidFill>
+              </a:rPr>
+              <a:t>🧭</a:t>
+            </a:r>
+            <a:endParaRPr lang="en-US" sz="2400" dirty="0"/>
+          </a:p>
+        </p:txBody>
+      </p:sp>
+      <p:sp>
+        <p:nvSpPr>
+          <p:cNvPr id="16" name="Text 14"/>
+          <p:cNvSpPr/>
+          <p:nvPr/>
+        </p:nvSpPr>
+        <p:spPr>
+          <a:xfrm>
+            <a:off x="4490618" y="4526280"/>
+            <a:ext cx="3210458" cy="457200"/>
+          </a:xfrm>
+          <a:prstGeom prst="rect">
+            <a:avLst/>
+          </a:prstGeom>
+          <a:noFill/>
+          <a:ln/>
+        </p:spPr>
+        <p:txBody>
+          <a:bodyPr wrap="square" lIns="0" tIns="0" rIns="0" bIns="0" rtlCol="0" anchor="ctr"/>
+          <a:lstStyle/>
           <a:p>
             <a:pPr algn="ctr" indent="0" marL="0">
               <a:lnSpc>
-                <a:spcPts val="3000"/>
+                <a:spcPts val="1600"/>
               </a:lnSpc>
-              <a:spcAft>
-                <a:spcPts val="1600"/>
-              </a:spcAft>
-              <a:buNone/>
-            </a:pPr>
-            <a:r>
-              <a:rPr lang="en-US" sz="1850" dirty="0">
-                <a:solidFill>
-                  <a:srgbClr val="8A7A6C"/>
-                </a:solidFill>
-              </a:rPr>
-              <a:t>ただ、一つだけ。</a:t>
-            </a:r>
-            <a:endParaRPr lang="en-US" sz="2050" dirty="0"/>
+              <a:buNone/>
+            </a:pPr>
+            <a:r>
+              <a:rPr lang="en-US" sz="1350" dirty="0">
+                <a:solidFill>
+                  <a:srgbClr val="4A3B30"/>
+                </a:solidFill>
+                <a:latin typeface="Meiryo" pitchFamily="34" charset="0"/>
+                <a:ea typeface="Meiryo" pitchFamily="34" charset="-122"/>
+                <a:cs typeface="Meiryo" pitchFamily="34" charset="-120"/>
+              </a:rPr>
+              <a:t>今、何から始めれば</a:t>
+            </a:r>
+            <a:endParaRPr lang="en-US" sz="1350" dirty="0"/>
           </a:p>
           <a:p>
             <a:pPr algn="ctr" indent="0" marL="0">
               <a:lnSpc>
-                <a:spcPts val="3000"/>
+                <a:spcPts val="1600"/>
               </a:lnSpc>
-              <a:spcAft>
-                <a:spcPts val="1600"/>
-              </a:spcAft>
-              <a:buNone/>
-            </a:pPr>
-            <a:r>
-              <a:rPr lang="en-US" sz="2550" b="1" dirty="0">
-                <a:solidFill>
-                  <a:srgbClr val="DD6E4E"/>
-                </a:solidFill>
-              </a:rPr>
-              <a:t>止まっても、また戻ってくる。</a:t>
-            </a:r>
-            <a:endParaRPr lang="en-US" sz="2050" dirty="0"/>
-          </a:p>
+              <a:buNone/>
+            </a:pPr>
+            <a:r>
+              <a:rPr lang="en-US" sz="1350" dirty="0">
+                <a:solidFill>
+                  <a:srgbClr val="4A3B30"/>
+                </a:solidFill>
+                <a:latin typeface="Meiryo" pitchFamily="34" charset="0"/>
+                <a:ea typeface="Meiryo" pitchFamily="34" charset="-122"/>
+                <a:cs typeface="Meiryo" pitchFamily="34" charset="-120"/>
+              </a:rPr>
+              <a:t>いいか分からない</a:t>
+            </a:r>
+            <a:endParaRPr lang="en-US" sz="1350" dirty="0"/>
+          </a:p>
+        </p:txBody>
+      </p:sp>
+      <p:sp>
+        <p:nvSpPr>
+          <p:cNvPr id="17" name="Shape 15"/>
+          <p:cNvSpPr/>
+          <p:nvPr/>
+        </p:nvSpPr>
+        <p:spPr>
+          <a:xfrm>
+            <a:off x="8066837" y="3657600"/>
+            <a:ext cx="3484778" cy="1417320"/>
+          </a:xfrm>
+          <a:prstGeom prst="roundRect">
+            <a:avLst>
+              <a:gd name="adj" fmla="val 7742"/>
+            </a:avLst>
+          </a:prstGeom>
+          <a:solidFill>
+            <a:srgbClr val="FFFDFA"/>
+          </a:solidFill>
+          <a:ln w="12700">
+            <a:solidFill>
+              <a:srgbClr val="EFE2D3"/>
+            </a:solidFill>
+            <a:prstDash val="solid"/>
+          </a:ln>
+        </p:spPr>
+      </p:sp>
+      <p:sp>
+        <p:nvSpPr>
+          <p:cNvPr id="18" name="Shape 16"/>
+          <p:cNvSpPr/>
+          <p:nvPr/>
+        </p:nvSpPr>
+        <p:spPr>
+          <a:xfrm>
+            <a:off x="9516618" y="3858768"/>
+            <a:ext cx="585216" cy="585216"/>
+          </a:xfrm>
+          <a:prstGeom prst="ellipse">
+            <a:avLst/>
+          </a:prstGeom>
+          <a:solidFill>
+            <a:srgbClr val="FDEEE7"/>
+          </a:solidFill>
+          <a:ln/>
+        </p:spPr>
+      </p:sp>
+      <p:sp>
+        <p:nvSpPr>
+          <p:cNvPr id="19" name="Text 17"/>
+          <p:cNvSpPr/>
+          <p:nvPr/>
+        </p:nvSpPr>
+        <p:spPr>
+          <a:xfrm>
+            <a:off x="9516618" y="3858768"/>
+            <a:ext cx="585216" cy="585216"/>
+          </a:xfrm>
+          <a:prstGeom prst="rect">
+            <a:avLst/>
+          </a:prstGeom>
+          <a:noFill/>
+          <a:ln/>
+        </p:spPr>
+        <p:txBody>
+          <a:bodyPr wrap="square" lIns="0" tIns="0" rIns="0" bIns="0" rtlCol="0" anchor="ctr"/>
+          <a:lstStyle/>
+          <a:p>
+            <a:pPr algn="ctr" indent="0" marL="0">
+              <a:buNone/>
+            </a:pPr>
+            <a:r>
+              <a:rPr lang="en-US" sz="2400" dirty="0">
+                <a:solidFill>
+                  <a:srgbClr val="000000"/>
+                </a:solidFill>
+              </a:rPr>
+              <a:t>🔄</a:t>
+            </a:r>
+            <a:endParaRPr lang="en-US" sz="2400" dirty="0"/>
+          </a:p>
+        </p:txBody>
+      </p:sp>
+      <p:sp>
+        <p:nvSpPr>
+          <p:cNvPr id="20" name="Text 18"/>
+          <p:cNvSpPr/>
+          <p:nvPr/>
+        </p:nvSpPr>
+        <p:spPr>
+          <a:xfrm>
+            <a:off x="8203997" y="4526280"/>
+            <a:ext cx="3210458" cy="457200"/>
+          </a:xfrm>
+          <a:prstGeom prst="rect">
+            <a:avLst/>
+          </a:prstGeom>
+          <a:noFill/>
+          <a:ln/>
+        </p:spPr>
+        <p:txBody>
+          <a:bodyPr wrap="square" lIns="0" tIns="0" rIns="0" bIns="0" rtlCol="0" anchor="ctr"/>
+          <a:lstStyle/>
           <a:p>
             <a:pPr algn="ctr" indent="0" marL="0">
               <a:lnSpc>
-                <a:spcPts val="3000"/>
+                <a:spcPts val="1600"/>
               </a:lnSpc>
-              <a:spcAft>
-                <a:spcPts val="1600"/>
-              </a:spcAft>
-              <a:buNone/>
-            </a:pPr>
-            <a:r>
-              <a:rPr lang="en-US" sz="1850" dirty="0">
-                <a:solidFill>
-                  <a:srgbClr val="8A7A6C"/>
-                </a:solidFill>
-              </a:rPr>
-              <a:t>そして戻ってきたとき、一緒に言いましょう。</a:t>
-            </a:r>
-            <a:endParaRPr lang="en-US" sz="2050" dirty="0"/>
+              <a:buNone/>
+            </a:pPr>
+            <a:r>
+              <a:rPr lang="en-US" sz="1350" dirty="0">
+                <a:solidFill>
+                  <a:srgbClr val="4A3B30"/>
+                </a:solidFill>
+                <a:latin typeface="Meiryo" pitchFamily="34" charset="0"/>
+                <a:ea typeface="Meiryo" pitchFamily="34" charset="-122"/>
+                <a:cs typeface="Meiryo" pitchFamily="34" charset="-120"/>
+              </a:rPr>
+              <a:t>続かなかった過去を</a:t>
+            </a:r>
+            <a:endParaRPr lang="en-US" sz="1350" dirty="0"/>
           </a:p>
           <a:p>
             <a:pPr algn="ctr" indent="0" marL="0">
               <a:lnSpc>
-                <a:spcPts val="3000"/>
+                <a:spcPts val="1600"/>
               </a:lnSpc>
-              <a:spcAft>
-                <a:spcPts val="1600"/>
-              </a:spcAft>
-              <a:buNone/>
-            </a:pPr>
-            <a:r>
-              <a:rPr lang="en-US" sz="3000" b="1" dirty="0">
+              <a:buNone/>
+            </a:pPr>
+            <a:r>
+              <a:rPr lang="en-US" sz="1350" dirty="0">
                 <a:solidFill>
                   <a:srgbClr val="4A3B30"/>
                 </a:solidFill>
-              </a:rPr>
-              <a:t>「戻ってこられた。今日も一つ、できた。」</a:t>
-            </a:r>
-            <a:endParaRPr lang="en-US" sz="2050" dirty="0"/>
-          </a:p>
-        </p:txBody>
-      </p:sp>
-      <p:sp>
-        <p:nvSpPr>
-          <p:cNvPr id="6" name="Text 4"/>
+                <a:latin typeface="Meiryo" pitchFamily="34" charset="0"/>
+                <a:ea typeface="Meiryo" pitchFamily="34" charset="-122"/>
+                <a:cs typeface="Meiryo" pitchFamily="34" charset="-120"/>
+              </a:rPr>
+              <a:t>どう活かせばいいか</a:t>
+            </a:r>
+            <a:endParaRPr lang="en-US" sz="1350" dirty="0"/>
+          </a:p>
+        </p:txBody>
+      </p:sp>
+      <p:sp>
+        <p:nvSpPr>
+          <p:cNvPr id="21" name="Shape 19"/>
+          <p:cNvSpPr/>
+          <p:nvPr/>
+        </p:nvSpPr>
+        <p:spPr>
+          <a:xfrm>
+            <a:off x="640080" y="5349240"/>
+            <a:ext cx="10911535" cy="658368"/>
+          </a:xfrm>
+          <a:prstGeom prst="roundRect">
+            <a:avLst>
+              <a:gd name="adj" fmla="val 19444"/>
+            </a:avLst>
+          </a:prstGeom>
+          <a:solidFill>
+            <a:srgbClr val="FDEEE7"/>
+          </a:solidFill>
+          <a:ln/>
+        </p:spPr>
+      </p:sp>
+      <p:sp>
+        <p:nvSpPr>
+          <p:cNvPr id="22" name="Text 20"/>
+          <p:cNvSpPr/>
+          <p:nvPr/>
+        </p:nvSpPr>
+        <p:spPr>
+          <a:xfrm>
+            <a:off x="960120" y="5349240"/>
+            <a:ext cx="10271455" cy="658368"/>
+          </a:xfrm>
+          <a:prstGeom prst="rect">
+            <a:avLst/>
+          </a:prstGeom>
+          <a:noFill/>
+          <a:ln/>
+        </p:spPr>
+        <p:txBody>
+          <a:bodyPr wrap="square" lIns="0" tIns="0" rIns="0" bIns="0" rtlCol="0" anchor="ctr"/>
+          <a:lstStyle/>
+          <a:p>
+            <a:pPr indent="0" marL="0">
+              <a:lnSpc>
+                <a:spcPts val="2100"/>
+              </a:lnSpc>
+              <a:buNone/>
+            </a:pPr>
+            <a:r>
+              <a:rPr lang="en-US" sz="1850" b="1" dirty="0">
+                <a:solidFill>
+                  <a:srgbClr val="DD6E4E"/>
+                </a:solidFill>
+                <a:latin typeface="Meiryo" pitchFamily="34" charset="0"/>
+                <a:ea typeface="Meiryo" pitchFamily="34" charset="-122"/>
+                <a:cs typeface="Meiryo" pitchFamily="34" charset="-120"/>
+              </a:rPr>
+              <a:t>予約方法は、ワークショップ当日にご案内します。</a:t>
+            </a:r>
+            <a:endParaRPr lang="en-US" sz="1850" dirty="0"/>
+          </a:p>
+        </p:txBody>
+      </p:sp>
+      <p:sp>
+        <p:nvSpPr>
+          <p:cNvPr id="23" name="Text 21"/>
           <p:cNvSpPr/>
           <p:nvPr/>
         </p:nvSpPr>
@@ -26759,7 +26982,7 @@
       </p:sp>
       <p:sp>
         <p:nvSpPr>
-          <p:cNvPr id="7" name="Text 5"/>
+          <p:cNvPr id="24" name="Text 22"/>
           <p:cNvSpPr/>
           <p:nvPr/>
         </p:nvSpPr>
@@ -26790,7 +27013,7 @@
                 <a:ea typeface="Meiryo" pitchFamily="34" charset="-122"/>
                 <a:cs typeface="Meiryo" pitchFamily="34" charset="-120"/>
               </a:rPr>
-              <a:t>42 / 43</a:t>
+              <a:t>42 / 44</a:t>
             </a:r>
             <a:endParaRPr lang="en-US" sz="1150" dirty="0"/>
           </a:p>
@@ -26835,6 +27058,341 @@
           <p:nvPr/>
         </p:nvSpPr>
         <p:spPr>
+          <a:xfrm rot="900000">
+            <a:off x="11109960" y="-685800"/>
+            <a:ext cx="1828800" cy="1828800"/>
+          </a:xfrm>
+          <a:prstGeom prst="hexagon">
+            <a:avLst/>
+          </a:prstGeom>
+          <a:solidFill>
+            <a:srgbClr val="F0876A">
+              <a:alpha val="13000"/>
+            </a:srgbClr>
+          </a:solidFill>
+          <a:ln/>
+        </p:spPr>
+      </p:sp>
+      <p:sp>
+        <p:nvSpPr>
+          <p:cNvPr id="3" name="Shape 1"/>
+          <p:cNvSpPr/>
+          <p:nvPr/>
+        </p:nvSpPr>
+        <p:spPr>
+          <a:xfrm rot="720000">
+            <a:off x="-868680" y="5623560"/>
+            <a:ext cx="1737360" cy="1737360"/>
+          </a:xfrm>
+          <a:prstGeom prst="hexagon">
+            <a:avLst/>
+          </a:prstGeom>
+          <a:solidFill>
+            <a:srgbClr val="2F9188">
+              <a:alpha val="13000"/>
+            </a:srgbClr>
+          </a:solidFill>
+          <a:ln/>
+        </p:spPr>
+      </p:sp>
+      <p:sp>
+        <p:nvSpPr>
+          <p:cNvPr id="4" name="Text 2"/>
+          <p:cNvSpPr/>
+          <p:nvPr/>
+        </p:nvSpPr>
+        <p:spPr>
+          <a:xfrm>
+            <a:off x="640080" y="457200"/>
+            <a:ext cx="9144000" cy="320040"/>
+          </a:xfrm>
+          <a:prstGeom prst="rect">
+            <a:avLst/>
+          </a:prstGeom>
+          <a:noFill/>
+          <a:ln/>
+        </p:spPr>
+        <p:txBody>
+          <a:bodyPr wrap="square" lIns="0" tIns="0" rIns="0" bIns="0" rtlCol="0" anchor="ctr"/>
+          <a:lstStyle/>
+          <a:p>
+            <a:pPr indent="0" marL="0">
+              <a:buNone/>
+            </a:pPr>
+            <a:r>
+              <a:rPr lang="en-US" sz="1500" b="1" spc="300" kern="0" dirty="0">
+                <a:solidFill>
+                  <a:srgbClr val="DD6E4E"/>
+                </a:solidFill>
+                <a:latin typeface="Meiryo" pitchFamily="34" charset="0"/>
+                <a:ea typeface="Meiryo" pitchFamily="34" charset="-122"/>
+                <a:cs typeface="Meiryo" pitchFamily="34" charset="-120"/>
+              </a:rPr>
+              <a:t>最後に</a:t>
+            </a:r>
+            <a:endParaRPr lang="en-US" sz="1500" dirty="0"/>
+          </a:p>
+        </p:txBody>
+      </p:sp>
+      <p:sp>
+        <p:nvSpPr>
+          <p:cNvPr id="5" name="Text 3"/>
+          <p:cNvSpPr/>
+          <p:nvPr/>
+        </p:nvSpPr>
+        <p:spPr>
+          <a:xfrm>
+            <a:off x="1097280" y="1463040"/>
+            <a:ext cx="9997135" cy="4754880"/>
+          </a:xfrm>
+          <a:prstGeom prst="rect">
+            <a:avLst/>
+          </a:prstGeom>
+          <a:noFill/>
+          <a:ln/>
+        </p:spPr>
+        <p:txBody>
+          <a:bodyPr wrap="square" lIns="0" tIns="0" rIns="0" bIns="0" rtlCol="0" anchor="ctr"/>
+          <a:lstStyle/>
+          <a:p>
+            <a:pPr algn="ctr" indent="0" marL="0">
+              <a:lnSpc>
+                <a:spcPts val="3000"/>
+              </a:lnSpc>
+              <a:spcAft>
+                <a:spcPts val="1600"/>
+              </a:spcAft>
+              <a:buNone/>
+            </a:pPr>
+            <a:r>
+              <a:rPr lang="en-US" sz="2050" dirty="0">
+                <a:solidFill>
+                  <a:srgbClr val="4A3B30"/>
+                </a:solidFill>
+              </a:rPr>
+              <a:t>この90日間、一度も止まらなくていい。完璧じゃなくていい。</a:t>
+            </a:r>
+            <a:endParaRPr lang="en-US" sz="2050" dirty="0"/>
+          </a:p>
+          <a:p>
+            <a:pPr algn="ctr" indent="0" marL="0">
+              <a:lnSpc>
+                <a:spcPts val="3000"/>
+              </a:lnSpc>
+              <a:spcAft>
+                <a:spcPts val="1600"/>
+              </a:spcAft>
+              <a:buNone/>
+            </a:pPr>
+            <a:r>
+              <a:rPr lang="en-US" sz="2050" dirty="0">
+                <a:solidFill>
+                  <a:srgbClr val="4A3B30"/>
+                </a:solidFill>
+              </a:rPr>
+              <a:t>できない日があっていい。迷っていい。誰かに頼っていい。</a:t>
+            </a:r>
+            <a:endParaRPr lang="en-US" sz="2050" dirty="0"/>
+          </a:p>
+          <a:p>
+            <a:pPr algn="ctr" indent="0" marL="0">
+              <a:lnSpc>
+                <a:spcPts val="3000"/>
+              </a:lnSpc>
+              <a:spcAft>
+                <a:spcPts val="1600"/>
+              </a:spcAft>
+              <a:buNone/>
+            </a:pPr>
+            <a:r>
+              <a:rPr lang="en-US" sz="1850" dirty="0">
+                <a:solidFill>
+                  <a:srgbClr val="8A7A6C"/>
+                </a:solidFill>
+              </a:rPr>
+              <a:t>ただ、一つだけ。</a:t>
+            </a:r>
+            <a:endParaRPr lang="en-US" sz="2050" dirty="0"/>
+          </a:p>
+          <a:p>
+            <a:pPr algn="ctr" indent="0" marL="0">
+              <a:lnSpc>
+                <a:spcPts val="3000"/>
+              </a:lnSpc>
+              <a:spcAft>
+                <a:spcPts val="1600"/>
+              </a:spcAft>
+              <a:buNone/>
+            </a:pPr>
+            <a:r>
+              <a:rPr lang="en-US" sz="2550" b="1" dirty="0">
+                <a:solidFill>
+                  <a:srgbClr val="DD6E4E"/>
+                </a:solidFill>
+              </a:rPr>
+              <a:t>止まっても、また戻ってくる。</a:t>
+            </a:r>
+            <a:endParaRPr lang="en-US" sz="2050" dirty="0"/>
+          </a:p>
+          <a:p>
+            <a:pPr algn="ctr" indent="0" marL="0">
+              <a:lnSpc>
+                <a:spcPts val="3000"/>
+              </a:lnSpc>
+              <a:spcAft>
+                <a:spcPts val="1600"/>
+              </a:spcAft>
+              <a:buNone/>
+            </a:pPr>
+            <a:r>
+              <a:rPr lang="en-US" sz="1850" dirty="0">
+                <a:solidFill>
+                  <a:srgbClr val="8A7A6C"/>
+                </a:solidFill>
+              </a:rPr>
+              <a:t>そして戻ってきたとき、一緒に言いましょう。</a:t>
+            </a:r>
+            <a:endParaRPr lang="en-US" sz="2050" dirty="0"/>
+          </a:p>
+          <a:p>
+            <a:pPr algn="ctr" indent="0" marL="0">
+              <a:lnSpc>
+                <a:spcPts val="3000"/>
+              </a:lnSpc>
+              <a:spcAft>
+                <a:spcPts val="1600"/>
+              </a:spcAft>
+              <a:buNone/>
+            </a:pPr>
+            <a:r>
+              <a:rPr lang="en-US" sz="3000" b="1" dirty="0">
+                <a:solidFill>
+                  <a:srgbClr val="4A3B30"/>
+                </a:solidFill>
+              </a:rPr>
+              <a:t>「戻ってこられた。今日も一つ、できた。」</a:t>
+            </a:r>
+            <a:endParaRPr lang="en-US" sz="2050" dirty="0"/>
+          </a:p>
+        </p:txBody>
+      </p:sp>
+      <p:sp>
+        <p:nvSpPr>
+          <p:cNvPr id="6" name="Text 4"/>
+          <p:cNvSpPr/>
+          <p:nvPr/>
+        </p:nvSpPr>
+        <p:spPr>
+          <a:xfrm>
+            <a:off x="640080" y="6419088"/>
+            <a:ext cx="5486400" cy="292608"/>
+          </a:xfrm>
+          <a:prstGeom prst="rect">
+            <a:avLst/>
+          </a:prstGeom>
+          <a:noFill/>
+          <a:ln/>
+        </p:spPr>
+        <p:txBody>
+          <a:bodyPr wrap="square" lIns="0" tIns="0" rIns="0" bIns="0" rtlCol="0" anchor="ctr"/>
+          <a:lstStyle/>
+          <a:p>
+            <a:pPr algn="l" indent="0" marL="0">
+              <a:buNone/>
+            </a:pPr>
+            <a:r>
+              <a:rPr lang="en-US" sz="1150" dirty="0">
+                <a:solidFill>
+                  <a:srgbClr val="B7A99A"/>
+                </a:solidFill>
+                <a:latin typeface="Meiryo" pitchFamily="34" charset="0"/>
+                <a:ea typeface="Meiryo" pitchFamily="34" charset="-122"/>
+                <a:cs typeface="Meiryo" pitchFamily="34" charset="-120"/>
+              </a:rPr>
+              <a:t>できたのかけらワークショップ</a:t>
+            </a:r>
+            <a:endParaRPr lang="en-US" sz="1150" dirty="0"/>
+          </a:p>
+        </p:txBody>
+      </p:sp>
+      <p:sp>
+        <p:nvSpPr>
+          <p:cNvPr id="7" name="Text 5"/>
+          <p:cNvSpPr/>
+          <p:nvPr/>
+        </p:nvSpPr>
+        <p:spPr>
+          <a:xfrm>
+            <a:off x="10637215" y="6419088"/>
+            <a:ext cx="914400" cy="292608"/>
+          </a:xfrm>
+          <a:prstGeom prst="rect">
+            <a:avLst/>
+          </a:prstGeom>
+          <a:noFill/>
+          <a:ln/>
+        </p:spPr>
+        <p:txBody>
+          <a:bodyPr wrap="square" lIns="0" tIns="0" rIns="0" bIns="0" rtlCol="0" anchor="ctr"/>
+          <a:lstStyle/>
+          <a:p>
+            <a:pPr algn="r" indent="0" marL="0">
+              <a:buNone/>
+            </a:pPr>
+            <a:r>
+              <a:rPr lang="en-US" sz="1150" dirty="0">
+                <a:solidFill>
+                  <a:srgbClr val="B7A99A"/>
+                </a:solidFill>
+                <a:latin typeface="Meiryo" pitchFamily="34" charset="0"/>
+                <a:ea typeface="Meiryo" pitchFamily="34" charset="-122"/>
+                <a:cs typeface="Meiryo" pitchFamily="34" charset="-120"/>
+              </a:rPr>
+              <a:t>43 / 44</a:t>
+            </a:r>
+            <a:endParaRPr lang="en-US" sz="1150" dirty="0"/>
+          </a:p>
+        </p:txBody>
+      </p:sp>
+    </p:spTree>
+  </p:cSld>
+  <p:clrMapOvr>
+    <a:masterClrMapping/>
+  </p:clrMapOvr>
+</p:sld>
+</file>
+
+<file path=ppt/slides/slide44.xml><?xml version="1.0" encoding="utf-8"?>
+<p:sld xmlns:a="http://schemas.openxmlformats.org/drawingml/2006/main" xmlns:r="http://schemas.openxmlformats.org/officeDocument/2006/relationships" xmlns:p="http://schemas.openxmlformats.org/presentationml/2006/main">
+  <p:cSld name="Slide 44">
+    <p:bg>
+      <p:bgPr>
+        <a:solidFill>
+          <a:srgbClr val="FFF8F0"/>
+        </a:solidFill>
+      </p:bgPr>
+    </p:bg>
+    <p:spTree>
+      <p:nvGrpSpPr>
+        <p:cNvPr id="1" name=""/>
+        <p:cNvGrpSpPr/>
+        <p:nvPr/>
+      </p:nvGrpSpPr>
+      <p:grpSpPr>
+        <a:xfrm>
+          <a:off x="0" y="0"/>
+          <a:ext cx="0" cy="0"/>
+          <a:chOff x="0" y="0"/>
+          <a:chExt cx="0" cy="0"/>
+        </a:xfrm>
+      </p:grpSpPr>
+      <p:sp>
+        <p:nvSpPr>
+          <p:cNvPr id="2" name="Shape 0"/>
+          <p:cNvSpPr/>
+          <p:nvPr/>
+        </p:nvSpPr>
+        <p:spPr>
           <a:xfrm rot="600000">
             <a:off x="-1097280" y="-1005840"/>
             <a:ext cx="2743200" cy="2743200"/>
@@ -27239,7 +27797,7 @@
                 <a:ea typeface="Meiryo" pitchFamily="34" charset="-122"/>
                 <a:cs typeface="Meiryo" pitchFamily="34" charset="-120"/>
               </a:rPr>
-              <a:t>43 / 43</a:t>
+              <a:t>44 / 44</a:t>
             </a:r>
             <a:endParaRPr lang="en-US" sz="1150" dirty="0"/>
           </a:p>
@@ -27901,7 +28459,7 @@
                 <a:ea typeface="Meiryo" pitchFamily="34" charset="-122"/>
                 <a:cs typeface="Meiryo" pitchFamily="34" charset="-120"/>
               </a:rPr>
-              <a:t>5 / 43</a:t>
+              <a:t>5 / 44</a:t>
             </a:r>
             <a:endParaRPr lang="en-US" sz="1150" dirty="0"/>
           </a:p>
@@ -28340,7 +28898,7 @@
                 <a:ea typeface="Meiryo" pitchFamily="34" charset="-122"/>
                 <a:cs typeface="Meiryo" pitchFamily="34" charset="-120"/>
               </a:rPr>
-              <a:t>6 / 43</a:t>
+              <a:t>6 / 44</a:t>
             </a:r>
             <a:endParaRPr lang="en-US" sz="1150" dirty="0"/>
           </a:p>
@@ -29066,7 +29624,7 @@
                 <a:ea typeface="Meiryo" pitchFamily="34" charset="-122"/>
                 <a:cs typeface="Meiryo" pitchFamily="34" charset="-120"/>
               </a:rPr>
-              <a:t>7 / 43</a:t>
+              <a:t>7 / 44</a:t>
             </a:r>
             <a:endParaRPr lang="en-US" sz="1150" dirty="0"/>
           </a:p>
@@ -29852,7 +30410,7 @@
                 <a:ea typeface="Meiryo" pitchFamily="34" charset="-122"/>
                 <a:cs typeface="Meiryo" pitchFamily="34" charset="-120"/>
               </a:rPr>
-              <a:t>8 / 43</a:t>
+              <a:t>8 / 44</a:t>
             </a:r>
             <a:endParaRPr lang="en-US" sz="1150" dirty="0"/>
           </a:p>
@@ -30644,7 +31202,7 @@
                 <a:ea typeface="Meiryo" pitchFamily="34" charset="-122"/>
                 <a:cs typeface="Meiryo" pitchFamily="34" charset="-120"/>
               </a:rPr>
-              <a:t>9 / 43</a:t>
+              <a:t>9 / 44</a:t>
             </a:r>
             <a:endParaRPr lang="en-US" sz="1150" dirty="0"/>
           </a:p>
